--- a/面向对象编程.pptx
+++ b/面向对象编程.pptx
@@ -112,6 +112,11 @@
       </a:defRPr>
     </a:lvl9pPr>
   </p:defaultTextStyle>
+  <p:extLst>
+    <p:ext uri="{EFAFB233-063F-42B5-8137-9DF3F51BA10A}">
+      <p15:sldGuideLst xmlns:p15="http://schemas.microsoft.com/office/powerpoint/2012/main"/>
+    </p:ext>
+  </p:extLst>
 </p:presentation>
 </file>
 
@@ -262,7 +267,7 @@
           <a:p>
             <a:fld id="{8EF5B3A6-BFA0-4127-96C0-E501E6E8E40E}" type="datetimeFigureOut">
               <a:rPr lang="zh-CN" altLang="en-US" smtClean="0"/>
-              <a:t>2026/04/11</a:t>
+              <a:t>2026/04/12</a:t>
             </a:fld>
             <a:endParaRPr lang="zh-CN" altLang="en-US"/>
           </a:p>
@@ -460,7 +465,7 @@
           <a:p>
             <a:fld id="{8EF5B3A6-BFA0-4127-96C0-E501E6E8E40E}" type="datetimeFigureOut">
               <a:rPr lang="zh-CN" altLang="en-US" smtClean="0"/>
-              <a:t>2026/04/11</a:t>
+              <a:t>2026/04/12</a:t>
             </a:fld>
             <a:endParaRPr lang="zh-CN" altLang="en-US"/>
           </a:p>
@@ -668,7 +673,7 @@
           <a:p>
             <a:fld id="{8EF5B3A6-BFA0-4127-96C0-E501E6E8E40E}" type="datetimeFigureOut">
               <a:rPr lang="zh-CN" altLang="en-US" smtClean="0"/>
-              <a:t>2026/04/11</a:t>
+              <a:t>2026/04/12</a:t>
             </a:fld>
             <a:endParaRPr lang="zh-CN" altLang="en-US"/>
           </a:p>
@@ -866,7 +871,7 @@
           <a:p>
             <a:fld id="{8EF5B3A6-BFA0-4127-96C0-E501E6E8E40E}" type="datetimeFigureOut">
               <a:rPr lang="zh-CN" altLang="en-US" smtClean="0"/>
-              <a:t>2026/04/11</a:t>
+              <a:t>2026/04/12</a:t>
             </a:fld>
             <a:endParaRPr lang="zh-CN" altLang="en-US"/>
           </a:p>
@@ -1141,7 +1146,7 @@
           <a:p>
             <a:fld id="{8EF5B3A6-BFA0-4127-96C0-E501E6E8E40E}" type="datetimeFigureOut">
               <a:rPr lang="zh-CN" altLang="en-US" smtClean="0"/>
-              <a:t>2026/04/11</a:t>
+              <a:t>2026/04/12</a:t>
             </a:fld>
             <a:endParaRPr lang="zh-CN" altLang="en-US"/>
           </a:p>
@@ -1406,7 +1411,7 @@
           <a:p>
             <a:fld id="{8EF5B3A6-BFA0-4127-96C0-E501E6E8E40E}" type="datetimeFigureOut">
               <a:rPr lang="zh-CN" altLang="en-US" smtClean="0"/>
-              <a:t>2026/04/11</a:t>
+              <a:t>2026/04/12</a:t>
             </a:fld>
             <a:endParaRPr lang="zh-CN" altLang="en-US"/>
           </a:p>
@@ -1818,7 +1823,7 @@
           <a:p>
             <a:fld id="{8EF5B3A6-BFA0-4127-96C0-E501E6E8E40E}" type="datetimeFigureOut">
               <a:rPr lang="zh-CN" altLang="en-US" smtClean="0"/>
-              <a:t>2026/04/11</a:t>
+              <a:t>2026/04/12</a:t>
             </a:fld>
             <a:endParaRPr lang="zh-CN" altLang="en-US"/>
           </a:p>
@@ -1959,7 +1964,7 @@
           <a:p>
             <a:fld id="{8EF5B3A6-BFA0-4127-96C0-E501E6E8E40E}" type="datetimeFigureOut">
               <a:rPr lang="zh-CN" altLang="en-US" smtClean="0"/>
-              <a:t>2026/04/11</a:t>
+              <a:t>2026/04/12</a:t>
             </a:fld>
             <a:endParaRPr lang="zh-CN" altLang="en-US"/>
           </a:p>
@@ -2072,7 +2077,7 @@
           <a:p>
             <a:fld id="{8EF5B3A6-BFA0-4127-96C0-E501E6E8E40E}" type="datetimeFigureOut">
               <a:rPr lang="zh-CN" altLang="en-US" smtClean="0"/>
-              <a:t>2026/04/11</a:t>
+              <a:t>2026/04/12</a:t>
             </a:fld>
             <a:endParaRPr lang="zh-CN" altLang="en-US"/>
           </a:p>
@@ -2383,7 +2388,7 @@
           <a:p>
             <a:fld id="{8EF5B3A6-BFA0-4127-96C0-E501E6E8E40E}" type="datetimeFigureOut">
               <a:rPr lang="zh-CN" altLang="en-US" smtClean="0"/>
-              <a:t>2026/04/11</a:t>
+              <a:t>2026/04/12</a:t>
             </a:fld>
             <a:endParaRPr lang="zh-CN" altLang="en-US"/>
           </a:p>
@@ -2671,7 +2676,7 @@
           <a:p>
             <a:fld id="{8EF5B3A6-BFA0-4127-96C0-E501E6E8E40E}" type="datetimeFigureOut">
               <a:rPr lang="zh-CN" altLang="en-US" smtClean="0"/>
-              <a:t>2026/04/11</a:t>
+              <a:t>2026/04/12</a:t>
             </a:fld>
             <a:endParaRPr lang="zh-CN" altLang="en-US"/>
           </a:p>
@@ -2912,7 +2917,7 @@
           <a:p>
             <a:fld id="{8EF5B3A6-BFA0-4127-96C0-E501E6E8E40E}" type="datetimeFigureOut">
               <a:rPr lang="zh-CN" altLang="en-US" smtClean="0"/>
-              <a:t>2026/04/11</a:t>
+              <a:t>2026/04/12</a:t>
             </a:fld>
             <a:endParaRPr lang="zh-CN" altLang="en-US"/>
           </a:p>

--- a/面向对象编程.pptx
+++ b/面向对象编程.pptx
@@ -13,7 +13,10 @@
     <p:sldId id="262" r:id="rId7"/>
     <p:sldId id="263" r:id="rId8"/>
     <p:sldId id="264" r:id="rId9"/>
-    <p:sldId id="260" r:id="rId10"/>
+    <p:sldId id="265" r:id="rId10"/>
+    <p:sldId id="266" r:id="rId11"/>
+    <p:sldId id="267" r:id="rId12"/>
+    <p:sldId id="260" r:id="rId13"/>
   </p:sldIdLst>
   <p:sldSz cx="12192000" cy="6858000"/>
   <p:notesSz cx="6858000" cy="9144000"/>
@@ -267,7 +270,7 @@
           <a:p>
             <a:fld id="{8EF5B3A6-BFA0-4127-96C0-E501E6E8E40E}" type="datetimeFigureOut">
               <a:rPr lang="zh-CN" altLang="en-US" smtClean="0"/>
-              <a:t>2026/04/12</a:t>
+              <a:t>2026/04/19</a:t>
             </a:fld>
             <a:endParaRPr lang="zh-CN" altLang="en-US"/>
           </a:p>
@@ -465,7 +468,7 @@
           <a:p>
             <a:fld id="{8EF5B3A6-BFA0-4127-96C0-E501E6E8E40E}" type="datetimeFigureOut">
               <a:rPr lang="zh-CN" altLang="en-US" smtClean="0"/>
-              <a:t>2026/04/12</a:t>
+              <a:t>2026/04/19</a:t>
             </a:fld>
             <a:endParaRPr lang="zh-CN" altLang="en-US"/>
           </a:p>
@@ -673,7 +676,7 @@
           <a:p>
             <a:fld id="{8EF5B3A6-BFA0-4127-96C0-E501E6E8E40E}" type="datetimeFigureOut">
               <a:rPr lang="zh-CN" altLang="en-US" smtClean="0"/>
-              <a:t>2026/04/12</a:t>
+              <a:t>2026/04/19</a:t>
             </a:fld>
             <a:endParaRPr lang="zh-CN" altLang="en-US"/>
           </a:p>
@@ -871,7 +874,7 @@
           <a:p>
             <a:fld id="{8EF5B3A6-BFA0-4127-96C0-E501E6E8E40E}" type="datetimeFigureOut">
               <a:rPr lang="zh-CN" altLang="en-US" smtClean="0"/>
-              <a:t>2026/04/12</a:t>
+              <a:t>2026/04/19</a:t>
             </a:fld>
             <a:endParaRPr lang="zh-CN" altLang="en-US"/>
           </a:p>
@@ -1146,7 +1149,7 @@
           <a:p>
             <a:fld id="{8EF5B3A6-BFA0-4127-96C0-E501E6E8E40E}" type="datetimeFigureOut">
               <a:rPr lang="zh-CN" altLang="en-US" smtClean="0"/>
-              <a:t>2026/04/12</a:t>
+              <a:t>2026/04/19</a:t>
             </a:fld>
             <a:endParaRPr lang="zh-CN" altLang="en-US"/>
           </a:p>
@@ -1411,7 +1414,7 @@
           <a:p>
             <a:fld id="{8EF5B3A6-BFA0-4127-96C0-E501E6E8E40E}" type="datetimeFigureOut">
               <a:rPr lang="zh-CN" altLang="en-US" smtClean="0"/>
-              <a:t>2026/04/12</a:t>
+              <a:t>2026/04/19</a:t>
             </a:fld>
             <a:endParaRPr lang="zh-CN" altLang="en-US"/>
           </a:p>
@@ -1823,7 +1826,7 @@
           <a:p>
             <a:fld id="{8EF5B3A6-BFA0-4127-96C0-E501E6E8E40E}" type="datetimeFigureOut">
               <a:rPr lang="zh-CN" altLang="en-US" smtClean="0"/>
-              <a:t>2026/04/12</a:t>
+              <a:t>2026/04/19</a:t>
             </a:fld>
             <a:endParaRPr lang="zh-CN" altLang="en-US"/>
           </a:p>
@@ -1964,7 +1967,7 @@
           <a:p>
             <a:fld id="{8EF5B3A6-BFA0-4127-96C0-E501E6E8E40E}" type="datetimeFigureOut">
               <a:rPr lang="zh-CN" altLang="en-US" smtClean="0"/>
-              <a:t>2026/04/12</a:t>
+              <a:t>2026/04/19</a:t>
             </a:fld>
             <a:endParaRPr lang="zh-CN" altLang="en-US"/>
           </a:p>
@@ -2077,7 +2080,7 @@
           <a:p>
             <a:fld id="{8EF5B3A6-BFA0-4127-96C0-E501E6E8E40E}" type="datetimeFigureOut">
               <a:rPr lang="zh-CN" altLang="en-US" smtClean="0"/>
-              <a:t>2026/04/12</a:t>
+              <a:t>2026/04/19</a:t>
             </a:fld>
             <a:endParaRPr lang="zh-CN" altLang="en-US"/>
           </a:p>
@@ -2388,7 +2391,7 @@
           <a:p>
             <a:fld id="{8EF5B3A6-BFA0-4127-96C0-E501E6E8E40E}" type="datetimeFigureOut">
               <a:rPr lang="zh-CN" altLang="en-US" smtClean="0"/>
-              <a:t>2026/04/12</a:t>
+              <a:t>2026/04/19</a:t>
             </a:fld>
             <a:endParaRPr lang="zh-CN" altLang="en-US"/>
           </a:p>
@@ -2676,7 +2679,7 @@
           <a:p>
             <a:fld id="{8EF5B3A6-BFA0-4127-96C0-E501E6E8E40E}" type="datetimeFigureOut">
               <a:rPr lang="zh-CN" altLang="en-US" smtClean="0"/>
-              <a:t>2026/04/12</a:t>
+              <a:t>2026/04/19</a:t>
             </a:fld>
             <a:endParaRPr lang="zh-CN" altLang="en-US"/>
           </a:p>
@@ -2917,7 +2920,7 @@
           <a:p>
             <a:fld id="{8EF5B3A6-BFA0-4127-96C0-E501E6E8E40E}" type="datetimeFigureOut">
               <a:rPr lang="zh-CN" altLang="en-US" smtClean="0"/>
-              <a:t>2026/04/12</a:t>
+              <a:t>2026/04/19</a:t>
             </a:fld>
             <a:endParaRPr lang="zh-CN" altLang="en-US"/>
           </a:p>
@@ -3486,6 +3489,3672 @@
     <p:extLst>
       <p:ext uri="{BB962C8B-B14F-4D97-AF65-F5344CB8AC3E}">
         <p14:creationId xmlns:p14="http://schemas.microsoft.com/office/powerpoint/2010/main" val="3378063685"/>
+      </p:ext>
+    </p:extLst>
+  </p:cSld>
+  <p:clrMapOvr>
+    <a:masterClrMapping/>
+  </p:clrMapOvr>
+</p:sld>
+</file>
+
+<file path=ppt/slides/slide10.xml><?xml version="1.0" encoding="utf-8"?>
+<p:sld xmlns:a="http://schemas.openxmlformats.org/drawingml/2006/main" xmlns:r="http://schemas.openxmlformats.org/officeDocument/2006/relationships" xmlns:p="http://schemas.openxmlformats.org/presentationml/2006/main">
+  <p:cSld>
+    <p:spTree>
+      <p:nvGrpSpPr>
+        <p:cNvPr id="1" name=""/>
+        <p:cNvGrpSpPr/>
+        <p:nvPr/>
+      </p:nvGrpSpPr>
+      <p:grpSpPr>
+        <a:xfrm>
+          <a:off x="0" y="0"/>
+          <a:ext cx="0" cy="0"/>
+          <a:chOff x="0" y="0"/>
+          <a:chExt cx="0" cy="0"/>
+        </a:xfrm>
+      </p:grpSpPr>
+      <p:sp>
+        <p:nvSpPr>
+          <p:cNvPr id="2" name="矩形 1">
+            <a:extLst>
+              <a:ext uri="{FF2B5EF4-FFF2-40B4-BE49-F238E27FC236}">
+                <a16:creationId xmlns:a16="http://schemas.microsoft.com/office/drawing/2014/main" id="{0415D4A6-3D02-5BC1-031F-40F029E26D36}"/>
+              </a:ext>
+            </a:extLst>
+          </p:cNvPr>
+          <p:cNvSpPr/>
+          <p:nvPr/>
+        </p:nvSpPr>
+        <p:spPr>
+          <a:xfrm>
+            <a:off x="203254" y="154635"/>
+            <a:ext cx="2492990" cy="646331"/>
+          </a:xfrm>
+          <a:prstGeom prst="rect">
+            <a:avLst/>
+          </a:prstGeom>
+          <a:noFill/>
+        </p:spPr>
+        <p:txBody>
+          <a:bodyPr wrap="none" lIns="91440" tIns="45720" rIns="91440" bIns="45720">
+            <a:spAutoFit/>
+          </a:bodyPr>
+          <a:lstStyle/>
+          <a:p>
+            <a:r>
+              <a:rPr lang="zh-CN" altLang="en-US" sz="3600" b="1" u="sng" dirty="0">
+                <a:ln w="0"/>
+                <a:effectLst>
+                  <a:outerShdw blurRad="38100" dist="19050" dir="2700000" algn="tl" rotWithShape="0">
+                    <a:schemeClr val="dk1">
+                      <a:alpha val="40000"/>
+                    </a:schemeClr>
+                  </a:outerShdw>
+                </a:effectLst>
+              </a:rPr>
+              <a:t>继承与多态</a:t>
+            </a:r>
+            <a:endParaRPr lang="zh-CN" altLang="en-US" sz="3600" b="1" u="sng" cap="none" spc="0" dirty="0">
+              <a:ln w="0"/>
+              <a:solidFill>
+                <a:schemeClr val="tx1"/>
+              </a:solidFill>
+              <a:effectLst>
+                <a:outerShdw blurRad="38100" dist="19050" dir="2700000" algn="tl" rotWithShape="0">
+                  <a:schemeClr val="dk1">
+                    <a:alpha val="40000"/>
+                  </a:schemeClr>
+                </a:outerShdw>
+              </a:effectLst>
+            </a:endParaRPr>
+          </a:p>
+        </p:txBody>
+      </p:sp>
+      <p:sp>
+        <p:nvSpPr>
+          <p:cNvPr id="3" name="矩形: 圆角 2">
+            <a:extLst>
+              <a:ext uri="{FF2B5EF4-FFF2-40B4-BE49-F238E27FC236}">
+                <a16:creationId xmlns:a16="http://schemas.microsoft.com/office/drawing/2014/main" id="{CA79E7EC-D89A-1FE3-B61F-6075B815522A}"/>
+              </a:ext>
+            </a:extLst>
+          </p:cNvPr>
+          <p:cNvSpPr/>
+          <p:nvPr/>
+        </p:nvSpPr>
+        <p:spPr>
+          <a:xfrm>
+            <a:off x="162308" y="1020419"/>
+            <a:ext cx="3437665" cy="4962218"/>
+          </a:xfrm>
+          <a:prstGeom prst="roundRect">
+            <a:avLst/>
+          </a:prstGeom>
+          <a:solidFill>
+            <a:schemeClr val="accent1">
+              <a:lumMod val="20000"/>
+              <a:lumOff val="80000"/>
+            </a:schemeClr>
+          </a:solidFill>
+        </p:spPr>
+        <p:style>
+          <a:lnRef idx="2">
+            <a:schemeClr val="accent1">
+              <a:shade val="15000"/>
+            </a:schemeClr>
+          </a:lnRef>
+          <a:fillRef idx="1">
+            <a:schemeClr val="accent1"/>
+          </a:fillRef>
+          <a:effectRef idx="0">
+            <a:schemeClr val="accent1"/>
+          </a:effectRef>
+          <a:fontRef idx="minor">
+            <a:schemeClr val="lt1"/>
+          </a:fontRef>
+        </p:style>
+        <p:txBody>
+          <a:bodyPr rtlCol="0" anchor="ctr"/>
+          <a:lstStyle/>
+          <a:p>
+            <a:endParaRPr lang="zh-CN" altLang="en-US" b="1" dirty="0">
+              <a:solidFill>
+                <a:schemeClr val="tx1"/>
+              </a:solidFill>
+            </a:endParaRPr>
+          </a:p>
+        </p:txBody>
+      </p:sp>
+      <p:sp>
+        <p:nvSpPr>
+          <p:cNvPr id="5" name="文本框 4">
+            <a:extLst>
+              <a:ext uri="{FF2B5EF4-FFF2-40B4-BE49-F238E27FC236}">
+                <a16:creationId xmlns:a16="http://schemas.microsoft.com/office/drawing/2014/main" id="{EC813794-3AC8-B0C2-F545-869684238D22}"/>
+              </a:ext>
+            </a:extLst>
+          </p:cNvPr>
+          <p:cNvSpPr txBox="1"/>
+          <p:nvPr/>
+        </p:nvSpPr>
+        <p:spPr>
+          <a:xfrm>
+            <a:off x="224024" y="1169385"/>
+            <a:ext cx="933269" cy="523220"/>
+          </a:xfrm>
+          <a:prstGeom prst="rect">
+            <a:avLst/>
+          </a:prstGeom>
+          <a:noFill/>
+        </p:spPr>
+        <p:txBody>
+          <a:bodyPr wrap="none" rtlCol="0">
+            <a:spAutoFit/>
+          </a:bodyPr>
+          <a:lstStyle/>
+          <a:p>
+            <a:r>
+              <a:rPr lang="en-US" altLang="zh-CN" sz="2800" b="1" dirty="0">
+                <a:latin typeface="微软雅黑" panose="020B0503020204020204" pitchFamily="34" charset="-122"/>
+                <a:ea typeface="微软雅黑" panose="020B0503020204020204" pitchFamily="34" charset="-122"/>
+              </a:rPr>
+              <a:t>Skill</a:t>
+            </a:r>
+            <a:endParaRPr lang="zh-CN" altLang="en-US" sz="2800" b="1" dirty="0">
+              <a:latin typeface="微软雅黑" panose="020B0503020204020204" pitchFamily="34" charset="-122"/>
+              <a:ea typeface="微软雅黑" panose="020B0503020204020204" pitchFamily="34" charset="-122"/>
+            </a:endParaRPr>
+          </a:p>
+        </p:txBody>
+      </p:sp>
+      <p:sp>
+        <p:nvSpPr>
+          <p:cNvPr id="7" name="矩形: 圆角 6">
+            <a:extLst>
+              <a:ext uri="{FF2B5EF4-FFF2-40B4-BE49-F238E27FC236}">
+                <a16:creationId xmlns:a16="http://schemas.microsoft.com/office/drawing/2014/main" id="{1F3BEA71-0414-9049-2668-FEA3F50268ED}"/>
+              </a:ext>
+            </a:extLst>
+          </p:cNvPr>
+          <p:cNvSpPr/>
+          <p:nvPr/>
+        </p:nvSpPr>
+        <p:spPr>
+          <a:xfrm>
+            <a:off x="4375314" y="1020419"/>
+            <a:ext cx="4951644" cy="1344374"/>
+          </a:xfrm>
+          <a:prstGeom prst="roundRect">
+            <a:avLst/>
+          </a:prstGeom>
+          <a:solidFill>
+            <a:schemeClr val="accent5">
+              <a:lumMod val="20000"/>
+              <a:lumOff val="80000"/>
+            </a:schemeClr>
+          </a:solidFill>
+        </p:spPr>
+        <p:style>
+          <a:lnRef idx="2">
+            <a:schemeClr val="accent1">
+              <a:shade val="15000"/>
+            </a:schemeClr>
+          </a:lnRef>
+          <a:fillRef idx="1">
+            <a:schemeClr val="accent1"/>
+          </a:fillRef>
+          <a:effectRef idx="0">
+            <a:schemeClr val="accent1"/>
+          </a:effectRef>
+          <a:fontRef idx="minor">
+            <a:schemeClr val="lt1"/>
+          </a:fontRef>
+        </p:style>
+        <p:txBody>
+          <a:bodyPr rtlCol="0" anchor="ctr"/>
+          <a:lstStyle/>
+          <a:p>
+            <a:endParaRPr lang="zh-CN" altLang="en-US" b="1" dirty="0">
+              <a:solidFill>
+                <a:schemeClr val="tx1"/>
+              </a:solidFill>
+            </a:endParaRPr>
+          </a:p>
+        </p:txBody>
+      </p:sp>
+      <p:sp>
+        <p:nvSpPr>
+          <p:cNvPr id="8" name="文本框 7">
+            <a:extLst>
+              <a:ext uri="{FF2B5EF4-FFF2-40B4-BE49-F238E27FC236}">
+                <a16:creationId xmlns:a16="http://schemas.microsoft.com/office/drawing/2014/main" id="{04902D39-5572-A6FC-FB12-D980635A89BC}"/>
+              </a:ext>
+            </a:extLst>
+          </p:cNvPr>
+          <p:cNvSpPr txBox="1"/>
+          <p:nvPr/>
+        </p:nvSpPr>
+        <p:spPr>
+          <a:xfrm>
+            <a:off x="4481577" y="1093307"/>
+            <a:ext cx="2797561" cy="461665"/>
+          </a:xfrm>
+          <a:prstGeom prst="rect">
+            <a:avLst/>
+          </a:prstGeom>
+          <a:noFill/>
+        </p:spPr>
+        <p:txBody>
+          <a:bodyPr wrap="none" rtlCol="0">
+            <a:spAutoFit/>
+          </a:bodyPr>
+          <a:lstStyle/>
+          <a:p>
+            <a:r>
+              <a:rPr lang="en-US" altLang="zh-CN" sz="2400" b="1" dirty="0" err="1">
+                <a:latin typeface="微软雅黑" panose="020B0503020204020204" pitchFamily="34" charset="-122"/>
+                <a:ea typeface="微软雅黑" panose="020B0503020204020204" pitchFamily="34" charset="-122"/>
+              </a:rPr>
+              <a:t>InstantSkill</a:t>
+            </a:r>
+            <a:r>
+              <a:rPr lang="en-US" altLang="zh-CN" sz="2400" b="1" dirty="0">
+                <a:latin typeface="微软雅黑" panose="020B0503020204020204" pitchFamily="34" charset="-122"/>
+                <a:ea typeface="微软雅黑" panose="020B0503020204020204" pitchFamily="34" charset="-122"/>
+              </a:rPr>
+              <a:t>(Skill)</a:t>
+            </a:r>
+            <a:endParaRPr lang="zh-CN" altLang="en-US" sz="2400" b="1" dirty="0">
+              <a:latin typeface="微软雅黑" panose="020B0503020204020204" pitchFamily="34" charset="-122"/>
+              <a:ea typeface="微软雅黑" panose="020B0503020204020204" pitchFamily="34" charset="-122"/>
+            </a:endParaRPr>
+          </a:p>
+        </p:txBody>
+      </p:sp>
+      <p:sp>
+        <p:nvSpPr>
+          <p:cNvPr id="9" name="矩形: 圆角 8">
+            <a:extLst>
+              <a:ext uri="{FF2B5EF4-FFF2-40B4-BE49-F238E27FC236}">
+                <a16:creationId xmlns:a16="http://schemas.microsoft.com/office/drawing/2014/main" id="{15658384-2627-6E01-EEFF-5FFDBB5A0787}"/>
+              </a:ext>
+            </a:extLst>
+          </p:cNvPr>
+          <p:cNvSpPr/>
+          <p:nvPr/>
+        </p:nvSpPr>
+        <p:spPr>
+          <a:xfrm>
+            <a:off x="4375314" y="2829341"/>
+            <a:ext cx="4951644" cy="1344374"/>
+          </a:xfrm>
+          <a:prstGeom prst="roundRect">
+            <a:avLst/>
+          </a:prstGeom>
+          <a:solidFill>
+            <a:schemeClr val="accent6">
+              <a:lumMod val="20000"/>
+              <a:lumOff val="80000"/>
+            </a:schemeClr>
+          </a:solidFill>
+        </p:spPr>
+        <p:style>
+          <a:lnRef idx="2">
+            <a:schemeClr val="accent1">
+              <a:shade val="15000"/>
+            </a:schemeClr>
+          </a:lnRef>
+          <a:fillRef idx="1">
+            <a:schemeClr val="accent1"/>
+          </a:fillRef>
+          <a:effectRef idx="0">
+            <a:schemeClr val="accent1"/>
+          </a:effectRef>
+          <a:fontRef idx="minor">
+            <a:schemeClr val="lt1"/>
+          </a:fontRef>
+        </p:style>
+        <p:txBody>
+          <a:bodyPr rtlCol="0" anchor="ctr"/>
+          <a:lstStyle/>
+          <a:p>
+            <a:endParaRPr lang="zh-CN" altLang="en-US" b="1" dirty="0">
+              <a:solidFill>
+                <a:schemeClr val="tx1"/>
+              </a:solidFill>
+            </a:endParaRPr>
+          </a:p>
+        </p:txBody>
+      </p:sp>
+      <p:sp>
+        <p:nvSpPr>
+          <p:cNvPr id="10" name="文本框 9">
+            <a:extLst>
+              <a:ext uri="{FF2B5EF4-FFF2-40B4-BE49-F238E27FC236}">
+                <a16:creationId xmlns:a16="http://schemas.microsoft.com/office/drawing/2014/main" id="{2D4EF504-57DA-7C6A-56BF-E9D9D047D950}"/>
+              </a:ext>
+            </a:extLst>
+          </p:cNvPr>
+          <p:cNvSpPr txBox="1"/>
+          <p:nvPr/>
+        </p:nvSpPr>
+        <p:spPr>
+          <a:xfrm>
+            <a:off x="4481577" y="2902229"/>
+            <a:ext cx="3172663" cy="461665"/>
+          </a:xfrm>
+          <a:prstGeom prst="rect">
+            <a:avLst/>
+          </a:prstGeom>
+          <a:noFill/>
+        </p:spPr>
+        <p:txBody>
+          <a:bodyPr wrap="none" rtlCol="0">
+            <a:spAutoFit/>
+          </a:bodyPr>
+          <a:lstStyle/>
+          <a:p>
+            <a:r>
+              <a:rPr lang="en-US" altLang="zh-CN" sz="2400" b="1" dirty="0" err="1">
+                <a:latin typeface="微软雅黑" panose="020B0503020204020204" pitchFamily="34" charset="-122"/>
+                <a:ea typeface="微软雅黑" panose="020B0503020204020204" pitchFamily="34" charset="-122"/>
+              </a:rPr>
+              <a:t>DurationSkill</a:t>
+            </a:r>
+            <a:r>
+              <a:rPr lang="en-US" altLang="zh-CN" sz="2400" b="1" dirty="0">
+                <a:latin typeface="微软雅黑" panose="020B0503020204020204" pitchFamily="34" charset="-122"/>
+                <a:ea typeface="微软雅黑" panose="020B0503020204020204" pitchFamily="34" charset="-122"/>
+              </a:rPr>
+              <a:t> (Skill)</a:t>
+            </a:r>
+            <a:endParaRPr lang="zh-CN" altLang="en-US" sz="2400" b="1" dirty="0">
+              <a:latin typeface="微软雅黑" panose="020B0503020204020204" pitchFamily="34" charset="-122"/>
+              <a:ea typeface="微软雅黑" panose="020B0503020204020204" pitchFamily="34" charset="-122"/>
+            </a:endParaRPr>
+          </a:p>
+        </p:txBody>
+      </p:sp>
+      <p:sp>
+        <p:nvSpPr>
+          <p:cNvPr id="11" name="矩形: 圆角 10">
+            <a:extLst>
+              <a:ext uri="{FF2B5EF4-FFF2-40B4-BE49-F238E27FC236}">
+                <a16:creationId xmlns:a16="http://schemas.microsoft.com/office/drawing/2014/main" id="{36B82C2E-A670-B6A9-E881-09BD402E7D57}"/>
+              </a:ext>
+            </a:extLst>
+          </p:cNvPr>
+          <p:cNvSpPr/>
+          <p:nvPr/>
+        </p:nvSpPr>
+        <p:spPr>
+          <a:xfrm>
+            <a:off x="4375314" y="4638263"/>
+            <a:ext cx="4951644" cy="1344374"/>
+          </a:xfrm>
+          <a:prstGeom prst="roundRect">
+            <a:avLst/>
+          </a:prstGeom>
+          <a:solidFill>
+            <a:schemeClr val="accent2">
+              <a:lumMod val="20000"/>
+              <a:lumOff val="80000"/>
+            </a:schemeClr>
+          </a:solidFill>
+        </p:spPr>
+        <p:style>
+          <a:lnRef idx="2">
+            <a:schemeClr val="accent1">
+              <a:shade val="15000"/>
+            </a:schemeClr>
+          </a:lnRef>
+          <a:fillRef idx="1">
+            <a:schemeClr val="accent1"/>
+          </a:fillRef>
+          <a:effectRef idx="0">
+            <a:schemeClr val="accent1"/>
+          </a:effectRef>
+          <a:fontRef idx="minor">
+            <a:schemeClr val="lt1"/>
+          </a:fontRef>
+        </p:style>
+        <p:txBody>
+          <a:bodyPr rtlCol="0" anchor="ctr"/>
+          <a:lstStyle/>
+          <a:p>
+            <a:endParaRPr lang="zh-CN" altLang="en-US" b="1" dirty="0">
+              <a:solidFill>
+                <a:schemeClr val="tx1"/>
+              </a:solidFill>
+            </a:endParaRPr>
+          </a:p>
+        </p:txBody>
+      </p:sp>
+      <p:sp>
+        <p:nvSpPr>
+          <p:cNvPr id="12" name="文本框 11">
+            <a:extLst>
+              <a:ext uri="{FF2B5EF4-FFF2-40B4-BE49-F238E27FC236}">
+                <a16:creationId xmlns:a16="http://schemas.microsoft.com/office/drawing/2014/main" id="{70D669C2-84A3-6345-0747-84AE71A252A5}"/>
+              </a:ext>
+            </a:extLst>
+          </p:cNvPr>
+          <p:cNvSpPr txBox="1"/>
+          <p:nvPr/>
+        </p:nvSpPr>
+        <p:spPr>
+          <a:xfrm>
+            <a:off x="4481577" y="4711151"/>
+            <a:ext cx="2673552" cy="461665"/>
+          </a:xfrm>
+          <a:prstGeom prst="rect">
+            <a:avLst/>
+          </a:prstGeom>
+          <a:noFill/>
+        </p:spPr>
+        <p:txBody>
+          <a:bodyPr wrap="none" rtlCol="0">
+            <a:spAutoFit/>
+          </a:bodyPr>
+          <a:lstStyle/>
+          <a:p>
+            <a:r>
+              <a:rPr lang="en-US" altLang="zh-CN" sz="2400" b="1" dirty="0" err="1">
+                <a:latin typeface="微软雅黑" panose="020B0503020204020204" pitchFamily="34" charset="-122"/>
+                <a:ea typeface="微软雅黑" panose="020B0503020204020204" pitchFamily="34" charset="-122"/>
+              </a:rPr>
+              <a:t>StatusSkill</a:t>
+            </a:r>
+            <a:r>
+              <a:rPr lang="en-US" altLang="zh-CN" sz="2400" b="1" dirty="0">
+                <a:latin typeface="微软雅黑" panose="020B0503020204020204" pitchFamily="34" charset="-122"/>
+                <a:ea typeface="微软雅黑" panose="020B0503020204020204" pitchFamily="34" charset="-122"/>
+              </a:rPr>
+              <a:t>(Skill)</a:t>
+            </a:r>
+            <a:endParaRPr lang="zh-CN" altLang="en-US" sz="2400" b="1" dirty="0">
+              <a:latin typeface="微软雅黑" panose="020B0503020204020204" pitchFamily="34" charset="-122"/>
+              <a:ea typeface="微软雅黑" panose="020B0503020204020204" pitchFamily="34" charset="-122"/>
+            </a:endParaRPr>
+          </a:p>
+        </p:txBody>
+      </p:sp>
+      <p:sp>
+        <p:nvSpPr>
+          <p:cNvPr id="13" name="矩形 12">
+            <a:extLst>
+              <a:ext uri="{FF2B5EF4-FFF2-40B4-BE49-F238E27FC236}">
+                <a16:creationId xmlns:a16="http://schemas.microsoft.com/office/drawing/2014/main" id="{6B2CB2F1-BEDB-2807-059A-E720FF9A79EA}"/>
+              </a:ext>
+            </a:extLst>
+          </p:cNvPr>
+          <p:cNvSpPr/>
+          <p:nvPr/>
+        </p:nvSpPr>
+        <p:spPr>
+          <a:xfrm>
+            <a:off x="10389702" y="1080056"/>
+            <a:ext cx="1616765" cy="523219"/>
+          </a:xfrm>
+          <a:prstGeom prst="rect">
+            <a:avLst/>
+          </a:prstGeom>
+          <a:solidFill>
+            <a:schemeClr val="accent5">
+              <a:lumMod val="20000"/>
+              <a:lumOff val="80000"/>
+            </a:schemeClr>
+          </a:solidFill>
+          <a:ln>
+            <a:noFill/>
+          </a:ln>
+        </p:spPr>
+        <p:style>
+          <a:lnRef idx="2">
+            <a:schemeClr val="accent1">
+              <a:shade val="15000"/>
+            </a:schemeClr>
+          </a:lnRef>
+          <a:fillRef idx="1">
+            <a:schemeClr val="accent1"/>
+          </a:fillRef>
+          <a:effectRef idx="0">
+            <a:schemeClr val="accent1"/>
+          </a:effectRef>
+          <a:fontRef idx="minor">
+            <a:schemeClr val="lt1"/>
+          </a:fontRef>
+        </p:style>
+        <p:txBody>
+          <a:bodyPr rtlCol="0" anchor="ctr"/>
+          <a:lstStyle/>
+          <a:p>
+            <a:pPr algn="ctr"/>
+            <a:r>
+              <a:rPr lang="zh-CN" altLang="en-US" sz="2000" b="1" dirty="0">
+                <a:solidFill>
+                  <a:schemeClr val="tx1"/>
+                </a:solidFill>
+                <a:latin typeface="微软雅黑" panose="020B0503020204020204" pitchFamily="34" charset="-122"/>
+                <a:ea typeface="微软雅黑" panose="020B0503020204020204" pitchFamily="34" charset="-122"/>
+              </a:rPr>
+              <a:t>斩杀</a:t>
+            </a:r>
+          </a:p>
+        </p:txBody>
+      </p:sp>
+      <p:sp>
+        <p:nvSpPr>
+          <p:cNvPr id="15" name="矩形 14">
+            <a:extLst>
+              <a:ext uri="{FF2B5EF4-FFF2-40B4-BE49-F238E27FC236}">
+                <a16:creationId xmlns:a16="http://schemas.microsoft.com/office/drawing/2014/main" id="{69C4F175-47E5-9895-AB69-B7E8A8C6183B}"/>
+              </a:ext>
+            </a:extLst>
+          </p:cNvPr>
+          <p:cNvSpPr/>
+          <p:nvPr/>
+        </p:nvSpPr>
+        <p:spPr>
+          <a:xfrm>
+            <a:off x="10389702" y="1735319"/>
+            <a:ext cx="1616765" cy="523219"/>
+          </a:xfrm>
+          <a:prstGeom prst="rect">
+            <a:avLst/>
+          </a:prstGeom>
+          <a:solidFill>
+            <a:schemeClr val="accent5">
+              <a:lumMod val="20000"/>
+              <a:lumOff val="80000"/>
+            </a:schemeClr>
+          </a:solidFill>
+          <a:ln>
+            <a:noFill/>
+          </a:ln>
+        </p:spPr>
+        <p:style>
+          <a:lnRef idx="2">
+            <a:schemeClr val="accent1">
+              <a:shade val="15000"/>
+            </a:schemeClr>
+          </a:lnRef>
+          <a:fillRef idx="1">
+            <a:schemeClr val="accent1"/>
+          </a:fillRef>
+          <a:effectRef idx="0">
+            <a:schemeClr val="accent1"/>
+          </a:effectRef>
+          <a:fontRef idx="minor">
+            <a:schemeClr val="lt1"/>
+          </a:fontRef>
+        </p:style>
+        <p:txBody>
+          <a:bodyPr rtlCol="0" anchor="ctr"/>
+          <a:lstStyle/>
+          <a:p>
+            <a:pPr algn="ctr"/>
+            <a:r>
+              <a:rPr lang="zh-CN" altLang="en-US" sz="2000" b="1" dirty="0">
+                <a:solidFill>
+                  <a:schemeClr val="tx1"/>
+                </a:solidFill>
+                <a:latin typeface="微软雅黑" panose="020B0503020204020204" pitchFamily="34" charset="-122"/>
+                <a:ea typeface="微软雅黑" panose="020B0503020204020204" pitchFamily="34" charset="-122"/>
+              </a:rPr>
+              <a:t>治愈术</a:t>
+            </a:r>
+          </a:p>
+        </p:txBody>
+      </p:sp>
+      <p:sp>
+        <p:nvSpPr>
+          <p:cNvPr id="16" name="矩形 15">
+            <a:extLst>
+              <a:ext uri="{FF2B5EF4-FFF2-40B4-BE49-F238E27FC236}">
+                <a16:creationId xmlns:a16="http://schemas.microsoft.com/office/drawing/2014/main" id="{142A6433-F29B-A308-1145-4DC8AD107593}"/>
+              </a:ext>
+            </a:extLst>
+          </p:cNvPr>
+          <p:cNvSpPr/>
+          <p:nvPr/>
+        </p:nvSpPr>
+        <p:spPr>
+          <a:xfrm>
+            <a:off x="10389702" y="2915479"/>
+            <a:ext cx="1616765" cy="523219"/>
+          </a:xfrm>
+          <a:prstGeom prst="rect">
+            <a:avLst/>
+          </a:prstGeom>
+          <a:solidFill>
+            <a:schemeClr val="accent6">
+              <a:lumMod val="20000"/>
+              <a:lumOff val="80000"/>
+            </a:schemeClr>
+          </a:solidFill>
+          <a:ln>
+            <a:noFill/>
+          </a:ln>
+        </p:spPr>
+        <p:style>
+          <a:lnRef idx="2">
+            <a:schemeClr val="accent1">
+              <a:shade val="15000"/>
+            </a:schemeClr>
+          </a:lnRef>
+          <a:fillRef idx="1">
+            <a:schemeClr val="accent1"/>
+          </a:fillRef>
+          <a:effectRef idx="0">
+            <a:schemeClr val="accent1"/>
+          </a:effectRef>
+          <a:fontRef idx="minor">
+            <a:schemeClr val="lt1"/>
+          </a:fontRef>
+        </p:style>
+        <p:txBody>
+          <a:bodyPr rtlCol="0" anchor="ctr"/>
+          <a:lstStyle/>
+          <a:p>
+            <a:pPr algn="ctr"/>
+            <a:r>
+              <a:rPr lang="zh-CN" altLang="en-US" sz="2000" b="1" dirty="0">
+                <a:solidFill>
+                  <a:schemeClr val="tx1"/>
+                </a:solidFill>
+                <a:latin typeface="微软雅黑" panose="020B0503020204020204" pitchFamily="34" charset="-122"/>
+                <a:ea typeface="微软雅黑" panose="020B0503020204020204" pitchFamily="34" charset="-122"/>
+              </a:rPr>
+              <a:t>投毒</a:t>
+            </a:r>
+          </a:p>
+        </p:txBody>
+      </p:sp>
+      <p:sp>
+        <p:nvSpPr>
+          <p:cNvPr id="17" name="矩形 16">
+            <a:extLst>
+              <a:ext uri="{FF2B5EF4-FFF2-40B4-BE49-F238E27FC236}">
+                <a16:creationId xmlns:a16="http://schemas.microsoft.com/office/drawing/2014/main" id="{D63D1DB7-6560-C3E9-1485-ED9C4B0B03B5}"/>
+              </a:ext>
+            </a:extLst>
+          </p:cNvPr>
+          <p:cNvSpPr/>
+          <p:nvPr/>
+        </p:nvSpPr>
+        <p:spPr>
+          <a:xfrm>
+            <a:off x="10389702" y="3544238"/>
+            <a:ext cx="1616765" cy="523219"/>
+          </a:xfrm>
+          <a:prstGeom prst="rect">
+            <a:avLst/>
+          </a:prstGeom>
+          <a:solidFill>
+            <a:schemeClr val="accent6">
+              <a:lumMod val="20000"/>
+              <a:lumOff val="80000"/>
+            </a:schemeClr>
+          </a:solidFill>
+          <a:ln>
+            <a:noFill/>
+          </a:ln>
+        </p:spPr>
+        <p:style>
+          <a:lnRef idx="2">
+            <a:schemeClr val="accent1">
+              <a:shade val="15000"/>
+            </a:schemeClr>
+          </a:lnRef>
+          <a:fillRef idx="1">
+            <a:schemeClr val="accent1"/>
+          </a:fillRef>
+          <a:effectRef idx="0">
+            <a:schemeClr val="accent1"/>
+          </a:effectRef>
+          <a:fontRef idx="minor">
+            <a:schemeClr val="lt1"/>
+          </a:fontRef>
+        </p:style>
+        <p:txBody>
+          <a:bodyPr rtlCol="0" anchor="ctr"/>
+          <a:lstStyle/>
+          <a:p>
+            <a:pPr algn="ctr"/>
+            <a:r>
+              <a:rPr lang="zh-CN" altLang="en-US" sz="2000" b="1" dirty="0">
+                <a:solidFill>
+                  <a:schemeClr val="tx1"/>
+                </a:solidFill>
+                <a:latin typeface="微软雅黑" panose="020B0503020204020204" pitchFamily="34" charset="-122"/>
+                <a:ea typeface="微软雅黑" panose="020B0503020204020204" pitchFamily="34" charset="-122"/>
+              </a:rPr>
+              <a:t>生命回响</a:t>
+            </a:r>
+          </a:p>
+        </p:txBody>
+      </p:sp>
+      <p:sp>
+        <p:nvSpPr>
+          <p:cNvPr id="18" name="矩形 17">
+            <a:extLst>
+              <a:ext uri="{FF2B5EF4-FFF2-40B4-BE49-F238E27FC236}">
+                <a16:creationId xmlns:a16="http://schemas.microsoft.com/office/drawing/2014/main" id="{28E8A83A-3BE8-AA03-00FD-15B7A7301091}"/>
+              </a:ext>
+            </a:extLst>
+          </p:cNvPr>
+          <p:cNvSpPr/>
+          <p:nvPr/>
+        </p:nvSpPr>
+        <p:spPr>
+          <a:xfrm>
+            <a:off x="10389702" y="4703802"/>
+            <a:ext cx="1616765" cy="523219"/>
+          </a:xfrm>
+          <a:prstGeom prst="rect">
+            <a:avLst/>
+          </a:prstGeom>
+          <a:solidFill>
+            <a:schemeClr val="accent2">
+              <a:lumMod val="20000"/>
+              <a:lumOff val="80000"/>
+            </a:schemeClr>
+          </a:solidFill>
+          <a:ln>
+            <a:noFill/>
+          </a:ln>
+        </p:spPr>
+        <p:style>
+          <a:lnRef idx="2">
+            <a:schemeClr val="accent1">
+              <a:shade val="15000"/>
+            </a:schemeClr>
+          </a:lnRef>
+          <a:fillRef idx="1">
+            <a:schemeClr val="accent1"/>
+          </a:fillRef>
+          <a:effectRef idx="0">
+            <a:schemeClr val="accent1"/>
+          </a:effectRef>
+          <a:fontRef idx="minor">
+            <a:schemeClr val="lt1"/>
+          </a:fontRef>
+        </p:style>
+        <p:txBody>
+          <a:bodyPr rtlCol="0" anchor="ctr"/>
+          <a:lstStyle/>
+          <a:p>
+            <a:pPr algn="ctr"/>
+            <a:r>
+              <a:rPr lang="zh-CN" altLang="en-US" sz="2000" b="1" dirty="0">
+                <a:solidFill>
+                  <a:schemeClr val="tx1"/>
+                </a:solidFill>
+                <a:latin typeface="微软雅黑" panose="020B0503020204020204" pitchFamily="34" charset="-122"/>
+                <a:ea typeface="微软雅黑" panose="020B0503020204020204" pitchFamily="34" charset="-122"/>
+              </a:rPr>
+              <a:t>定身术</a:t>
+            </a:r>
+          </a:p>
+        </p:txBody>
+      </p:sp>
+      <p:sp>
+        <p:nvSpPr>
+          <p:cNvPr id="19" name="矩形 18">
+            <a:extLst>
+              <a:ext uri="{FF2B5EF4-FFF2-40B4-BE49-F238E27FC236}">
+                <a16:creationId xmlns:a16="http://schemas.microsoft.com/office/drawing/2014/main" id="{BEFB1515-92FB-BAF6-6433-2BF16FE7238D}"/>
+              </a:ext>
+            </a:extLst>
+          </p:cNvPr>
+          <p:cNvSpPr/>
+          <p:nvPr/>
+        </p:nvSpPr>
+        <p:spPr>
+          <a:xfrm>
+            <a:off x="10389702" y="5332561"/>
+            <a:ext cx="1616765" cy="523219"/>
+          </a:xfrm>
+          <a:prstGeom prst="rect">
+            <a:avLst/>
+          </a:prstGeom>
+          <a:solidFill>
+            <a:schemeClr val="accent2">
+              <a:lumMod val="20000"/>
+              <a:lumOff val="80000"/>
+            </a:schemeClr>
+          </a:solidFill>
+          <a:ln>
+            <a:noFill/>
+          </a:ln>
+        </p:spPr>
+        <p:style>
+          <a:lnRef idx="2">
+            <a:schemeClr val="accent1">
+              <a:shade val="15000"/>
+            </a:schemeClr>
+          </a:lnRef>
+          <a:fillRef idx="1">
+            <a:schemeClr val="accent1"/>
+          </a:fillRef>
+          <a:effectRef idx="0">
+            <a:schemeClr val="accent1"/>
+          </a:effectRef>
+          <a:fontRef idx="minor">
+            <a:schemeClr val="lt1"/>
+          </a:fontRef>
+        </p:style>
+        <p:txBody>
+          <a:bodyPr rtlCol="0" anchor="ctr"/>
+          <a:lstStyle/>
+          <a:p>
+            <a:pPr algn="ctr"/>
+            <a:r>
+              <a:rPr lang="zh-CN" altLang="en-US" sz="2000" b="1" dirty="0">
+                <a:solidFill>
+                  <a:schemeClr val="tx1"/>
+                </a:solidFill>
+                <a:latin typeface="微软雅黑" panose="020B0503020204020204" pitchFamily="34" charset="-122"/>
+                <a:ea typeface="微软雅黑" panose="020B0503020204020204" pitchFamily="34" charset="-122"/>
+              </a:rPr>
+              <a:t>无敌金身</a:t>
+            </a:r>
+          </a:p>
+        </p:txBody>
+      </p:sp>
+      <p:sp>
+        <p:nvSpPr>
+          <p:cNvPr id="20" name="箭头: V 形 19">
+            <a:extLst>
+              <a:ext uri="{FF2B5EF4-FFF2-40B4-BE49-F238E27FC236}">
+                <a16:creationId xmlns:a16="http://schemas.microsoft.com/office/drawing/2014/main" id="{D06998D1-CE27-0A07-A8FF-8072210F9282}"/>
+              </a:ext>
+            </a:extLst>
+          </p:cNvPr>
+          <p:cNvSpPr/>
+          <p:nvPr/>
+        </p:nvSpPr>
+        <p:spPr>
+          <a:xfrm>
+            <a:off x="3672851" y="1297035"/>
+            <a:ext cx="463826" cy="791141"/>
+          </a:xfrm>
+          <a:prstGeom prst="chevron">
+            <a:avLst/>
+          </a:prstGeom>
+        </p:spPr>
+        <p:style>
+          <a:lnRef idx="2">
+            <a:schemeClr val="accent1">
+              <a:shade val="15000"/>
+            </a:schemeClr>
+          </a:lnRef>
+          <a:fillRef idx="1">
+            <a:schemeClr val="accent1"/>
+          </a:fillRef>
+          <a:effectRef idx="0">
+            <a:schemeClr val="accent1"/>
+          </a:effectRef>
+          <a:fontRef idx="minor">
+            <a:schemeClr val="lt1"/>
+          </a:fontRef>
+        </p:style>
+        <p:txBody>
+          <a:bodyPr rtlCol="0" anchor="ctr"/>
+          <a:lstStyle/>
+          <a:p>
+            <a:pPr algn="ctr"/>
+            <a:endParaRPr lang="zh-CN" altLang="en-US">
+              <a:solidFill>
+                <a:schemeClr val="tx1"/>
+              </a:solidFill>
+            </a:endParaRPr>
+          </a:p>
+        </p:txBody>
+      </p:sp>
+      <p:sp>
+        <p:nvSpPr>
+          <p:cNvPr id="21" name="箭头: V 形 20">
+            <a:extLst>
+              <a:ext uri="{FF2B5EF4-FFF2-40B4-BE49-F238E27FC236}">
+                <a16:creationId xmlns:a16="http://schemas.microsoft.com/office/drawing/2014/main" id="{2B7A2150-00B5-3E50-3ECF-F536B39CE04B}"/>
+              </a:ext>
+            </a:extLst>
+          </p:cNvPr>
+          <p:cNvSpPr/>
+          <p:nvPr/>
+        </p:nvSpPr>
+        <p:spPr>
+          <a:xfrm>
+            <a:off x="3677394" y="3105957"/>
+            <a:ext cx="463826" cy="791141"/>
+          </a:xfrm>
+          <a:prstGeom prst="chevron">
+            <a:avLst/>
+          </a:prstGeom>
+        </p:spPr>
+        <p:style>
+          <a:lnRef idx="2">
+            <a:schemeClr val="accent1">
+              <a:shade val="15000"/>
+            </a:schemeClr>
+          </a:lnRef>
+          <a:fillRef idx="1">
+            <a:schemeClr val="accent1"/>
+          </a:fillRef>
+          <a:effectRef idx="0">
+            <a:schemeClr val="accent1"/>
+          </a:effectRef>
+          <a:fontRef idx="minor">
+            <a:schemeClr val="lt1"/>
+          </a:fontRef>
+        </p:style>
+        <p:txBody>
+          <a:bodyPr rtlCol="0" anchor="ctr"/>
+          <a:lstStyle/>
+          <a:p>
+            <a:pPr algn="ctr"/>
+            <a:endParaRPr lang="zh-CN" altLang="en-US">
+              <a:solidFill>
+                <a:schemeClr val="tx1"/>
+              </a:solidFill>
+            </a:endParaRPr>
+          </a:p>
+        </p:txBody>
+      </p:sp>
+      <p:sp>
+        <p:nvSpPr>
+          <p:cNvPr id="22" name="箭头: V 形 21">
+            <a:extLst>
+              <a:ext uri="{FF2B5EF4-FFF2-40B4-BE49-F238E27FC236}">
+                <a16:creationId xmlns:a16="http://schemas.microsoft.com/office/drawing/2014/main" id="{8BA8283A-1F42-B2FF-2E70-2461B29E48D2}"/>
+              </a:ext>
+            </a:extLst>
+          </p:cNvPr>
+          <p:cNvSpPr/>
+          <p:nvPr/>
+        </p:nvSpPr>
+        <p:spPr>
+          <a:xfrm>
+            <a:off x="3672851" y="4914879"/>
+            <a:ext cx="463826" cy="791141"/>
+          </a:xfrm>
+          <a:prstGeom prst="chevron">
+            <a:avLst/>
+          </a:prstGeom>
+        </p:spPr>
+        <p:style>
+          <a:lnRef idx="2">
+            <a:schemeClr val="accent1">
+              <a:shade val="15000"/>
+            </a:schemeClr>
+          </a:lnRef>
+          <a:fillRef idx="1">
+            <a:schemeClr val="accent1"/>
+          </a:fillRef>
+          <a:effectRef idx="0">
+            <a:schemeClr val="accent1"/>
+          </a:effectRef>
+          <a:fontRef idx="minor">
+            <a:schemeClr val="lt1"/>
+          </a:fontRef>
+        </p:style>
+        <p:txBody>
+          <a:bodyPr rtlCol="0" anchor="ctr"/>
+          <a:lstStyle/>
+          <a:p>
+            <a:pPr algn="ctr"/>
+            <a:endParaRPr lang="zh-CN" altLang="en-US">
+              <a:solidFill>
+                <a:schemeClr val="tx1"/>
+              </a:solidFill>
+            </a:endParaRPr>
+          </a:p>
+        </p:txBody>
+      </p:sp>
+      <p:sp>
+        <p:nvSpPr>
+          <p:cNvPr id="23" name="箭头: 右 22">
+            <a:extLst>
+              <a:ext uri="{FF2B5EF4-FFF2-40B4-BE49-F238E27FC236}">
+                <a16:creationId xmlns:a16="http://schemas.microsoft.com/office/drawing/2014/main" id="{0B1D3098-73B1-556F-BB9D-11987769C887}"/>
+              </a:ext>
+            </a:extLst>
+          </p:cNvPr>
+          <p:cNvSpPr/>
+          <p:nvPr/>
+        </p:nvSpPr>
+        <p:spPr>
+          <a:xfrm>
+            <a:off x="9491031" y="1236442"/>
+            <a:ext cx="800167" cy="267680"/>
+          </a:xfrm>
+          <a:prstGeom prst="rightArrow">
+            <a:avLst/>
+          </a:prstGeom>
+          <a:solidFill>
+            <a:schemeClr val="accent5">
+              <a:lumMod val="60000"/>
+              <a:lumOff val="40000"/>
+            </a:schemeClr>
+          </a:solidFill>
+        </p:spPr>
+        <p:style>
+          <a:lnRef idx="2">
+            <a:schemeClr val="accent1">
+              <a:shade val="15000"/>
+            </a:schemeClr>
+          </a:lnRef>
+          <a:fillRef idx="1">
+            <a:schemeClr val="accent1"/>
+          </a:fillRef>
+          <a:effectRef idx="0">
+            <a:schemeClr val="accent1"/>
+          </a:effectRef>
+          <a:fontRef idx="minor">
+            <a:schemeClr val="lt1"/>
+          </a:fontRef>
+        </p:style>
+        <p:txBody>
+          <a:bodyPr rtlCol="0" anchor="ctr"/>
+          <a:lstStyle/>
+          <a:p>
+            <a:pPr algn="ctr"/>
+            <a:endParaRPr lang="zh-CN" altLang="en-US"/>
+          </a:p>
+        </p:txBody>
+      </p:sp>
+      <p:sp>
+        <p:nvSpPr>
+          <p:cNvPr id="25" name="箭头: 右 24">
+            <a:extLst>
+              <a:ext uri="{FF2B5EF4-FFF2-40B4-BE49-F238E27FC236}">
+                <a16:creationId xmlns:a16="http://schemas.microsoft.com/office/drawing/2014/main" id="{CC4FD729-DFE8-7107-D05A-F2BD36FE5F5C}"/>
+              </a:ext>
+            </a:extLst>
+          </p:cNvPr>
+          <p:cNvSpPr/>
+          <p:nvPr/>
+        </p:nvSpPr>
+        <p:spPr>
+          <a:xfrm>
+            <a:off x="9508863" y="1863088"/>
+            <a:ext cx="800167" cy="267680"/>
+          </a:xfrm>
+          <a:prstGeom prst="rightArrow">
+            <a:avLst/>
+          </a:prstGeom>
+          <a:solidFill>
+            <a:schemeClr val="accent5">
+              <a:lumMod val="60000"/>
+              <a:lumOff val="40000"/>
+            </a:schemeClr>
+          </a:solidFill>
+        </p:spPr>
+        <p:style>
+          <a:lnRef idx="2">
+            <a:schemeClr val="accent1">
+              <a:shade val="15000"/>
+            </a:schemeClr>
+          </a:lnRef>
+          <a:fillRef idx="1">
+            <a:schemeClr val="accent1"/>
+          </a:fillRef>
+          <a:effectRef idx="0">
+            <a:schemeClr val="accent1"/>
+          </a:effectRef>
+          <a:fontRef idx="minor">
+            <a:schemeClr val="lt1"/>
+          </a:fontRef>
+        </p:style>
+        <p:txBody>
+          <a:bodyPr rtlCol="0" anchor="ctr"/>
+          <a:lstStyle/>
+          <a:p>
+            <a:pPr algn="ctr"/>
+            <a:endParaRPr lang="zh-CN" altLang="en-US"/>
+          </a:p>
+        </p:txBody>
+      </p:sp>
+      <p:sp>
+        <p:nvSpPr>
+          <p:cNvPr id="26" name="箭头: 右 25">
+            <a:extLst>
+              <a:ext uri="{FF2B5EF4-FFF2-40B4-BE49-F238E27FC236}">
+                <a16:creationId xmlns:a16="http://schemas.microsoft.com/office/drawing/2014/main" id="{3E716CB3-0882-E275-1E07-8AFFCB5FE14D}"/>
+              </a:ext>
+            </a:extLst>
+          </p:cNvPr>
+          <p:cNvSpPr/>
+          <p:nvPr/>
+        </p:nvSpPr>
+        <p:spPr>
+          <a:xfrm>
+            <a:off x="9491031" y="3043248"/>
+            <a:ext cx="800167" cy="267680"/>
+          </a:xfrm>
+          <a:prstGeom prst="rightArrow">
+            <a:avLst/>
+          </a:prstGeom>
+          <a:solidFill>
+            <a:schemeClr val="accent6">
+              <a:lumMod val="60000"/>
+              <a:lumOff val="40000"/>
+            </a:schemeClr>
+          </a:solidFill>
+        </p:spPr>
+        <p:style>
+          <a:lnRef idx="2">
+            <a:schemeClr val="accent1">
+              <a:shade val="15000"/>
+            </a:schemeClr>
+          </a:lnRef>
+          <a:fillRef idx="1">
+            <a:schemeClr val="accent1"/>
+          </a:fillRef>
+          <a:effectRef idx="0">
+            <a:schemeClr val="accent1"/>
+          </a:effectRef>
+          <a:fontRef idx="minor">
+            <a:schemeClr val="lt1"/>
+          </a:fontRef>
+        </p:style>
+        <p:txBody>
+          <a:bodyPr rtlCol="0" anchor="ctr"/>
+          <a:lstStyle/>
+          <a:p>
+            <a:pPr algn="ctr"/>
+            <a:endParaRPr lang="zh-CN" altLang="en-US"/>
+          </a:p>
+        </p:txBody>
+      </p:sp>
+      <p:sp>
+        <p:nvSpPr>
+          <p:cNvPr id="27" name="箭头: 右 26">
+            <a:extLst>
+              <a:ext uri="{FF2B5EF4-FFF2-40B4-BE49-F238E27FC236}">
+                <a16:creationId xmlns:a16="http://schemas.microsoft.com/office/drawing/2014/main" id="{F3765332-7DA2-0544-22A3-2CA71CDF7BAB}"/>
+              </a:ext>
+            </a:extLst>
+          </p:cNvPr>
+          <p:cNvSpPr/>
+          <p:nvPr/>
+        </p:nvSpPr>
+        <p:spPr>
+          <a:xfrm>
+            <a:off x="9491031" y="3622411"/>
+            <a:ext cx="800167" cy="267680"/>
+          </a:xfrm>
+          <a:prstGeom prst="rightArrow">
+            <a:avLst/>
+          </a:prstGeom>
+          <a:solidFill>
+            <a:schemeClr val="accent6">
+              <a:lumMod val="60000"/>
+              <a:lumOff val="40000"/>
+            </a:schemeClr>
+          </a:solidFill>
+        </p:spPr>
+        <p:style>
+          <a:lnRef idx="2">
+            <a:schemeClr val="accent1">
+              <a:shade val="15000"/>
+            </a:schemeClr>
+          </a:lnRef>
+          <a:fillRef idx="1">
+            <a:schemeClr val="accent1"/>
+          </a:fillRef>
+          <a:effectRef idx="0">
+            <a:schemeClr val="accent1"/>
+          </a:effectRef>
+          <a:fontRef idx="minor">
+            <a:schemeClr val="lt1"/>
+          </a:fontRef>
+        </p:style>
+        <p:txBody>
+          <a:bodyPr rtlCol="0" anchor="ctr"/>
+          <a:lstStyle/>
+          <a:p>
+            <a:pPr algn="ctr"/>
+            <a:endParaRPr lang="zh-CN" altLang="en-US"/>
+          </a:p>
+        </p:txBody>
+      </p:sp>
+      <p:sp>
+        <p:nvSpPr>
+          <p:cNvPr id="28" name="箭头: 右 27">
+            <a:extLst>
+              <a:ext uri="{FF2B5EF4-FFF2-40B4-BE49-F238E27FC236}">
+                <a16:creationId xmlns:a16="http://schemas.microsoft.com/office/drawing/2014/main" id="{DA32457F-8BC0-E1A3-0BAF-4E0FF330656F}"/>
+              </a:ext>
+            </a:extLst>
+          </p:cNvPr>
+          <p:cNvSpPr/>
+          <p:nvPr/>
+        </p:nvSpPr>
+        <p:spPr>
+          <a:xfrm>
+            <a:off x="9490251" y="4831571"/>
+            <a:ext cx="800167" cy="267680"/>
+          </a:xfrm>
+          <a:prstGeom prst="rightArrow">
+            <a:avLst/>
+          </a:prstGeom>
+          <a:solidFill>
+            <a:schemeClr val="accent2">
+              <a:lumMod val="60000"/>
+              <a:lumOff val="40000"/>
+            </a:schemeClr>
+          </a:solidFill>
+        </p:spPr>
+        <p:style>
+          <a:lnRef idx="2">
+            <a:schemeClr val="accent1">
+              <a:shade val="15000"/>
+            </a:schemeClr>
+          </a:lnRef>
+          <a:fillRef idx="1">
+            <a:schemeClr val="accent1"/>
+          </a:fillRef>
+          <a:effectRef idx="0">
+            <a:schemeClr val="accent1"/>
+          </a:effectRef>
+          <a:fontRef idx="minor">
+            <a:schemeClr val="lt1"/>
+          </a:fontRef>
+        </p:style>
+        <p:txBody>
+          <a:bodyPr rtlCol="0" anchor="ctr"/>
+          <a:lstStyle/>
+          <a:p>
+            <a:pPr algn="ctr"/>
+            <a:endParaRPr lang="zh-CN" altLang="en-US"/>
+          </a:p>
+        </p:txBody>
+      </p:sp>
+      <p:sp>
+        <p:nvSpPr>
+          <p:cNvPr id="29" name="箭头: 右 28">
+            <a:extLst>
+              <a:ext uri="{FF2B5EF4-FFF2-40B4-BE49-F238E27FC236}">
+                <a16:creationId xmlns:a16="http://schemas.microsoft.com/office/drawing/2014/main" id="{404E4DB4-8DFE-6575-0EDD-9E7B6A760B78}"/>
+              </a:ext>
+            </a:extLst>
+          </p:cNvPr>
+          <p:cNvSpPr/>
+          <p:nvPr/>
+        </p:nvSpPr>
+        <p:spPr>
+          <a:xfrm>
+            <a:off x="9490249" y="5433949"/>
+            <a:ext cx="800167" cy="267680"/>
+          </a:xfrm>
+          <a:prstGeom prst="rightArrow">
+            <a:avLst/>
+          </a:prstGeom>
+          <a:solidFill>
+            <a:schemeClr val="accent2">
+              <a:lumMod val="60000"/>
+              <a:lumOff val="40000"/>
+            </a:schemeClr>
+          </a:solidFill>
+        </p:spPr>
+        <p:style>
+          <a:lnRef idx="2">
+            <a:schemeClr val="accent1">
+              <a:shade val="15000"/>
+            </a:schemeClr>
+          </a:lnRef>
+          <a:fillRef idx="1">
+            <a:schemeClr val="accent1"/>
+          </a:fillRef>
+          <a:effectRef idx="0">
+            <a:schemeClr val="accent1"/>
+          </a:effectRef>
+          <a:fontRef idx="minor">
+            <a:schemeClr val="lt1"/>
+          </a:fontRef>
+        </p:style>
+        <p:txBody>
+          <a:bodyPr rtlCol="0" anchor="ctr"/>
+          <a:lstStyle/>
+          <a:p>
+            <a:pPr algn="ctr"/>
+            <a:endParaRPr lang="zh-CN" altLang="en-US"/>
+          </a:p>
+        </p:txBody>
+      </p:sp>
+      <p:sp>
+        <p:nvSpPr>
+          <p:cNvPr id="30" name="矩形 29">
+            <a:extLst>
+              <a:ext uri="{FF2B5EF4-FFF2-40B4-BE49-F238E27FC236}">
+                <a16:creationId xmlns:a16="http://schemas.microsoft.com/office/drawing/2014/main" id="{A1349660-FB18-12BA-E114-586F7ED12111}"/>
+              </a:ext>
+            </a:extLst>
+          </p:cNvPr>
+          <p:cNvSpPr/>
+          <p:nvPr/>
+        </p:nvSpPr>
+        <p:spPr>
+          <a:xfrm>
+            <a:off x="946565" y="6116813"/>
+            <a:ext cx="1127232" cy="584775"/>
+          </a:xfrm>
+          <a:prstGeom prst="rect">
+            <a:avLst/>
+          </a:prstGeom>
+          <a:noFill/>
+        </p:spPr>
+        <p:txBody>
+          <a:bodyPr wrap="none" lIns="91440" tIns="45720" rIns="91440" bIns="45720">
+            <a:spAutoFit/>
+          </a:bodyPr>
+          <a:lstStyle/>
+          <a:p>
+            <a:pPr algn="ctr"/>
+            <a:r>
+              <a:rPr lang="en-US" altLang="zh-CN" sz="3200" b="1" dirty="0">
+                <a:ln w="0"/>
+                <a:solidFill>
+                  <a:srgbClr val="FF0000"/>
+                </a:solidFill>
+                <a:effectLst>
+                  <a:outerShdw blurRad="38100" dist="19050" dir="2700000" algn="tl" rotWithShape="0">
+                    <a:schemeClr val="dk1">
+                      <a:alpha val="40000"/>
+                    </a:schemeClr>
+                  </a:outerShdw>
+                </a:effectLst>
+                <a:latin typeface="微软雅黑" panose="020B0503020204020204" pitchFamily="34" charset="-122"/>
+                <a:ea typeface="微软雅黑" panose="020B0503020204020204" pitchFamily="34" charset="-122"/>
+              </a:rPr>
+              <a:t> </a:t>
+            </a:r>
+            <a:r>
+              <a:rPr lang="zh-CN" altLang="en-US" sz="3200" b="1" dirty="0">
+                <a:ln w="0"/>
+                <a:solidFill>
+                  <a:srgbClr val="FF0000"/>
+                </a:solidFill>
+                <a:effectLst>
+                  <a:outerShdw blurRad="38100" dist="19050" dir="2700000" algn="tl" rotWithShape="0">
+                    <a:schemeClr val="dk1">
+                      <a:alpha val="40000"/>
+                    </a:schemeClr>
+                  </a:outerShdw>
+                </a:effectLst>
+                <a:latin typeface="微软雅黑" panose="020B0503020204020204" pitchFamily="34" charset="-122"/>
+                <a:ea typeface="微软雅黑" panose="020B0503020204020204" pitchFamily="34" charset="-122"/>
+              </a:rPr>
+              <a:t>超</a:t>
+            </a:r>
+            <a:r>
+              <a:rPr lang="zh-CN" altLang="en-US" sz="3200" b="1" cap="none" spc="0" dirty="0">
+                <a:ln w="0"/>
+                <a:solidFill>
+                  <a:srgbClr val="FF0000"/>
+                </a:solidFill>
+                <a:effectLst>
+                  <a:outerShdw blurRad="38100" dist="19050" dir="2700000" algn="tl" rotWithShape="0">
+                    <a:schemeClr val="dk1">
+                      <a:alpha val="40000"/>
+                    </a:schemeClr>
+                  </a:outerShdw>
+                </a:effectLst>
+                <a:latin typeface="微软雅黑" panose="020B0503020204020204" pitchFamily="34" charset="-122"/>
+                <a:ea typeface="微软雅黑" panose="020B0503020204020204" pitchFamily="34" charset="-122"/>
+              </a:rPr>
+              <a:t>类</a:t>
+            </a:r>
+            <a:endParaRPr lang="en-US" altLang="zh-CN" sz="3200" b="1" cap="none" spc="0" dirty="0">
+              <a:ln w="0"/>
+              <a:solidFill>
+                <a:srgbClr val="FF0000"/>
+              </a:solidFill>
+              <a:effectLst>
+                <a:outerShdw blurRad="38100" dist="19050" dir="2700000" algn="tl" rotWithShape="0">
+                  <a:schemeClr val="dk1">
+                    <a:alpha val="40000"/>
+                  </a:schemeClr>
+                </a:outerShdw>
+              </a:effectLst>
+              <a:latin typeface="微软雅黑" panose="020B0503020204020204" pitchFamily="34" charset="-122"/>
+              <a:ea typeface="微软雅黑" panose="020B0503020204020204" pitchFamily="34" charset="-122"/>
+            </a:endParaRPr>
+          </a:p>
+        </p:txBody>
+      </p:sp>
+      <p:sp>
+        <p:nvSpPr>
+          <p:cNvPr id="31" name="矩形 30">
+            <a:extLst>
+              <a:ext uri="{FF2B5EF4-FFF2-40B4-BE49-F238E27FC236}">
+                <a16:creationId xmlns:a16="http://schemas.microsoft.com/office/drawing/2014/main" id="{BA2B9F31-1CB7-5E0C-CF67-027E2F1EBA93}"/>
+              </a:ext>
+            </a:extLst>
+          </p:cNvPr>
+          <p:cNvSpPr/>
+          <p:nvPr/>
+        </p:nvSpPr>
+        <p:spPr>
+          <a:xfrm>
+            <a:off x="5961950" y="6116813"/>
+            <a:ext cx="1415773" cy="584775"/>
+          </a:xfrm>
+          <a:prstGeom prst="rect">
+            <a:avLst/>
+          </a:prstGeom>
+          <a:noFill/>
+        </p:spPr>
+        <p:txBody>
+          <a:bodyPr wrap="none" lIns="91440" tIns="45720" rIns="91440" bIns="45720">
+            <a:spAutoFit/>
+          </a:bodyPr>
+          <a:lstStyle/>
+          <a:p>
+            <a:pPr algn="ctr"/>
+            <a:r>
+              <a:rPr lang="zh-CN" altLang="en-US" sz="3200" b="1" cap="none" spc="0" dirty="0">
+                <a:ln w="0"/>
+                <a:solidFill>
+                  <a:srgbClr val="FF0000"/>
+                </a:solidFill>
+                <a:effectLst>
+                  <a:outerShdw blurRad="38100" dist="19050" dir="2700000" algn="tl" rotWithShape="0">
+                    <a:schemeClr val="dk1">
+                      <a:alpha val="40000"/>
+                    </a:schemeClr>
+                  </a:outerShdw>
+                </a:effectLst>
+                <a:latin typeface="微软雅黑" panose="020B0503020204020204" pitchFamily="34" charset="-122"/>
+                <a:ea typeface="微软雅黑" panose="020B0503020204020204" pitchFamily="34" charset="-122"/>
+              </a:rPr>
+              <a:t>派生类</a:t>
+            </a:r>
+            <a:endParaRPr lang="en-US" altLang="zh-CN" sz="3200" b="1" cap="none" spc="0" dirty="0">
+              <a:ln w="0"/>
+              <a:solidFill>
+                <a:srgbClr val="FF0000"/>
+              </a:solidFill>
+              <a:effectLst>
+                <a:outerShdw blurRad="38100" dist="19050" dir="2700000" algn="tl" rotWithShape="0">
+                  <a:schemeClr val="dk1">
+                    <a:alpha val="40000"/>
+                  </a:schemeClr>
+                </a:outerShdw>
+              </a:effectLst>
+              <a:latin typeface="微软雅黑" panose="020B0503020204020204" pitchFamily="34" charset="-122"/>
+              <a:ea typeface="微软雅黑" panose="020B0503020204020204" pitchFamily="34" charset="-122"/>
+            </a:endParaRPr>
+          </a:p>
+        </p:txBody>
+      </p:sp>
+      <p:sp>
+        <p:nvSpPr>
+          <p:cNvPr id="32" name="矩形 31">
+            <a:extLst>
+              <a:ext uri="{FF2B5EF4-FFF2-40B4-BE49-F238E27FC236}">
+                <a16:creationId xmlns:a16="http://schemas.microsoft.com/office/drawing/2014/main" id="{24C7F2BB-EF34-B16F-4F25-1E066DB34551}"/>
+              </a:ext>
+            </a:extLst>
+          </p:cNvPr>
+          <p:cNvSpPr/>
+          <p:nvPr/>
+        </p:nvSpPr>
+        <p:spPr>
+          <a:xfrm>
+            <a:off x="10695382" y="6116812"/>
+            <a:ext cx="1005403" cy="584775"/>
+          </a:xfrm>
+          <a:prstGeom prst="rect">
+            <a:avLst/>
+          </a:prstGeom>
+          <a:noFill/>
+        </p:spPr>
+        <p:txBody>
+          <a:bodyPr wrap="none" lIns="91440" tIns="45720" rIns="91440" bIns="45720">
+            <a:spAutoFit/>
+          </a:bodyPr>
+          <a:lstStyle/>
+          <a:p>
+            <a:pPr algn="ctr"/>
+            <a:r>
+              <a:rPr lang="zh-CN" altLang="en-US" sz="3200" b="1" cap="none" spc="0" dirty="0">
+                <a:ln w="0"/>
+                <a:solidFill>
+                  <a:srgbClr val="FF0000"/>
+                </a:solidFill>
+                <a:effectLst>
+                  <a:outerShdw blurRad="38100" dist="19050" dir="2700000" algn="tl" rotWithShape="0">
+                    <a:schemeClr val="dk1">
+                      <a:alpha val="40000"/>
+                    </a:schemeClr>
+                  </a:outerShdw>
+                </a:effectLst>
+                <a:latin typeface="微软雅黑" panose="020B0503020204020204" pitchFamily="34" charset="-122"/>
+                <a:ea typeface="微软雅黑" panose="020B0503020204020204" pitchFamily="34" charset="-122"/>
+              </a:rPr>
+              <a:t>对象</a:t>
+            </a:r>
+            <a:endParaRPr lang="en-US" altLang="zh-CN" sz="3200" b="1" cap="none" spc="0" dirty="0">
+              <a:ln w="0"/>
+              <a:solidFill>
+                <a:srgbClr val="FF0000"/>
+              </a:solidFill>
+              <a:effectLst>
+                <a:outerShdw blurRad="38100" dist="19050" dir="2700000" algn="tl" rotWithShape="0">
+                  <a:schemeClr val="dk1">
+                    <a:alpha val="40000"/>
+                  </a:schemeClr>
+                </a:outerShdw>
+              </a:effectLst>
+              <a:latin typeface="微软雅黑" panose="020B0503020204020204" pitchFamily="34" charset="-122"/>
+              <a:ea typeface="微软雅黑" panose="020B0503020204020204" pitchFamily="34" charset="-122"/>
+            </a:endParaRPr>
+          </a:p>
+        </p:txBody>
+      </p:sp>
+      <p:sp>
+        <p:nvSpPr>
+          <p:cNvPr id="33" name="矩形 32">
+            <a:extLst>
+              <a:ext uri="{FF2B5EF4-FFF2-40B4-BE49-F238E27FC236}">
+                <a16:creationId xmlns:a16="http://schemas.microsoft.com/office/drawing/2014/main" id="{29E45BAA-F5A9-40A3-A3D4-7530D3609067}"/>
+              </a:ext>
+            </a:extLst>
+          </p:cNvPr>
+          <p:cNvSpPr/>
+          <p:nvPr/>
+        </p:nvSpPr>
+        <p:spPr>
+          <a:xfrm>
+            <a:off x="3464684" y="5967827"/>
+            <a:ext cx="800219" cy="461665"/>
+          </a:xfrm>
+          <a:prstGeom prst="rect">
+            <a:avLst/>
+          </a:prstGeom>
+          <a:noFill/>
+        </p:spPr>
+        <p:txBody>
+          <a:bodyPr wrap="none" lIns="91440" tIns="45720" rIns="91440" bIns="45720">
+            <a:spAutoFit/>
+          </a:bodyPr>
+          <a:lstStyle/>
+          <a:p>
+            <a:pPr algn="ctr"/>
+            <a:r>
+              <a:rPr lang="zh-CN" altLang="en-US" sz="2400" b="1" cap="none" spc="0" dirty="0">
+                <a:ln w="0"/>
+                <a:solidFill>
+                  <a:srgbClr val="FF0000"/>
+                </a:solidFill>
+                <a:effectLst>
+                  <a:outerShdw blurRad="38100" dist="19050" dir="2700000" algn="tl" rotWithShape="0">
+                    <a:schemeClr val="dk1">
+                      <a:alpha val="40000"/>
+                    </a:schemeClr>
+                  </a:outerShdw>
+                </a:effectLst>
+                <a:latin typeface="微软雅黑" panose="020B0503020204020204" pitchFamily="34" charset="-122"/>
+                <a:ea typeface="微软雅黑" panose="020B0503020204020204" pitchFamily="34" charset="-122"/>
+              </a:rPr>
+              <a:t>继承</a:t>
+            </a:r>
+            <a:endParaRPr lang="en-US" altLang="zh-CN" sz="2400" b="1" cap="none" spc="0" dirty="0">
+              <a:ln w="0"/>
+              <a:solidFill>
+                <a:srgbClr val="FF0000"/>
+              </a:solidFill>
+              <a:effectLst>
+                <a:outerShdw blurRad="38100" dist="19050" dir="2700000" algn="tl" rotWithShape="0">
+                  <a:schemeClr val="dk1">
+                    <a:alpha val="40000"/>
+                  </a:schemeClr>
+                </a:outerShdw>
+              </a:effectLst>
+              <a:latin typeface="微软雅黑" panose="020B0503020204020204" pitchFamily="34" charset="-122"/>
+              <a:ea typeface="微软雅黑" panose="020B0503020204020204" pitchFamily="34" charset="-122"/>
+            </a:endParaRPr>
+          </a:p>
+        </p:txBody>
+      </p:sp>
+      <p:sp>
+        <p:nvSpPr>
+          <p:cNvPr id="34" name="矩形 33">
+            <a:extLst>
+              <a:ext uri="{FF2B5EF4-FFF2-40B4-BE49-F238E27FC236}">
+                <a16:creationId xmlns:a16="http://schemas.microsoft.com/office/drawing/2014/main" id="{38AC40B1-9326-93BB-2F91-01F49FF0BE2F}"/>
+              </a:ext>
+            </a:extLst>
+          </p:cNvPr>
+          <p:cNvSpPr/>
+          <p:nvPr/>
+        </p:nvSpPr>
+        <p:spPr>
+          <a:xfrm>
+            <a:off x="9342495" y="5967827"/>
+            <a:ext cx="1107996" cy="461665"/>
+          </a:xfrm>
+          <a:prstGeom prst="rect">
+            <a:avLst/>
+          </a:prstGeom>
+          <a:noFill/>
+        </p:spPr>
+        <p:txBody>
+          <a:bodyPr wrap="none" lIns="91440" tIns="45720" rIns="91440" bIns="45720">
+            <a:spAutoFit/>
+          </a:bodyPr>
+          <a:lstStyle/>
+          <a:p>
+            <a:pPr algn="ctr"/>
+            <a:r>
+              <a:rPr lang="zh-CN" altLang="en-US" sz="2400" b="1" cap="none" spc="0" dirty="0">
+                <a:ln w="0"/>
+                <a:solidFill>
+                  <a:srgbClr val="FF0000"/>
+                </a:solidFill>
+                <a:effectLst>
+                  <a:outerShdw blurRad="38100" dist="19050" dir="2700000" algn="tl" rotWithShape="0">
+                    <a:schemeClr val="dk1">
+                      <a:alpha val="40000"/>
+                    </a:schemeClr>
+                  </a:outerShdw>
+                </a:effectLst>
+                <a:latin typeface="微软雅黑" panose="020B0503020204020204" pitchFamily="34" charset="-122"/>
+                <a:ea typeface="微软雅黑" panose="020B0503020204020204" pitchFamily="34" charset="-122"/>
+              </a:rPr>
+              <a:t>实例化</a:t>
+            </a:r>
+            <a:endParaRPr lang="en-US" altLang="zh-CN" sz="2400" b="1" cap="none" spc="0" dirty="0">
+              <a:ln w="0"/>
+              <a:solidFill>
+                <a:srgbClr val="FF0000"/>
+              </a:solidFill>
+              <a:effectLst>
+                <a:outerShdw blurRad="38100" dist="19050" dir="2700000" algn="tl" rotWithShape="0">
+                  <a:schemeClr val="dk1">
+                    <a:alpha val="40000"/>
+                  </a:schemeClr>
+                </a:outerShdw>
+              </a:effectLst>
+              <a:latin typeface="微软雅黑" panose="020B0503020204020204" pitchFamily="34" charset="-122"/>
+              <a:ea typeface="微软雅黑" panose="020B0503020204020204" pitchFamily="34" charset="-122"/>
+            </a:endParaRPr>
+          </a:p>
+        </p:txBody>
+      </p:sp>
+      <p:sp>
+        <p:nvSpPr>
+          <p:cNvPr id="35" name="文本框 34">
+            <a:extLst>
+              <a:ext uri="{FF2B5EF4-FFF2-40B4-BE49-F238E27FC236}">
+                <a16:creationId xmlns:a16="http://schemas.microsoft.com/office/drawing/2014/main" id="{B3ACF23A-17FC-9672-3DBF-24F030F4FF99}"/>
+              </a:ext>
+            </a:extLst>
+          </p:cNvPr>
+          <p:cNvSpPr txBox="1"/>
+          <p:nvPr/>
+        </p:nvSpPr>
+        <p:spPr>
+          <a:xfrm>
+            <a:off x="170804" y="1758258"/>
+            <a:ext cx="2275431" cy="3693319"/>
+          </a:xfrm>
+          <a:prstGeom prst="rect">
+            <a:avLst/>
+          </a:prstGeom>
+          <a:noFill/>
+        </p:spPr>
+        <p:txBody>
+          <a:bodyPr wrap="none" rtlCol="0">
+            <a:spAutoFit/>
+          </a:bodyPr>
+          <a:lstStyle/>
+          <a:p>
+            <a:r>
+              <a:rPr lang="en-US" altLang="zh-CN" b="1" dirty="0">
+                <a:latin typeface="微软雅黑" panose="020B0503020204020204" pitchFamily="34" charset="-122"/>
+                <a:ea typeface="微软雅黑" panose="020B0503020204020204" pitchFamily="34" charset="-122"/>
+              </a:rPr>
+              <a:t>name</a:t>
+            </a:r>
+          </a:p>
+          <a:p>
+            <a:r>
+              <a:rPr lang="en-US" altLang="zh-CN" b="1" dirty="0">
+                <a:latin typeface="微软雅黑" panose="020B0503020204020204" pitchFamily="34" charset="-122"/>
+                <a:ea typeface="微软雅黑" panose="020B0503020204020204" pitchFamily="34" charset="-122"/>
+              </a:rPr>
+              <a:t>caster</a:t>
+            </a:r>
+          </a:p>
+          <a:p>
+            <a:r>
+              <a:rPr lang="en-US" altLang="zh-CN" b="1" dirty="0" err="1">
+                <a:latin typeface="微软雅黑" panose="020B0503020204020204" pitchFamily="34" charset="-122"/>
+                <a:ea typeface="微软雅黑" panose="020B0503020204020204" pitchFamily="34" charset="-122"/>
+              </a:rPr>
+              <a:t>mana_cost</a:t>
+            </a:r>
+            <a:endParaRPr lang="en-US" altLang="zh-CN" b="1" dirty="0">
+              <a:latin typeface="微软雅黑" panose="020B0503020204020204" pitchFamily="34" charset="-122"/>
+              <a:ea typeface="微软雅黑" panose="020B0503020204020204" pitchFamily="34" charset="-122"/>
+            </a:endParaRPr>
+          </a:p>
+          <a:p>
+            <a:r>
+              <a:rPr lang="en-US" altLang="zh-CN" b="1" dirty="0">
+                <a:latin typeface="微软雅黑" panose="020B0503020204020204" pitchFamily="34" charset="-122"/>
+                <a:ea typeface="微软雅黑" panose="020B0503020204020204" pitchFamily="34" charset="-122"/>
+              </a:rPr>
+              <a:t>cooldown</a:t>
+            </a:r>
+          </a:p>
+          <a:p>
+            <a:r>
+              <a:rPr lang="en-US" altLang="zh-CN" b="1" dirty="0">
+                <a:latin typeface="微软雅黑" panose="020B0503020204020204" pitchFamily="34" charset="-122"/>
+                <a:ea typeface="微软雅黑" panose="020B0503020204020204" pitchFamily="34" charset="-122"/>
+              </a:rPr>
+              <a:t>icon</a:t>
+            </a:r>
+          </a:p>
+          <a:p>
+            <a:r>
+              <a:rPr lang="en-US" altLang="zh-CN" b="1" dirty="0" err="1">
+                <a:latin typeface="微软雅黑" panose="020B0503020204020204" pitchFamily="34" charset="-122"/>
+                <a:ea typeface="微软雅黑" panose="020B0503020204020204" pitchFamily="34" charset="-122"/>
+              </a:rPr>
+              <a:t>current_cooldown</a:t>
+            </a:r>
+            <a:endParaRPr lang="en-US" altLang="zh-CN" b="1" dirty="0">
+              <a:latin typeface="微软雅黑" panose="020B0503020204020204" pitchFamily="34" charset="-122"/>
+              <a:ea typeface="微软雅黑" panose="020B0503020204020204" pitchFamily="34" charset="-122"/>
+            </a:endParaRPr>
+          </a:p>
+          <a:p>
+            <a:endParaRPr lang="en-US" altLang="zh-CN" b="1" dirty="0">
+              <a:latin typeface="微软雅黑" panose="020B0503020204020204" pitchFamily="34" charset="-122"/>
+              <a:ea typeface="微软雅黑" panose="020B0503020204020204" pitchFamily="34" charset="-122"/>
+            </a:endParaRPr>
+          </a:p>
+          <a:p>
+            <a:endParaRPr lang="en-US" altLang="zh-CN" b="1" dirty="0">
+              <a:latin typeface="微软雅黑" panose="020B0503020204020204" pitchFamily="34" charset="-122"/>
+              <a:ea typeface="微软雅黑" panose="020B0503020204020204" pitchFamily="34" charset="-122"/>
+            </a:endParaRPr>
+          </a:p>
+          <a:p>
+            <a:r>
+              <a:rPr lang="en-US" altLang="zh-CN" b="1" dirty="0" err="1">
+                <a:latin typeface="微软雅黑" panose="020B0503020204020204" pitchFamily="34" charset="-122"/>
+                <a:ea typeface="微软雅黑" panose="020B0503020204020204" pitchFamily="34" charset="-122"/>
+              </a:rPr>
+              <a:t>show_info</a:t>
+            </a:r>
+            <a:r>
+              <a:rPr lang="en-US" altLang="zh-CN" b="1" dirty="0">
+                <a:latin typeface="微软雅黑" panose="020B0503020204020204" pitchFamily="34" charset="-122"/>
+                <a:ea typeface="微软雅黑" panose="020B0503020204020204" pitchFamily="34" charset="-122"/>
+              </a:rPr>
+              <a:t>()</a:t>
+            </a:r>
+          </a:p>
+          <a:p>
+            <a:r>
+              <a:rPr lang="en-US" altLang="zh-CN" b="1" dirty="0" err="1">
+                <a:latin typeface="微软雅黑" panose="020B0503020204020204" pitchFamily="34" charset="-122"/>
+                <a:ea typeface="微软雅黑" panose="020B0503020204020204" pitchFamily="34" charset="-122"/>
+              </a:rPr>
+              <a:t>is_ready</a:t>
+            </a:r>
+            <a:r>
+              <a:rPr lang="en-US" altLang="zh-CN" b="1" dirty="0">
+                <a:latin typeface="微软雅黑" panose="020B0503020204020204" pitchFamily="34" charset="-122"/>
+                <a:ea typeface="微软雅黑" panose="020B0503020204020204" pitchFamily="34" charset="-122"/>
+              </a:rPr>
+              <a:t>()</a:t>
+            </a:r>
+          </a:p>
+          <a:p>
+            <a:r>
+              <a:rPr lang="en-US" altLang="zh-CN" b="1" dirty="0" err="1">
+                <a:latin typeface="微软雅黑" panose="020B0503020204020204" pitchFamily="34" charset="-122"/>
+                <a:ea typeface="微软雅黑" panose="020B0503020204020204" pitchFamily="34" charset="-122"/>
+              </a:rPr>
+              <a:t>spend_nama</a:t>
+            </a:r>
+            <a:r>
+              <a:rPr lang="en-US" altLang="zh-CN" b="1" dirty="0">
+                <a:latin typeface="微软雅黑" panose="020B0503020204020204" pitchFamily="34" charset="-122"/>
+                <a:ea typeface="微软雅黑" panose="020B0503020204020204" pitchFamily="34" charset="-122"/>
+              </a:rPr>
+              <a:t>()</a:t>
+            </a:r>
+          </a:p>
+          <a:p>
+            <a:r>
+              <a:rPr lang="en-US" altLang="zh-CN" b="1" dirty="0" err="1">
+                <a:latin typeface="微软雅黑" panose="020B0503020204020204" pitchFamily="34" charset="-122"/>
+                <a:ea typeface="微软雅黑" panose="020B0503020204020204" pitchFamily="34" charset="-122"/>
+              </a:rPr>
+              <a:t>reset_cooldown</a:t>
+            </a:r>
+            <a:r>
+              <a:rPr lang="en-US" altLang="zh-CN" b="1" dirty="0">
+                <a:latin typeface="微软雅黑" panose="020B0503020204020204" pitchFamily="34" charset="-122"/>
+                <a:ea typeface="微软雅黑" panose="020B0503020204020204" pitchFamily="34" charset="-122"/>
+              </a:rPr>
+              <a:t>()</a:t>
+            </a:r>
+          </a:p>
+          <a:p>
+            <a:r>
+              <a:rPr lang="en-US" altLang="zh-CN" b="1" dirty="0">
+                <a:latin typeface="微软雅黑" panose="020B0503020204020204" pitchFamily="34" charset="-122"/>
+                <a:ea typeface="微软雅黑" panose="020B0503020204020204" pitchFamily="34" charset="-122"/>
+              </a:rPr>
+              <a:t>cast()</a:t>
+            </a:r>
+          </a:p>
+        </p:txBody>
+      </p:sp>
+      <p:sp>
+        <p:nvSpPr>
+          <p:cNvPr id="37" name="文本框 36">
+            <a:extLst>
+              <a:ext uri="{FF2B5EF4-FFF2-40B4-BE49-F238E27FC236}">
+                <a16:creationId xmlns:a16="http://schemas.microsoft.com/office/drawing/2014/main" id="{358FA847-701E-2B6B-79C6-E484B48CB51B}"/>
+              </a:ext>
+            </a:extLst>
+          </p:cNvPr>
+          <p:cNvSpPr txBox="1"/>
+          <p:nvPr/>
+        </p:nvSpPr>
+        <p:spPr>
+          <a:xfrm>
+            <a:off x="2358613" y="1758257"/>
+            <a:ext cx="1107996" cy="1754326"/>
+          </a:xfrm>
+          <a:prstGeom prst="rect">
+            <a:avLst/>
+          </a:prstGeom>
+          <a:noFill/>
+        </p:spPr>
+        <p:txBody>
+          <a:bodyPr wrap="none" rtlCol="0">
+            <a:spAutoFit/>
+          </a:bodyPr>
+          <a:lstStyle/>
+          <a:p>
+            <a:pPr algn="r"/>
+            <a:r>
+              <a:rPr lang="zh-CN" altLang="en-US" b="1" dirty="0">
+                <a:latin typeface="微软雅黑" panose="020B0503020204020204" pitchFamily="34" charset="-122"/>
+                <a:ea typeface="微软雅黑" panose="020B0503020204020204" pitchFamily="34" charset="-122"/>
+              </a:rPr>
+              <a:t>名称</a:t>
+            </a:r>
+            <a:endParaRPr lang="en-US" altLang="zh-CN" b="1" dirty="0">
+              <a:latin typeface="微软雅黑" panose="020B0503020204020204" pitchFamily="34" charset="-122"/>
+              <a:ea typeface="微软雅黑" panose="020B0503020204020204" pitchFamily="34" charset="-122"/>
+            </a:endParaRPr>
+          </a:p>
+          <a:p>
+            <a:pPr algn="r"/>
+            <a:r>
+              <a:rPr lang="zh-CN" altLang="en-US" b="1" dirty="0">
+                <a:latin typeface="微软雅黑" panose="020B0503020204020204" pitchFamily="34" charset="-122"/>
+                <a:ea typeface="微软雅黑" panose="020B0503020204020204" pitchFamily="34" charset="-122"/>
+              </a:rPr>
+              <a:t>施法人</a:t>
+            </a:r>
+            <a:endParaRPr lang="en-US" altLang="zh-CN" b="1" dirty="0">
+              <a:latin typeface="微软雅黑" panose="020B0503020204020204" pitchFamily="34" charset="-122"/>
+              <a:ea typeface="微软雅黑" panose="020B0503020204020204" pitchFamily="34" charset="-122"/>
+            </a:endParaRPr>
+          </a:p>
+          <a:p>
+            <a:pPr algn="r"/>
+            <a:r>
+              <a:rPr lang="zh-CN" altLang="en-US" b="1" dirty="0">
+                <a:latin typeface="微软雅黑" panose="020B0503020204020204" pitchFamily="34" charset="-122"/>
+                <a:ea typeface="微软雅黑" panose="020B0503020204020204" pitchFamily="34" charset="-122"/>
+              </a:rPr>
+              <a:t>蓝耗</a:t>
+            </a:r>
+            <a:endParaRPr lang="en-US" altLang="zh-CN" b="1" dirty="0">
+              <a:latin typeface="微软雅黑" panose="020B0503020204020204" pitchFamily="34" charset="-122"/>
+              <a:ea typeface="微软雅黑" panose="020B0503020204020204" pitchFamily="34" charset="-122"/>
+            </a:endParaRPr>
+          </a:p>
+          <a:p>
+            <a:pPr algn="r"/>
+            <a:r>
+              <a:rPr lang="zh-CN" altLang="en-US" b="1" dirty="0">
+                <a:latin typeface="微软雅黑" panose="020B0503020204020204" pitchFamily="34" charset="-122"/>
+                <a:ea typeface="微软雅黑" panose="020B0503020204020204" pitchFamily="34" charset="-122"/>
+              </a:rPr>
+              <a:t>冷却</a:t>
+            </a:r>
+            <a:endParaRPr lang="en-US" altLang="zh-CN" b="1" dirty="0">
+              <a:latin typeface="微软雅黑" panose="020B0503020204020204" pitchFamily="34" charset="-122"/>
+              <a:ea typeface="微软雅黑" panose="020B0503020204020204" pitchFamily="34" charset="-122"/>
+            </a:endParaRPr>
+          </a:p>
+          <a:p>
+            <a:pPr algn="r"/>
+            <a:r>
+              <a:rPr lang="zh-CN" altLang="en-US" b="1" dirty="0">
+                <a:latin typeface="微软雅黑" panose="020B0503020204020204" pitchFamily="34" charset="-122"/>
+                <a:ea typeface="微软雅黑" panose="020B0503020204020204" pitchFamily="34" charset="-122"/>
+              </a:rPr>
+              <a:t>图标</a:t>
+            </a:r>
+            <a:endParaRPr lang="en-US" altLang="zh-CN" b="1" dirty="0">
+              <a:latin typeface="微软雅黑" panose="020B0503020204020204" pitchFamily="34" charset="-122"/>
+              <a:ea typeface="微软雅黑" panose="020B0503020204020204" pitchFamily="34" charset="-122"/>
+            </a:endParaRPr>
+          </a:p>
+          <a:p>
+            <a:pPr algn="r">
+              <a:spcAft>
+                <a:spcPts val="1000"/>
+              </a:spcAft>
+            </a:pPr>
+            <a:r>
+              <a:rPr lang="zh-CN" altLang="en-US" b="1" dirty="0">
+                <a:latin typeface="微软雅黑" panose="020B0503020204020204" pitchFamily="34" charset="-122"/>
+                <a:ea typeface="微软雅黑" panose="020B0503020204020204" pitchFamily="34" charset="-122"/>
+              </a:rPr>
+              <a:t>当前冷却</a:t>
+            </a:r>
+            <a:endParaRPr lang="en-US" altLang="zh-CN" b="1" dirty="0">
+              <a:latin typeface="微软雅黑" panose="020B0503020204020204" pitchFamily="34" charset="-122"/>
+              <a:ea typeface="微软雅黑" panose="020B0503020204020204" pitchFamily="34" charset="-122"/>
+            </a:endParaRPr>
+          </a:p>
+        </p:txBody>
+      </p:sp>
+      <p:sp>
+        <p:nvSpPr>
+          <p:cNvPr id="38" name="文本框 37">
+            <a:extLst>
+              <a:ext uri="{FF2B5EF4-FFF2-40B4-BE49-F238E27FC236}">
+                <a16:creationId xmlns:a16="http://schemas.microsoft.com/office/drawing/2014/main" id="{E1637CBA-454B-7AAE-889A-4C7647B7B676}"/>
+              </a:ext>
+            </a:extLst>
+          </p:cNvPr>
+          <p:cNvSpPr txBox="1"/>
+          <p:nvPr/>
+        </p:nvSpPr>
+        <p:spPr>
+          <a:xfrm>
+            <a:off x="2262555" y="3951250"/>
+            <a:ext cx="1176924" cy="1200329"/>
+          </a:xfrm>
+          <a:prstGeom prst="rect">
+            <a:avLst/>
+          </a:prstGeom>
+          <a:noFill/>
+        </p:spPr>
+        <p:txBody>
+          <a:bodyPr wrap="none" rtlCol="0">
+            <a:spAutoFit/>
+          </a:bodyPr>
+          <a:lstStyle/>
+          <a:p>
+            <a:pPr algn="r"/>
+            <a:r>
+              <a:rPr lang="zh-CN" altLang="en-US" b="1" dirty="0">
+                <a:latin typeface="微软雅黑" panose="020B0503020204020204" pitchFamily="34" charset="-122"/>
+                <a:ea typeface="微软雅黑" panose="020B0503020204020204" pitchFamily="34" charset="-122"/>
+              </a:rPr>
+              <a:t>技能说明</a:t>
+            </a:r>
+            <a:endParaRPr lang="en-US" altLang="zh-CN" b="1" dirty="0">
+              <a:latin typeface="微软雅黑" panose="020B0503020204020204" pitchFamily="34" charset="-122"/>
+              <a:ea typeface="微软雅黑" panose="020B0503020204020204" pitchFamily="34" charset="-122"/>
+            </a:endParaRPr>
+          </a:p>
+          <a:p>
+            <a:pPr algn="r"/>
+            <a:r>
+              <a:rPr lang="zh-CN" altLang="en-US" b="1" dirty="0">
+                <a:latin typeface="微软雅黑" panose="020B0503020204020204" pitchFamily="34" charset="-122"/>
+                <a:ea typeface="微软雅黑" panose="020B0503020204020204" pitchFamily="34" charset="-122"/>
+              </a:rPr>
+              <a:t>是否准备</a:t>
+            </a:r>
+            <a:endParaRPr lang="en-US" altLang="zh-CN" b="1" dirty="0">
+              <a:latin typeface="微软雅黑" panose="020B0503020204020204" pitchFamily="34" charset="-122"/>
+              <a:ea typeface="微软雅黑" panose="020B0503020204020204" pitchFamily="34" charset="-122"/>
+            </a:endParaRPr>
+          </a:p>
+          <a:p>
+            <a:pPr algn="r"/>
+            <a:r>
+              <a:rPr lang="zh-CN" altLang="en-US" b="1" dirty="0">
+                <a:latin typeface="微软雅黑" panose="020B0503020204020204" pitchFamily="34" charset="-122"/>
+                <a:ea typeface="微软雅黑" panose="020B0503020204020204" pitchFamily="34" charset="-122"/>
+              </a:rPr>
+              <a:t>耗蓝</a:t>
+            </a:r>
+            <a:endParaRPr lang="en-US" altLang="zh-CN" b="1" dirty="0">
+              <a:latin typeface="微软雅黑" panose="020B0503020204020204" pitchFamily="34" charset="-122"/>
+              <a:ea typeface="微软雅黑" panose="020B0503020204020204" pitchFamily="34" charset="-122"/>
+            </a:endParaRPr>
+          </a:p>
+          <a:p>
+            <a:pPr algn="r"/>
+            <a:r>
+              <a:rPr lang="zh-CN" altLang="en-US" b="1" dirty="0">
+                <a:latin typeface="微软雅黑" panose="020B0503020204020204" pitchFamily="34" charset="-122"/>
+                <a:ea typeface="微软雅黑" panose="020B0503020204020204" pitchFamily="34" charset="-122"/>
+              </a:rPr>
+              <a:t> 重置冷却</a:t>
+            </a:r>
+            <a:endParaRPr lang="en-US" altLang="zh-CN" b="1" dirty="0">
+              <a:latin typeface="微软雅黑" panose="020B0503020204020204" pitchFamily="34" charset="-122"/>
+              <a:ea typeface="微软雅黑" panose="020B0503020204020204" pitchFamily="34" charset="-122"/>
+            </a:endParaRPr>
+          </a:p>
+        </p:txBody>
+      </p:sp>
+      <p:sp>
+        <p:nvSpPr>
+          <p:cNvPr id="39" name="文本框 38">
+            <a:extLst>
+              <a:ext uri="{FF2B5EF4-FFF2-40B4-BE49-F238E27FC236}">
+                <a16:creationId xmlns:a16="http://schemas.microsoft.com/office/drawing/2014/main" id="{80C73672-ED8B-1014-0FC1-C7839FDE91F7}"/>
+              </a:ext>
+            </a:extLst>
+          </p:cNvPr>
+          <p:cNvSpPr txBox="1"/>
+          <p:nvPr/>
+        </p:nvSpPr>
+        <p:spPr>
+          <a:xfrm>
+            <a:off x="690658" y="5104644"/>
+            <a:ext cx="1628495" cy="584775"/>
+          </a:xfrm>
+          <a:prstGeom prst="rect">
+            <a:avLst/>
+          </a:prstGeom>
+          <a:noFill/>
+        </p:spPr>
+        <p:txBody>
+          <a:bodyPr wrap="square" rtlCol="0">
+            <a:spAutoFit/>
+          </a:bodyPr>
+          <a:lstStyle/>
+          <a:p>
+            <a:pPr algn="r"/>
+            <a:r>
+              <a:rPr lang="zh-CN" altLang="en-US" b="1" dirty="0">
+                <a:latin typeface="微软雅黑" panose="020B0503020204020204" pitchFamily="34" charset="-122"/>
+                <a:ea typeface="微软雅黑" panose="020B0503020204020204" pitchFamily="34" charset="-122"/>
+              </a:rPr>
+              <a:t>技能投射</a:t>
+            </a:r>
+            <a:endParaRPr lang="en-US" altLang="zh-CN" b="1" dirty="0">
+              <a:latin typeface="微软雅黑" panose="020B0503020204020204" pitchFamily="34" charset="-122"/>
+              <a:ea typeface="微软雅黑" panose="020B0503020204020204" pitchFamily="34" charset="-122"/>
+            </a:endParaRPr>
+          </a:p>
+          <a:p>
+            <a:pPr algn="r"/>
+            <a:r>
+              <a:rPr lang="en-US" altLang="zh-CN" sz="1400" b="1" dirty="0">
+                <a:latin typeface="微软雅黑" panose="020B0503020204020204" pitchFamily="34" charset="-122"/>
+                <a:ea typeface="微软雅黑" panose="020B0503020204020204" pitchFamily="34" charset="-122"/>
+              </a:rPr>
+              <a:t>(</a:t>
+            </a:r>
+            <a:r>
+              <a:rPr lang="zh-CN" altLang="en-US" sz="1400" b="1" dirty="0">
+                <a:latin typeface="微软雅黑" panose="020B0503020204020204" pitchFamily="34" charset="-122"/>
+                <a:ea typeface="微软雅黑" panose="020B0503020204020204" pitchFamily="34" charset="-122"/>
+              </a:rPr>
+              <a:t>由派生类重写</a:t>
+            </a:r>
+            <a:r>
+              <a:rPr lang="en-US" altLang="zh-CN" sz="1400" b="1" dirty="0">
+                <a:latin typeface="微软雅黑" panose="020B0503020204020204" pitchFamily="34" charset="-122"/>
+                <a:ea typeface="微软雅黑" panose="020B0503020204020204" pitchFamily="34" charset="-122"/>
+              </a:rPr>
+              <a:t>)</a:t>
+            </a:r>
+          </a:p>
+        </p:txBody>
+      </p:sp>
+      <p:sp>
+        <p:nvSpPr>
+          <p:cNvPr id="40" name="文本框 39">
+            <a:extLst>
+              <a:ext uri="{FF2B5EF4-FFF2-40B4-BE49-F238E27FC236}">
+                <a16:creationId xmlns:a16="http://schemas.microsoft.com/office/drawing/2014/main" id="{40331D79-6E1C-850B-268C-F1819FA680C6}"/>
+              </a:ext>
+            </a:extLst>
+          </p:cNvPr>
+          <p:cNvSpPr txBox="1"/>
+          <p:nvPr/>
+        </p:nvSpPr>
+        <p:spPr>
+          <a:xfrm>
+            <a:off x="6193512" y="1762826"/>
+            <a:ext cx="3121688" cy="400110"/>
+          </a:xfrm>
+          <a:prstGeom prst="rect">
+            <a:avLst/>
+          </a:prstGeom>
+          <a:noFill/>
+        </p:spPr>
+        <p:txBody>
+          <a:bodyPr wrap="none" rtlCol="0">
+            <a:spAutoFit/>
+          </a:bodyPr>
+          <a:lstStyle/>
+          <a:p>
+            <a:r>
+              <a:rPr lang="en-US" altLang="zh-CN" sz="2000" b="1" dirty="0">
+                <a:latin typeface="微软雅黑" panose="020B0503020204020204" pitchFamily="34" charset="-122"/>
+                <a:ea typeface="微软雅黑" panose="020B0503020204020204" pitchFamily="34" charset="-122"/>
+              </a:rPr>
+              <a:t>def cast(target: obj, …)</a:t>
+            </a:r>
+            <a:endParaRPr lang="zh-CN" altLang="en-US" sz="2000" b="1" dirty="0">
+              <a:latin typeface="微软雅黑" panose="020B0503020204020204" pitchFamily="34" charset="-122"/>
+              <a:ea typeface="微软雅黑" panose="020B0503020204020204" pitchFamily="34" charset="-122"/>
+            </a:endParaRPr>
+          </a:p>
+        </p:txBody>
+      </p:sp>
+      <p:sp>
+        <p:nvSpPr>
+          <p:cNvPr id="41" name="文本框 40">
+            <a:extLst>
+              <a:ext uri="{FF2B5EF4-FFF2-40B4-BE49-F238E27FC236}">
+                <a16:creationId xmlns:a16="http://schemas.microsoft.com/office/drawing/2014/main" id="{5D0E4F92-F9E7-4D22-4590-F5E2C52865DC}"/>
+              </a:ext>
+            </a:extLst>
+          </p:cNvPr>
+          <p:cNvSpPr txBox="1"/>
+          <p:nvPr/>
+        </p:nvSpPr>
+        <p:spPr>
+          <a:xfrm>
+            <a:off x="6193512" y="3405737"/>
+            <a:ext cx="3121688" cy="400110"/>
+          </a:xfrm>
+          <a:prstGeom prst="rect">
+            <a:avLst/>
+          </a:prstGeom>
+          <a:noFill/>
+        </p:spPr>
+        <p:txBody>
+          <a:bodyPr wrap="none" rtlCol="0">
+            <a:spAutoFit/>
+          </a:bodyPr>
+          <a:lstStyle/>
+          <a:p>
+            <a:r>
+              <a:rPr lang="en-US" altLang="zh-CN" sz="2000" b="1" dirty="0">
+                <a:latin typeface="微软雅黑" panose="020B0503020204020204" pitchFamily="34" charset="-122"/>
+                <a:ea typeface="微软雅黑" panose="020B0503020204020204" pitchFamily="34" charset="-122"/>
+              </a:rPr>
+              <a:t>def cast(target: obj, …)</a:t>
+            </a:r>
+            <a:endParaRPr lang="zh-CN" altLang="en-US" sz="2000" b="1" dirty="0">
+              <a:latin typeface="微软雅黑" panose="020B0503020204020204" pitchFamily="34" charset="-122"/>
+              <a:ea typeface="微软雅黑" panose="020B0503020204020204" pitchFamily="34" charset="-122"/>
+            </a:endParaRPr>
+          </a:p>
+        </p:txBody>
+      </p:sp>
+      <p:sp>
+        <p:nvSpPr>
+          <p:cNvPr id="42" name="文本框 41">
+            <a:extLst>
+              <a:ext uri="{FF2B5EF4-FFF2-40B4-BE49-F238E27FC236}">
+                <a16:creationId xmlns:a16="http://schemas.microsoft.com/office/drawing/2014/main" id="{7809C0C7-B042-7887-8090-FF3DE3E1FE95}"/>
+              </a:ext>
+            </a:extLst>
+          </p:cNvPr>
+          <p:cNvSpPr txBox="1"/>
+          <p:nvPr/>
+        </p:nvSpPr>
+        <p:spPr>
+          <a:xfrm>
+            <a:off x="4528724" y="3414861"/>
+            <a:ext cx="2142061" cy="707886"/>
+          </a:xfrm>
+          <a:prstGeom prst="rect">
+            <a:avLst/>
+          </a:prstGeom>
+          <a:noFill/>
+        </p:spPr>
+        <p:txBody>
+          <a:bodyPr wrap="none" rtlCol="0">
+            <a:spAutoFit/>
+          </a:bodyPr>
+          <a:lstStyle/>
+          <a:p>
+            <a:r>
+              <a:rPr lang="en-US" altLang="zh-CN" sz="2000" b="1" dirty="0" err="1">
+                <a:latin typeface="微软雅黑" panose="020B0503020204020204" pitchFamily="34" charset="-122"/>
+                <a:ea typeface="微软雅黑" panose="020B0503020204020204" pitchFamily="34" charset="-122"/>
+              </a:rPr>
+              <a:t>self.effect</a:t>
+            </a:r>
+            <a:endParaRPr lang="en-US" altLang="zh-CN" sz="2000" b="1" dirty="0">
+              <a:latin typeface="微软雅黑" panose="020B0503020204020204" pitchFamily="34" charset="-122"/>
+              <a:ea typeface="微软雅黑" panose="020B0503020204020204" pitchFamily="34" charset="-122"/>
+            </a:endParaRPr>
+          </a:p>
+          <a:p>
+            <a:r>
+              <a:rPr lang="en-US" altLang="zh-CN" sz="2000" b="1" dirty="0" err="1">
+                <a:latin typeface="微软雅黑" panose="020B0503020204020204" pitchFamily="34" charset="-122"/>
+                <a:ea typeface="微软雅黑" panose="020B0503020204020204" pitchFamily="34" charset="-122"/>
+              </a:rPr>
+              <a:t>self.effect_time</a:t>
+            </a:r>
+            <a:endParaRPr lang="zh-CN" altLang="en-US" sz="2000" b="1" dirty="0">
+              <a:latin typeface="微软雅黑" panose="020B0503020204020204" pitchFamily="34" charset="-122"/>
+              <a:ea typeface="微软雅黑" panose="020B0503020204020204" pitchFamily="34" charset="-122"/>
+            </a:endParaRPr>
+          </a:p>
+        </p:txBody>
+      </p:sp>
+      <p:sp>
+        <p:nvSpPr>
+          <p:cNvPr id="44" name="文本框 43">
+            <a:extLst>
+              <a:ext uri="{FF2B5EF4-FFF2-40B4-BE49-F238E27FC236}">
+                <a16:creationId xmlns:a16="http://schemas.microsoft.com/office/drawing/2014/main" id="{7C3B375E-EBCC-3C20-29BB-FD66B85B3644}"/>
+              </a:ext>
+            </a:extLst>
+          </p:cNvPr>
+          <p:cNvSpPr txBox="1"/>
+          <p:nvPr/>
+        </p:nvSpPr>
+        <p:spPr>
+          <a:xfrm>
+            <a:off x="4581059" y="1762826"/>
+            <a:ext cx="1444754" cy="400110"/>
+          </a:xfrm>
+          <a:prstGeom prst="rect">
+            <a:avLst/>
+          </a:prstGeom>
+          <a:noFill/>
+        </p:spPr>
+        <p:txBody>
+          <a:bodyPr wrap="none" rtlCol="0">
+            <a:spAutoFit/>
+          </a:bodyPr>
+          <a:lstStyle/>
+          <a:p>
+            <a:r>
+              <a:rPr lang="en-US" altLang="zh-CN" sz="2000" b="1" dirty="0" err="1">
+                <a:latin typeface="微软雅黑" panose="020B0503020204020204" pitchFamily="34" charset="-122"/>
+                <a:ea typeface="微软雅黑" panose="020B0503020204020204" pitchFamily="34" charset="-122"/>
+              </a:rPr>
+              <a:t>self.effect</a:t>
+            </a:r>
+            <a:endParaRPr lang="zh-CN" altLang="en-US" sz="2000" b="1" dirty="0">
+              <a:latin typeface="微软雅黑" panose="020B0503020204020204" pitchFamily="34" charset="-122"/>
+              <a:ea typeface="微软雅黑" panose="020B0503020204020204" pitchFamily="34" charset="-122"/>
+            </a:endParaRPr>
+          </a:p>
+        </p:txBody>
+      </p:sp>
+      <p:sp>
+        <p:nvSpPr>
+          <p:cNvPr id="45" name="文本框 44">
+            <a:extLst>
+              <a:ext uri="{FF2B5EF4-FFF2-40B4-BE49-F238E27FC236}">
+                <a16:creationId xmlns:a16="http://schemas.microsoft.com/office/drawing/2014/main" id="{2A504D1F-6152-B115-0E56-E5D0E371B658}"/>
+              </a:ext>
+            </a:extLst>
+          </p:cNvPr>
+          <p:cNvSpPr txBox="1"/>
+          <p:nvPr/>
+        </p:nvSpPr>
+        <p:spPr>
+          <a:xfrm>
+            <a:off x="4441341" y="5332057"/>
+            <a:ext cx="3147336" cy="400110"/>
+          </a:xfrm>
+          <a:prstGeom prst="rect">
+            <a:avLst/>
+          </a:prstGeom>
+          <a:noFill/>
+        </p:spPr>
+        <p:txBody>
+          <a:bodyPr wrap="none" rtlCol="0">
+            <a:spAutoFit/>
+          </a:bodyPr>
+          <a:lstStyle/>
+          <a:p>
+            <a:r>
+              <a:rPr lang="en-US" altLang="zh-CN" sz="2000" b="1" dirty="0">
+                <a:latin typeface="微软雅黑" panose="020B0503020204020204" pitchFamily="34" charset="-122"/>
+                <a:ea typeface="微软雅黑" panose="020B0503020204020204" pitchFamily="34" charset="-122"/>
+              </a:rPr>
+              <a:t>def cast(target: obj, …)</a:t>
+            </a:r>
+            <a:endParaRPr lang="zh-CN" altLang="en-US" sz="2000" b="1" dirty="0">
+              <a:latin typeface="微软雅黑" panose="020B0503020204020204" pitchFamily="34" charset="-122"/>
+              <a:ea typeface="微软雅黑" panose="020B0503020204020204" pitchFamily="34" charset="-122"/>
+            </a:endParaRPr>
+          </a:p>
+        </p:txBody>
+      </p:sp>
+      <p:sp>
+        <p:nvSpPr>
+          <p:cNvPr id="46" name="文本框 45">
+            <a:extLst>
+              <a:ext uri="{FF2B5EF4-FFF2-40B4-BE49-F238E27FC236}">
+                <a16:creationId xmlns:a16="http://schemas.microsoft.com/office/drawing/2014/main" id="{83394CD5-D0CE-A467-452F-5C1F4815C13F}"/>
+              </a:ext>
+            </a:extLst>
+          </p:cNvPr>
+          <p:cNvSpPr txBox="1"/>
+          <p:nvPr/>
+        </p:nvSpPr>
+        <p:spPr>
+          <a:xfrm>
+            <a:off x="2563798" y="1169385"/>
+            <a:ext cx="902811" cy="523220"/>
+          </a:xfrm>
+          <a:prstGeom prst="rect">
+            <a:avLst/>
+          </a:prstGeom>
+          <a:noFill/>
+        </p:spPr>
+        <p:txBody>
+          <a:bodyPr wrap="none" rtlCol="0">
+            <a:spAutoFit/>
+          </a:bodyPr>
+          <a:lstStyle/>
+          <a:p>
+            <a:r>
+              <a:rPr lang="zh-CN" altLang="en-US" sz="2800" b="1" dirty="0">
+                <a:latin typeface="微软雅黑" panose="020B0503020204020204" pitchFamily="34" charset="-122"/>
+                <a:ea typeface="微软雅黑" panose="020B0503020204020204" pitchFamily="34" charset="-122"/>
+              </a:rPr>
+              <a:t>技能</a:t>
+            </a:r>
+            <a:endParaRPr lang="zh-CN" altLang="en-US" sz="2800" dirty="0"/>
+          </a:p>
+        </p:txBody>
+      </p:sp>
+      <p:sp>
+        <p:nvSpPr>
+          <p:cNvPr id="47" name="文本框 46">
+            <a:extLst>
+              <a:ext uri="{FF2B5EF4-FFF2-40B4-BE49-F238E27FC236}">
+                <a16:creationId xmlns:a16="http://schemas.microsoft.com/office/drawing/2014/main" id="{F5D62D32-897C-1CA1-A57C-5520D6E5001C}"/>
+              </a:ext>
+            </a:extLst>
+          </p:cNvPr>
+          <p:cNvSpPr txBox="1"/>
+          <p:nvPr/>
+        </p:nvSpPr>
+        <p:spPr>
+          <a:xfrm>
+            <a:off x="7615255" y="1140714"/>
+            <a:ext cx="1723549" cy="400110"/>
+          </a:xfrm>
+          <a:prstGeom prst="rect">
+            <a:avLst/>
+          </a:prstGeom>
+          <a:noFill/>
+        </p:spPr>
+        <p:txBody>
+          <a:bodyPr wrap="none" rtlCol="0">
+            <a:spAutoFit/>
+          </a:bodyPr>
+          <a:lstStyle/>
+          <a:p>
+            <a:r>
+              <a:rPr lang="zh-CN" altLang="en-US" sz="2000" b="1" dirty="0">
+                <a:latin typeface="微软雅黑" panose="020B0503020204020204" pitchFamily="34" charset="-122"/>
+                <a:ea typeface="微软雅黑" panose="020B0503020204020204" pitchFamily="34" charset="-122"/>
+              </a:rPr>
+              <a:t>瞬发作用技能</a:t>
+            </a:r>
+            <a:endParaRPr lang="zh-CN" altLang="en-US" sz="2000" dirty="0"/>
+          </a:p>
+        </p:txBody>
+      </p:sp>
+      <p:sp>
+        <p:nvSpPr>
+          <p:cNvPr id="48" name="文本框 47">
+            <a:extLst>
+              <a:ext uri="{FF2B5EF4-FFF2-40B4-BE49-F238E27FC236}">
+                <a16:creationId xmlns:a16="http://schemas.microsoft.com/office/drawing/2014/main" id="{C5A86A69-B18A-42F3-CB4C-C4309983DC8F}"/>
+              </a:ext>
+            </a:extLst>
+          </p:cNvPr>
+          <p:cNvSpPr txBox="1"/>
+          <p:nvPr/>
+        </p:nvSpPr>
+        <p:spPr>
+          <a:xfrm>
+            <a:off x="7615254" y="2949632"/>
+            <a:ext cx="1723549" cy="400110"/>
+          </a:xfrm>
+          <a:prstGeom prst="rect">
+            <a:avLst/>
+          </a:prstGeom>
+          <a:noFill/>
+        </p:spPr>
+        <p:txBody>
+          <a:bodyPr wrap="none" rtlCol="0">
+            <a:spAutoFit/>
+          </a:bodyPr>
+          <a:lstStyle/>
+          <a:p>
+            <a:r>
+              <a:rPr lang="zh-CN" altLang="en-US" sz="2000" b="1" dirty="0">
+                <a:latin typeface="微软雅黑" panose="020B0503020204020204" pitchFamily="34" charset="-122"/>
+                <a:ea typeface="微软雅黑" panose="020B0503020204020204" pitchFamily="34" charset="-122"/>
+              </a:rPr>
+              <a:t>持续作用技能</a:t>
+            </a:r>
+            <a:endParaRPr lang="zh-CN" altLang="en-US" sz="2000" dirty="0"/>
+          </a:p>
+        </p:txBody>
+      </p:sp>
+      <p:sp>
+        <p:nvSpPr>
+          <p:cNvPr id="53" name="文本框 52">
+            <a:extLst>
+              <a:ext uri="{FF2B5EF4-FFF2-40B4-BE49-F238E27FC236}">
+                <a16:creationId xmlns:a16="http://schemas.microsoft.com/office/drawing/2014/main" id="{96C1F921-EA92-CE09-84AD-7DA858D46864}"/>
+              </a:ext>
+            </a:extLst>
+          </p:cNvPr>
+          <p:cNvSpPr txBox="1"/>
+          <p:nvPr/>
+        </p:nvSpPr>
+        <p:spPr>
+          <a:xfrm>
+            <a:off x="7868438" y="4761161"/>
+            <a:ext cx="1467068" cy="400110"/>
+          </a:xfrm>
+          <a:prstGeom prst="rect">
+            <a:avLst/>
+          </a:prstGeom>
+          <a:noFill/>
+        </p:spPr>
+        <p:txBody>
+          <a:bodyPr wrap="none" rtlCol="0">
+            <a:spAutoFit/>
+          </a:bodyPr>
+          <a:lstStyle/>
+          <a:p>
+            <a:r>
+              <a:rPr lang="zh-CN" altLang="en-US" sz="2000" b="1" dirty="0">
+                <a:latin typeface="微软雅黑" panose="020B0503020204020204" pitchFamily="34" charset="-122"/>
+                <a:ea typeface="微软雅黑" panose="020B0503020204020204" pitchFamily="34" charset="-122"/>
+              </a:rPr>
+              <a:t>状态类技能</a:t>
+            </a:r>
+            <a:endParaRPr lang="zh-CN" altLang="en-US" sz="2000" dirty="0"/>
+          </a:p>
+        </p:txBody>
+      </p:sp>
+    </p:spTree>
+    <p:extLst>
+      <p:ext uri="{BB962C8B-B14F-4D97-AF65-F5344CB8AC3E}">
+        <p14:creationId xmlns:p14="http://schemas.microsoft.com/office/powerpoint/2010/main" val="3204403342"/>
+      </p:ext>
+    </p:extLst>
+  </p:cSld>
+  <p:clrMapOvr>
+    <a:masterClrMapping/>
+  </p:clrMapOvr>
+</p:sld>
+</file>
+
+<file path=ppt/slides/slide11.xml><?xml version="1.0" encoding="utf-8"?>
+<p:sld xmlns:a="http://schemas.openxmlformats.org/drawingml/2006/main" xmlns:r="http://schemas.openxmlformats.org/officeDocument/2006/relationships" xmlns:p="http://schemas.openxmlformats.org/presentationml/2006/main">
+  <p:cSld>
+    <p:spTree>
+      <p:nvGrpSpPr>
+        <p:cNvPr id="1" name=""/>
+        <p:cNvGrpSpPr/>
+        <p:nvPr/>
+      </p:nvGrpSpPr>
+      <p:grpSpPr>
+        <a:xfrm>
+          <a:off x="0" y="0"/>
+          <a:ext cx="0" cy="0"/>
+          <a:chOff x="0" y="0"/>
+          <a:chExt cx="0" cy="0"/>
+        </a:xfrm>
+      </p:grpSpPr>
+      <p:sp>
+        <p:nvSpPr>
+          <p:cNvPr id="2" name="矩形 1">
+            <a:extLst>
+              <a:ext uri="{FF2B5EF4-FFF2-40B4-BE49-F238E27FC236}">
+                <a16:creationId xmlns:a16="http://schemas.microsoft.com/office/drawing/2014/main" id="{0415D4A6-3D02-5BC1-031F-40F029E26D36}"/>
+              </a:ext>
+            </a:extLst>
+          </p:cNvPr>
+          <p:cNvSpPr/>
+          <p:nvPr/>
+        </p:nvSpPr>
+        <p:spPr>
+          <a:xfrm>
+            <a:off x="203254" y="154635"/>
+            <a:ext cx="2492990" cy="646331"/>
+          </a:xfrm>
+          <a:prstGeom prst="rect">
+            <a:avLst/>
+          </a:prstGeom>
+          <a:noFill/>
+        </p:spPr>
+        <p:txBody>
+          <a:bodyPr wrap="none" lIns="91440" tIns="45720" rIns="91440" bIns="45720">
+            <a:spAutoFit/>
+          </a:bodyPr>
+          <a:lstStyle/>
+          <a:p>
+            <a:r>
+              <a:rPr lang="zh-CN" altLang="en-US" sz="3600" b="1" u="sng" dirty="0">
+                <a:ln w="0"/>
+                <a:effectLst>
+                  <a:outerShdw blurRad="38100" dist="19050" dir="2700000" algn="tl" rotWithShape="0">
+                    <a:schemeClr val="dk1">
+                      <a:alpha val="40000"/>
+                    </a:schemeClr>
+                  </a:outerShdw>
+                </a:effectLst>
+              </a:rPr>
+              <a:t>继承与多态</a:t>
+            </a:r>
+            <a:endParaRPr lang="zh-CN" altLang="en-US" sz="3600" b="1" u="sng" cap="none" spc="0" dirty="0">
+              <a:ln w="0"/>
+              <a:solidFill>
+                <a:schemeClr val="tx1"/>
+              </a:solidFill>
+              <a:effectLst>
+                <a:outerShdw blurRad="38100" dist="19050" dir="2700000" algn="tl" rotWithShape="0">
+                  <a:schemeClr val="dk1">
+                    <a:alpha val="40000"/>
+                  </a:schemeClr>
+                </a:outerShdw>
+              </a:effectLst>
+            </a:endParaRPr>
+          </a:p>
+        </p:txBody>
+      </p:sp>
+      <p:pic>
+        <p:nvPicPr>
+          <p:cNvPr id="43" name="图片 42">
+            <a:extLst>
+              <a:ext uri="{FF2B5EF4-FFF2-40B4-BE49-F238E27FC236}">
+                <a16:creationId xmlns:a16="http://schemas.microsoft.com/office/drawing/2014/main" id="{A9E222D1-C1D9-58D6-CE93-B3F2771B4E62}"/>
+              </a:ext>
+            </a:extLst>
+          </p:cNvPr>
+          <p:cNvPicPr>
+            <a:picLocks noChangeAspect="1"/>
+          </p:cNvPicPr>
+          <p:nvPr/>
+        </p:nvPicPr>
+        <p:blipFill>
+          <a:blip r:embed="rId2"/>
+          <a:stretch>
+            <a:fillRect/>
+          </a:stretch>
+        </p:blipFill>
+        <p:spPr>
+          <a:xfrm>
+            <a:off x="4242102" y="106870"/>
+            <a:ext cx="3684687" cy="3042104"/>
+          </a:xfrm>
+          <a:prstGeom prst="rect">
+            <a:avLst/>
+          </a:prstGeom>
+        </p:spPr>
+      </p:pic>
+      <p:pic>
+        <p:nvPicPr>
+          <p:cNvPr id="50" name="图片 49">
+            <a:extLst>
+              <a:ext uri="{FF2B5EF4-FFF2-40B4-BE49-F238E27FC236}">
+                <a16:creationId xmlns:a16="http://schemas.microsoft.com/office/drawing/2014/main" id="{2DCDA2E8-1DFC-A951-9805-B65E94B9CA98}"/>
+              </a:ext>
+            </a:extLst>
+          </p:cNvPr>
+          <p:cNvPicPr>
+            <a:picLocks noChangeAspect="1"/>
+          </p:cNvPicPr>
+          <p:nvPr/>
+        </p:nvPicPr>
+        <p:blipFill>
+          <a:blip r:embed="rId3"/>
+          <a:stretch>
+            <a:fillRect/>
+          </a:stretch>
+        </p:blipFill>
+        <p:spPr>
+          <a:xfrm>
+            <a:off x="203254" y="800966"/>
+            <a:ext cx="3822885" cy="5984543"/>
+          </a:xfrm>
+          <a:prstGeom prst="rect">
+            <a:avLst/>
+          </a:prstGeom>
+        </p:spPr>
+      </p:pic>
+      <p:pic>
+        <p:nvPicPr>
+          <p:cNvPr id="52" name="图片 51">
+            <a:extLst>
+              <a:ext uri="{FF2B5EF4-FFF2-40B4-BE49-F238E27FC236}">
+                <a16:creationId xmlns:a16="http://schemas.microsoft.com/office/drawing/2014/main" id="{9E656603-7BC1-5559-7046-B4526D88DCDE}"/>
+              </a:ext>
+            </a:extLst>
+          </p:cNvPr>
+          <p:cNvPicPr>
+            <a:picLocks noChangeAspect="1"/>
+          </p:cNvPicPr>
+          <p:nvPr/>
+        </p:nvPicPr>
+        <p:blipFill>
+          <a:blip r:embed="rId4"/>
+          <a:stretch>
+            <a:fillRect/>
+          </a:stretch>
+        </p:blipFill>
+        <p:spPr>
+          <a:xfrm>
+            <a:off x="4242102" y="3149220"/>
+            <a:ext cx="3684687" cy="3663870"/>
+          </a:xfrm>
+          <a:prstGeom prst="rect">
+            <a:avLst/>
+          </a:prstGeom>
+        </p:spPr>
+      </p:pic>
+      <p:pic>
+        <p:nvPicPr>
+          <p:cNvPr id="55" name="图片 54">
+            <a:extLst>
+              <a:ext uri="{FF2B5EF4-FFF2-40B4-BE49-F238E27FC236}">
+                <a16:creationId xmlns:a16="http://schemas.microsoft.com/office/drawing/2014/main" id="{EFD2AF4E-7F6F-E784-0B18-30579FB07F1E}"/>
+              </a:ext>
+            </a:extLst>
+          </p:cNvPr>
+          <p:cNvPicPr>
+            <a:picLocks noChangeAspect="1"/>
+          </p:cNvPicPr>
+          <p:nvPr/>
+        </p:nvPicPr>
+        <p:blipFill>
+          <a:blip r:embed="rId5"/>
+          <a:stretch>
+            <a:fillRect/>
+          </a:stretch>
+        </p:blipFill>
+        <p:spPr>
+          <a:xfrm>
+            <a:off x="8151981" y="106624"/>
+            <a:ext cx="3845994" cy="2750115"/>
+          </a:xfrm>
+          <a:prstGeom prst="rect">
+            <a:avLst/>
+          </a:prstGeom>
+        </p:spPr>
+      </p:pic>
+      <p:sp>
+        <p:nvSpPr>
+          <p:cNvPr id="56" name="文本框 55">
+            <a:extLst>
+              <a:ext uri="{FF2B5EF4-FFF2-40B4-BE49-F238E27FC236}">
+                <a16:creationId xmlns:a16="http://schemas.microsoft.com/office/drawing/2014/main" id="{D1101CBE-52A1-143F-AF69-06A37BF88EA0}"/>
+              </a:ext>
+            </a:extLst>
+          </p:cNvPr>
+          <p:cNvSpPr txBox="1"/>
+          <p:nvPr/>
+        </p:nvSpPr>
+        <p:spPr>
+          <a:xfrm>
+            <a:off x="7974556" y="3429000"/>
+            <a:ext cx="4328901" cy="2446824"/>
+          </a:xfrm>
+          <a:prstGeom prst="rect">
+            <a:avLst/>
+          </a:prstGeom>
+          <a:noFill/>
+          <a:ln>
+            <a:noFill/>
+          </a:ln>
+        </p:spPr>
+        <p:txBody>
+          <a:bodyPr wrap="square" rtlCol="0">
+            <a:spAutoFit/>
+          </a:bodyPr>
+          <a:lstStyle/>
+          <a:p>
+            <a:pPr indent="457200">
+              <a:spcAft>
+                <a:spcPts val="1800"/>
+              </a:spcAft>
+            </a:pPr>
+            <a:r>
+              <a:rPr lang="zh-CN" altLang="en-US" sz="2000" b="1" dirty="0">
+                <a:latin typeface="微软雅黑" panose="020B0503020204020204" pitchFamily="34" charset="-122"/>
+                <a:ea typeface="微软雅黑" panose="020B0503020204020204" pitchFamily="34" charset="-122"/>
+              </a:rPr>
+              <a:t>继承中需要经常用到</a:t>
+            </a:r>
+            <a:r>
+              <a:rPr lang="en-US" altLang="zh-CN" sz="2000" b="1" dirty="0">
+                <a:solidFill>
+                  <a:srgbClr val="FF0000"/>
+                </a:solidFill>
+                <a:latin typeface="微软雅黑" panose="020B0503020204020204" pitchFamily="34" charset="-122"/>
+                <a:ea typeface="微软雅黑" panose="020B0503020204020204" pitchFamily="34" charset="-122"/>
+              </a:rPr>
+              <a:t>super()</a:t>
+            </a:r>
+            <a:r>
+              <a:rPr lang="zh-CN" altLang="en-US" sz="2000" b="1" dirty="0">
+                <a:latin typeface="微软雅黑" panose="020B0503020204020204" pitchFamily="34" charset="-122"/>
+                <a:ea typeface="微软雅黑" panose="020B0503020204020204" pitchFamily="34" charset="-122"/>
+              </a:rPr>
+              <a:t> ，意指“代理对象”，它会把方法推脱给父类或同层级中的下一类</a:t>
+            </a:r>
+            <a:endParaRPr lang="en-US" altLang="zh-CN" sz="2000" b="1" dirty="0">
+              <a:latin typeface="微软雅黑" panose="020B0503020204020204" pitchFamily="34" charset="-122"/>
+              <a:ea typeface="微软雅黑" panose="020B0503020204020204" pitchFamily="34" charset="-122"/>
+            </a:endParaRPr>
+          </a:p>
+          <a:p>
+            <a:pPr>
+              <a:spcAft>
+                <a:spcPts val="1800"/>
+              </a:spcAft>
+            </a:pPr>
+            <a:r>
+              <a:rPr lang="en-US" altLang="zh-CN" sz="1600" b="1" dirty="0">
+                <a:latin typeface="微软雅黑" panose="020B0503020204020204" pitchFamily="34" charset="-122"/>
+                <a:ea typeface="微软雅黑" panose="020B0503020204020204" pitchFamily="34" charset="-122"/>
+              </a:rPr>
+              <a:t>super().__</a:t>
+            </a:r>
+            <a:r>
+              <a:rPr lang="en-US" altLang="zh-CN" sz="1600" b="1" dirty="0" err="1">
+                <a:latin typeface="微软雅黑" panose="020B0503020204020204" pitchFamily="34" charset="-122"/>
+                <a:ea typeface="微软雅黑" panose="020B0503020204020204" pitchFamily="34" charset="-122"/>
+              </a:rPr>
+              <a:t>init</a:t>
+            </a:r>
+            <a:r>
+              <a:rPr lang="en-US" altLang="zh-CN" sz="1600" b="1" dirty="0">
+                <a:latin typeface="微软雅黑" panose="020B0503020204020204" pitchFamily="34" charset="-122"/>
+                <a:ea typeface="微软雅黑" panose="020B0503020204020204" pitchFamily="34" charset="-122"/>
+              </a:rPr>
+              <a:t>__()  -&gt;  </a:t>
+            </a:r>
+            <a:r>
+              <a:rPr lang="zh-CN" altLang="en-US" sz="1600" b="1" dirty="0">
+                <a:latin typeface="微软雅黑" panose="020B0503020204020204" pitchFamily="34" charset="-122"/>
+                <a:ea typeface="微软雅黑" panose="020B0503020204020204" pitchFamily="34" charset="-122"/>
+              </a:rPr>
+              <a:t>执行父类的</a:t>
+            </a:r>
+            <a:r>
+              <a:rPr lang="en-US" altLang="zh-CN" sz="1600" b="1" dirty="0">
+                <a:latin typeface="微软雅黑" panose="020B0503020204020204" pitchFamily="34" charset="-122"/>
+                <a:ea typeface="微软雅黑" panose="020B0503020204020204" pitchFamily="34" charset="-122"/>
+              </a:rPr>
+              <a:t>__</a:t>
+            </a:r>
+            <a:r>
+              <a:rPr lang="en-US" altLang="zh-CN" sz="1600" b="1" dirty="0" err="1">
+                <a:latin typeface="微软雅黑" panose="020B0503020204020204" pitchFamily="34" charset="-122"/>
+                <a:ea typeface="微软雅黑" panose="020B0503020204020204" pitchFamily="34" charset="-122"/>
+              </a:rPr>
+              <a:t>init</a:t>
+            </a:r>
+            <a:r>
+              <a:rPr lang="en-US" altLang="zh-CN" sz="1600" b="1" dirty="0">
+                <a:latin typeface="微软雅黑" panose="020B0503020204020204" pitchFamily="34" charset="-122"/>
+                <a:ea typeface="微软雅黑" panose="020B0503020204020204" pitchFamily="34" charset="-122"/>
+              </a:rPr>
+              <a:t>__()</a:t>
+            </a:r>
+          </a:p>
+          <a:p>
+            <a:pPr>
+              <a:spcAft>
+                <a:spcPts val="1800"/>
+              </a:spcAft>
+            </a:pPr>
+            <a:r>
+              <a:rPr lang="zh-CN" altLang="en-US" sz="1600" b="1" dirty="0">
+                <a:latin typeface="微软雅黑" panose="020B0503020204020204" pitchFamily="34" charset="-122"/>
+                <a:ea typeface="微软雅黑" panose="020B0503020204020204" pitchFamily="34" charset="-122"/>
+              </a:rPr>
+              <a:t>同理，在定义的方法内执行：</a:t>
+            </a:r>
+            <a:endParaRPr lang="en-US" altLang="zh-CN" sz="1600" b="1" dirty="0">
+              <a:latin typeface="微软雅黑" panose="020B0503020204020204" pitchFamily="34" charset="-122"/>
+              <a:ea typeface="微软雅黑" panose="020B0503020204020204" pitchFamily="34" charset="-122"/>
+            </a:endParaRPr>
+          </a:p>
+          <a:p>
+            <a:pPr>
+              <a:spcAft>
+                <a:spcPts val="1800"/>
+              </a:spcAft>
+            </a:pPr>
+            <a:r>
+              <a:rPr lang="en-US" altLang="zh-CN" sz="1600" b="1" dirty="0">
+                <a:latin typeface="微软雅黑" panose="020B0503020204020204" pitchFamily="34" charset="-122"/>
+                <a:ea typeface="微软雅黑" panose="020B0503020204020204" pitchFamily="34" charset="-122"/>
+              </a:rPr>
+              <a:t>super().</a:t>
+            </a:r>
+            <a:r>
+              <a:rPr lang="en-US" altLang="zh-CN" sz="1600" b="1" dirty="0" err="1">
+                <a:latin typeface="微软雅黑" panose="020B0503020204020204" pitchFamily="34" charset="-122"/>
+                <a:ea typeface="微软雅黑" panose="020B0503020204020204" pitchFamily="34" charset="-122"/>
+              </a:rPr>
+              <a:t>show_info</a:t>
+            </a:r>
+            <a:r>
+              <a:rPr lang="en-US" altLang="zh-CN" sz="1600" b="1" dirty="0">
+                <a:latin typeface="微软雅黑" panose="020B0503020204020204" pitchFamily="34" charset="-122"/>
+                <a:ea typeface="微软雅黑" panose="020B0503020204020204" pitchFamily="34" charset="-122"/>
+              </a:rPr>
+              <a:t>() -&gt;</a:t>
+            </a:r>
+            <a:r>
+              <a:rPr lang="zh-CN" altLang="en-US" sz="1600" b="1" dirty="0">
+                <a:latin typeface="微软雅黑" panose="020B0503020204020204" pitchFamily="34" charset="-122"/>
+                <a:ea typeface="微软雅黑" panose="020B0503020204020204" pitchFamily="34" charset="-122"/>
+              </a:rPr>
+              <a:t> </a:t>
+            </a:r>
+            <a:r>
+              <a:rPr lang="en-US" altLang="zh-CN" sz="1600" b="1" dirty="0" err="1">
+                <a:latin typeface="微软雅黑" panose="020B0503020204020204" pitchFamily="34" charset="-122"/>
+                <a:ea typeface="微软雅黑" panose="020B0503020204020204" pitchFamily="34" charset="-122"/>
+              </a:rPr>
+              <a:t>Skill.show_info</a:t>
+            </a:r>
+            <a:r>
+              <a:rPr lang="en-US" altLang="zh-CN" sz="1600" b="1" dirty="0">
+                <a:latin typeface="微软雅黑" panose="020B0503020204020204" pitchFamily="34" charset="-122"/>
+                <a:ea typeface="微软雅黑" panose="020B0503020204020204" pitchFamily="34" charset="-122"/>
+              </a:rPr>
+              <a:t>()</a:t>
+            </a:r>
+            <a:endParaRPr lang="zh-CN" altLang="en-US" sz="1600" b="1" dirty="0">
+              <a:latin typeface="微软雅黑" panose="020B0503020204020204" pitchFamily="34" charset="-122"/>
+              <a:ea typeface="微软雅黑" panose="020B0503020204020204" pitchFamily="34" charset="-122"/>
+            </a:endParaRPr>
+          </a:p>
+        </p:txBody>
+      </p:sp>
+    </p:spTree>
+    <p:extLst>
+      <p:ext uri="{BB962C8B-B14F-4D97-AF65-F5344CB8AC3E}">
+        <p14:creationId xmlns:p14="http://schemas.microsoft.com/office/powerpoint/2010/main" val="2834376711"/>
+      </p:ext>
+    </p:extLst>
+  </p:cSld>
+  <p:clrMapOvr>
+    <a:masterClrMapping/>
+  </p:clrMapOvr>
+</p:sld>
+</file>
+
+<file path=ppt/slides/slide12.xml><?xml version="1.0" encoding="utf-8"?>
+<p:sld xmlns:a="http://schemas.openxmlformats.org/drawingml/2006/main" xmlns:r="http://schemas.openxmlformats.org/officeDocument/2006/relationships" xmlns:p="http://schemas.openxmlformats.org/presentationml/2006/main">
+  <p:cSld>
+    <p:spTree>
+      <p:nvGrpSpPr>
+        <p:cNvPr id="1" name=""/>
+        <p:cNvGrpSpPr/>
+        <p:nvPr/>
+      </p:nvGrpSpPr>
+      <p:grpSpPr>
+        <a:xfrm>
+          <a:off x="0" y="0"/>
+          <a:ext cx="0" cy="0"/>
+          <a:chOff x="0" y="0"/>
+          <a:chExt cx="0" cy="0"/>
+        </a:xfrm>
+      </p:grpSpPr>
+      <p:sp>
+        <p:nvSpPr>
+          <p:cNvPr id="2" name="矩形 1">
+            <a:extLst>
+              <a:ext uri="{FF2B5EF4-FFF2-40B4-BE49-F238E27FC236}">
+                <a16:creationId xmlns:a16="http://schemas.microsoft.com/office/drawing/2014/main" id="{36109318-FDC6-DD8F-50AF-3FC7618F855E}"/>
+              </a:ext>
+            </a:extLst>
+          </p:cNvPr>
+          <p:cNvSpPr/>
+          <p:nvPr/>
+        </p:nvSpPr>
+        <p:spPr>
+          <a:xfrm>
+            <a:off x="203254" y="154635"/>
+            <a:ext cx="6186309" cy="646331"/>
+          </a:xfrm>
+          <a:prstGeom prst="rect">
+            <a:avLst/>
+          </a:prstGeom>
+          <a:noFill/>
+        </p:spPr>
+        <p:txBody>
+          <a:bodyPr wrap="none" lIns="91440" tIns="45720" rIns="91440" bIns="45720">
+            <a:spAutoFit/>
+          </a:bodyPr>
+          <a:lstStyle/>
+          <a:p>
+            <a:r>
+              <a:rPr lang="zh-CN" altLang="en-US" sz="3600" b="1" u="sng" dirty="0">
+                <a:ln w="0"/>
+                <a:effectLst>
+                  <a:outerShdw blurRad="38100" dist="19050" dir="2700000" algn="tl" rotWithShape="0">
+                    <a:schemeClr val="dk1">
+                      <a:alpha val="40000"/>
+                    </a:schemeClr>
+                  </a:outerShdw>
+                </a:effectLst>
+              </a:rPr>
+              <a:t>面向过程编程、面向对象编程</a:t>
+            </a:r>
+            <a:endParaRPr lang="zh-CN" altLang="en-US" sz="3600" b="1" u="sng" cap="none" spc="0" dirty="0">
+              <a:ln w="0"/>
+              <a:solidFill>
+                <a:schemeClr val="tx1"/>
+              </a:solidFill>
+              <a:effectLst>
+                <a:outerShdw blurRad="38100" dist="19050" dir="2700000" algn="tl" rotWithShape="0">
+                  <a:schemeClr val="dk1">
+                    <a:alpha val="40000"/>
+                  </a:schemeClr>
+                </a:outerShdw>
+              </a:effectLst>
+            </a:endParaRPr>
+          </a:p>
+        </p:txBody>
+      </p:sp>
+      <p:sp>
+        <p:nvSpPr>
+          <p:cNvPr id="4" name="矩形: 圆角 3">
+            <a:extLst>
+              <a:ext uri="{FF2B5EF4-FFF2-40B4-BE49-F238E27FC236}">
+                <a16:creationId xmlns:a16="http://schemas.microsoft.com/office/drawing/2014/main" id="{C6CAB278-F91C-D9C4-4DB1-00C5133F333D}"/>
+              </a:ext>
+            </a:extLst>
+          </p:cNvPr>
+          <p:cNvSpPr/>
+          <p:nvPr/>
+        </p:nvSpPr>
+        <p:spPr>
+          <a:xfrm>
+            <a:off x="887893" y="1126430"/>
+            <a:ext cx="3664226" cy="2484782"/>
+          </a:xfrm>
+          <a:prstGeom prst="roundRect">
+            <a:avLst>
+              <a:gd name="adj" fmla="val 12934"/>
+            </a:avLst>
+          </a:prstGeom>
+          <a:solidFill>
+            <a:schemeClr val="accent1">
+              <a:lumMod val="20000"/>
+              <a:lumOff val="80000"/>
+            </a:schemeClr>
+          </a:solidFill>
+        </p:spPr>
+        <p:style>
+          <a:lnRef idx="2">
+            <a:schemeClr val="accent1">
+              <a:shade val="15000"/>
+            </a:schemeClr>
+          </a:lnRef>
+          <a:fillRef idx="1">
+            <a:schemeClr val="accent1"/>
+          </a:fillRef>
+          <a:effectRef idx="0">
+            <a:schemeClr val="accent1"/>
+          </a:effectRef>
+          <a:fontRef idx="minor">
+            <a:schemeClr val="lt1"/>
+          </a:fontRef>
+        </p:style>
+        <p:txBody>
+          <a:bodyPr rtlCol="0" anchor="ctr"/>
+          <a:lstStyle/>
+          <a:p>
+            <a:pPr>
+              <a:spcAft>
+                <a:spcPts val="1800"/>
+              </a:spcAft>
+            </a:pPr>
+            <a:r>
+              <a:rPr lang="zh-CN" altLang="en-US" sz="2800" b="1" dirty="0">
+                <a:solidFill>
+                  <a:schemeClr val="tx1"/>
+                </a:solidFill>
+                <a:latin typeface="微软雅黑" panose="020B0503020204020204" pitchFamily="34" charset="-122"/>
+                <a:ea typeface="微软雅黑" panose="020B0503020204020204" pitchFamily="34" charset="-122"/>
+              </a:rPr>
+              <a:t>面向过程编程：</a:t>
+            </a:r>
+            <a:endParaRPr lang="en-US" altLang="zh-CN" sz="2800" b="1" dirty="0">
+              <a:solidFill>
+                <a:schemeClr val="tx1"/>
+              </a:solidFill>
+              <a:latin typeface="微软雅黑" panose="020B0503020204020204" pitchFamily="34" charset="-122"/>
+              <a:ea typeface="微软雅黑" panose="020B0503020204020204" pitchFamily="34" charset="-122"/>
+            </a:endParaRPr>
+          </a:p>
+          <a:p>
+            <a:pPr marL="285750" indent="-285750">
+              <a:spcAft>
+                <a:spcPts val="600"/>
+              </a:spcAft>
+              <a:buFont typeface="Arial" panose="020B0604020202020204" pitchFamily="34" charset="0"/>
+              <a:buChar char="•"/>
+            </a:pPr>
+            <a:r>
+              <a:rPr lang="zh-CN" altLang="en-US" b="1" dirty="0">
+                <a:solidFill>
+                  <a:schemeClr val="tx1"/>
+                </a:solidFill>
+                <a:latin typeface="微软雅黑" panose="020B0503020204020204" pitchFamily="34" charset="-122"/>
+                <a:ea typeface="微软雅黑" panose="020B0503020204020204" pitchFamily="34" charset="-122"/>
+              </a:rPr>
+              <a:t>程序的具体算法是什么？</a:t>
+            </a:r>
+            <a:endParaRPr lang="en-US" altLang="zh-CN" b="1" dirty="0">
+              <a:solidFill>
+                <a:schemeClr val="tx1"/>
+              </a:solidFill>
+              <a:latin typeface="微软雅黑" panose="020B0503020204020204" pitchFamily="34" charset="-122"/>
+              <a:ea typeface="微软雅黑" panose="020B0503020204020204" pitchFamily="34" charset="-122"/>
+            </a:endParaRPr>
+          </a:p>
+          <a:p>
+            <a:pPr marL="285750" indent="-285750">
+              <a:spcAft>
+                <a:spcPts val="600"/>
+              </a:spcAft>
+              <a:buFont typeface="Arial" panose="020B0604020202020204" pitchFamily="34" charset="0"/>
+              <a:buChar char="•"/>
+            </a:pPr>
+            <a:r>
+              <a:rPr lang="zh-CN" altLang="en-US" b="1" dirty="0">
+                <a:solidFill>
+                  <a:schemeClr val="tx1"/>
+                </a:solidFill>
+                <a:latin typeface="微软雅黑" panose="020B0503020204020204" pitchFamily="34" charset="-122"/>
+                <a:ea typeface="微软雅黑" panose="020B0503020204020204" pitchFamily="34" charset="-122"/>
+              </a:rPr>
+              <a:t>顺序？选择？循环？</a:t>
+            </a:r>
+            <a:endParaRPr lang="en-US" altLang="zh-CN" b="1" dirty="0">
+              <a:solidFill>
+                <a:schemeClr val="tx1"/>
+              </a:solidFill>
+              <a:latin typeface="微软雅黑" panose="020B0503020204020204" pitchFamily="34" charset="-122"/>
+              <a:ea typeface="微软雅黑" panose="020B0503020204020204" pitchFamily="34" charset="-122"/>
+            </a:endParaRPr>
+          </a:p>
+          <a:p>
+            <a:pPr marL="285750" indent="-285750">
+              <a:spcAft>
+                <a:spcPts val="600"/>
+              </a:spcAft>
+              <a:buFont typeface="Arial" panose="020B0604020202020204" pitchFamily="34" charset="0"/>
+              <a:buChar char="•"/>
+            </a:pPr>
+            <a:r>
+              <a:rPr lang="zh-CN" altLang="en-US" b="1" dirty="0">
+                <a:solidFill>
+                  <a:schemeClr val="tx1"/>
+                </a:solidFill>
+                <a:latin typeface="微软雅黑" panose="020B0503020204020204" pitchFamily="34" charset="-122"/>
+                <a:ea typeface="微软雅黑" panose="020B0503020204020204" pitchFamily="34" charset="-122"/>
+              </a:rPr>
+              <a:t>第一步？第二步？第三步？</a:t>
+            </a:r>
+            <a:endParaRPr lang="en-US" altLang="zh-CN" b="1" dirty="0">
+              <a:solidFill>
+                <a:schemeClr val="tx1"/>
+              </a:solidFill>
+              <a:latin typeface="微软雅黑" panose="020B0503020204020204" pitchFamily="34" charset="-122"/>
+              <a:ea typeface="微软雅黑" panose="020B0503020204020204" pitchFamily="34" charset="-122"/>
+            </a:endParaRPr>
+          </a:p>
+          <a:p>
+            <a:pPr marL="285750" indent="-285750">
+              <a:spcAft>
+                <a:spcPts val="600"/>
+              </a:spcAft>
+              <a:buFont typeface="Arial" panose="020B0604020202020204" pitchFamily="34" charset="0"/>
+              <a:buChar char="•"/>
+            </a:pPr>
+            <a:r>
+              <a:rPr lang="zh-CN" altLang="en-US" b="1" dirty="0">
+                <a:solidFill>
+                  <a:schemeClr val="tx1"/>
+                </a:solidFill>
+                <a:latin typeface="微软雅黑" panose="020B0503020204020204" pitchFamily="34" charset="-122"/>
+                <a:ea typeface="微软雅黑" panose="020B0503020204020204" pitchFamily="34" charset="-122"/>
+              </a:rPr>
+              <a:t>什么函数要执行什么功能？</a:t>
+            </a:r>
+          </a:p>
+        </p:txBody>
+      </p:sp>
+      <p:sp>
+        <p:nvSpPr>
+          <p:cNvPr id="5" name="矩形: 圆角 4">
+            <a:extLst>
+              <a:ext uri="{FF2B5EF4-FFF2-40B4-BE49-F238E27FC236}">
+                <a16:creationId xmlns:a16="http://schemas.microsoft.com/office/drawing/2014/main" id="{C034701B-73D8-C9AC-8778-433556CE1596}"/>
+              </a:ext>
+            </a:extLst>
+          </p:cNvPr>
+          <p:cNvSpPr/>
+          <p:nvPr/>
+        </p:nvSpPr>
+        <p:spPr>
+          <a:xfrm>
+            <a:off x="7500724" y="1126430"/>
+            <a:ext cx="3664226" cy="2484782"/>
+          </a:xfrm>
+          <a:prstGeom prst="roundRect">
+            <a:avLst>
+              <a:gd name="adj" fmla="val 12934"/>
+            </a:avLst>
+          </a:prstGeom>
+          <a:solidFill>
+            <a:schemeClr val="accent2">
+              <a:lumMod val="20000"/>
+              <a:lumOff val="80000"/>
+            </a:schemeClr>
+          </a:solidFill>
+        </p:spPr>
+        <p:style>
+          <a:lnRef idx="2">
+            <a:schemeClr val="accent1">
+              <a:shade val="15000"/>
+            </a:schemeClr>
+          </a:lnRef>
+          <a:fillRef idx="1">
+            <a:schemeClr val="accent1"/>
+          </a:fillRef>
+          <a:effectRef idx="0">
+            <a:schemeClr val="accent1"/>
+          </a:effectRef>
+          <a:fontRef idx="minor">
+            <a:schemeClr val="lt1"/>
+          </a:fontRef>
+        </p:style>
+        <p:txBody>
+          <a:bodyPr rtlCol="0" anchor="ctr"/>
+          <a:lstStyle/>
+          <a:p>
+            <a:pPr>
+              <a:spcAft>
+                <a:spcPts val="1800"/>
+              </a:spcAft>
+            </a:pPr>
+            <a:r>
+              <a:rPr lang="zh-CN" altLang="en-US" sz="2800" b="1" dirty="0">
+                <a:solidFill>
+                  <a:schemeClr val="tx1"/>
+                </a:solidFill>
+                <a:latin typeface="微软雅黑" panose="020B0503020204020204" pitchFamily="34" charset="-122"/>
+                <a:ea typeface="微软雅黑" panose="020B0503020204020204" pitchFamily="34" charset="-122"/>
+              </a:rPr>
+              <a:t>面向对象编程：</a:t>
+            </a:r>
+            <a:endParaRPr lang="en-US" altLang="zh-CN" sz="2800" b="1" dirty="0">
+              <a:solidFill>
+                <a:schemeClr val="tx1"/>
+              </a:solidFill>
+              <a:latin typeface="微软雅黑" panose="020B0503020204020204" pitchFamily="34" charset="-122"/>
+              <a:ea typeface="微软雅黑" panose="020B0503020204020204" pitchFamily="34" charset="-122"/>
+            </a:endParaRPr>
+          </a:p>
+          <a:p>
+            <a:pPr marL="285750" indent="-285750">
+              <a:spcAft>
+                <a:spcPts val="600"/>
+              </a:spcAft>
+              <a:buFont typeface="Arial" panose="020B0604020202020204" pitchFamily="34" charset="0"/>
+              <a:buChar char="•"/>
+            </a:pPr>
+            <a:r>
+              <a:rPr lang="zh-CN" altLang="en-US" b="1" dirty="0">
+                <a:solidFill>
+                  <a:schemeClr val="tx1"/>
+                </a:solidFill>
+                <a:latin typeface="微软雅黑" panose="020B0503020204020204" pitchFamily="34" charset="-122"/>
+                <a:ea typeface="微软雅黑" panose="020B0503020204020204" pitchFamily="34" charset="-122"/>
+              </a:rPr>
+              <a:t>系统里都有哪些实体？</a:t>
+            </a:r>
+            <a:endParaRPr lang="en-US" altLang="zh-CN" b="1" dirty="0">
+              <a:solidFill>
+                <a:schemeClr val="tx1"/>
+              </a:solidFill>
+              <a:latin typeface="微软雅黑" panose="020B0503020204020204" pitchFamily="34" charset="-122"/>
+              <a:ea typeface="微软雅黑" panose="020B0503020204020204" pitchFamily="34" charset="-122"/>
+            </a:endParaRPr>
+          </a:p>
+          <a:p>
+            <a:pPr marL="285750" indent="-285750">
+              <a:spcAft>
+                <a:spcPts val="600"/>
+              </a:spcAft>
+              <a:buFont typeface="Arial" panose="020B0604020202020204" pitchFamily="34" charset="0"/>
+              <a:buChar char="•"/>
+            </a:pPr>
+            <a:r>
+              <a:rPr lang="zh-CN" altLang="en-US" b="1" dirty="0">
+                <a:solidFill>
+                  <a:schemeClr val="tx1"/>
+                </a:solidFill>
+                <a:latin typeface="微软雅黑" panose="020B0503020204020204" pitchFamily="34" charset="-122"/>
+                <a:ea typeface="微软雅黑" panose="020B0503020204020204" pitchFamily="34" charset="-122"/>
+              </a:rPr>
+              <a:t>这些实体有什么数据和行为？</a:t>
+            </a:r>
+            <a:endParaRPr lang="en-US" altLang="zh-CN" b="1" dirty="0">
+              <a:solidFill>
+                <a:schemeClr val="tx1"/>
+              </a:solidFill>
+              <a:latin typeface="微软雅黑" panose="020B0503020204020204" pitchFamily="34" charset="-122"/>
+              <a:ea typeface="微软雅黑" panose="020B0503020204020204" pitchFamily="34" charset="-122"/>
+            </a:endParaRPr>
+          </a:p>
+          <a:p>
+            <a:pPr marL="285750" indent="-285750">
+              <a:spcAft>
+                <a:spcPts val="600"/>
+              </a:spcAft>
+              <a:buFont typeface="Arial" panose="020B0604020202020204" pitchFamily="34" charset="0"/>
+              <a:buChar char="•"/>
+            </a:pPr>
+            <a:r>
+              <a:rPr lang="zh-CN" altLang="en-US" b="1" dirty="0">
+                <a:solidFill>
+                  <a:schemeClr val="tx1"/>
+                </a:solidFill>
+                <a:latin typeface="微软雅黑" panose="020B0503020204020204" pitchFamily="34" charset="-122"/>
+                <a:ea typeface="微软雅黑" panose="020B0503020204020204" pitchFamily="34" charset="-122"/>
+              </a:rPr>
+              <a:t>对象之间是如何协作的？</a:t>
+            </a:r>
+            <a:endParaRPr lang="en-US" altLang="zh-CN" b="1" dirty="0">
+              <a:solidFill>
+                <a:schemeClr val="tx1"/>
+              </a:solidFill>
+              <a:latin typeface="微软雅黑" panose="020B0503020204020204" pitchFamily="34" charset="-122"/>
+              <a:ea typeface="微软雅黑" panose="020B0503020204020204" pitchFamily="34" charset="-122"/>
+            </a:endParaRPr>
+          </a:p>
+          <a:p>
+            <a:pPr marL="285750" indent="-285750">
+              <a:spcAft>
+                <a:spcPts val="600"/>
+              </a:spcAft>
+              <a:buFont typeface="Arial" panose="020B0604020202020204" pitchFamily="34" charset="0"/>
+              <a:buChar char="•"/>
+            </a:pPr>
+            <a:r>
+              <a:rPr lang="zh-CN" altLang="en-US" b="1" dirty="0">
+                <a:solidFill>
+                  <a:schemeClr val="tx1"/>
+                </a:solidFill>
+                <a:latin typeface="微软雅黑" panose="020B0503020204020204" pitchFamily="34" charset="-122"/>
+                <a:ea typeface="微软雅黑" panose="020B0503020204020204" pitchFamily="34" charset="-122"/>
+              </a:rPr>
+              <a:t>谁，负责干什么？</a:t>
+            </a:r>
+          </a:p>
+        </p:txBody>
+      </p:sp>
+      <p:sp>
+        <p:nvSpPr>
+          <p:cNvPr id="6" name="箭头: 右 5">
+            <a:extLst>
+              <a:ext uri="{FF2B5EF4-FFF2-40B4-BE49-F238E27FC236}">
+                <a16:creationId xmlns:a16="http://schemas.microsoft.com/office/drawing/2014/main" id="{05717FA1-1FA1-2FFA-CB7F-E6D7325D4C3E}"/>
+              </a:ext>
+            </a:extLst>
+          </p:cNvPr>
+          <p:cNvSpPr/>
+          <p:nvPr/>
+        </p:nvSpPr>
+        <p:spPr>
+          <a:xfrm>
+            <a:off x="4684641" y="2736568"/>
+            <a:ext cx="2670313" cy="530087"/>
+          </a:xfrm>
+          <a:prstGeom prst="rightArrow">
+            <a:avLst/>
+          </a:prstGeom>
+        </p:spPr>
+        <p:style>
+          <a:lnRef idx="2">
+            <a:schemeClr val="accent1">
+              <a:shade val="15000"/>
+            </a:schemeClr>
+          </a:lnRef>
+          <a:fillRef idx="1">
+            <a:schemeClr val="accent1"/>
+          </a:fillRef>
+          <a:effectRef idx="0">
+            <a:schemeClr val="accent1"/>
+          </a:effectRef>
+          <a:fontRef idx="minor">
+            <a:schemeClr val="lt1"/>
+          </a:fontRef>
+        </p:style>
+        <p:txBody>
+          <a:bodyPr rtlCol="0" anchor="ctr"/>
+          <a:lstStyle/>
+          <a:p>
+            <a:pPr algn="ctr"/>
+            <a:endParaRPr lang="zh-CN" altLang="en-US"/>
+          </a:p>
+        </p:txBody>
+      </p:sp>
+      <p:sp>
+        <p:nvSpPr>
+          <p:cNvPr id="7" name="矩形 6">
+            <a:extLst>
+              <a:ext uri="{FF2B5EF4-FFF2-40B4-BE49-F238E27FC236}">
+                <a16:creationId xmlns:a16="http://schemas.microsoft.com/office/drawing/2014/main" id="{2DC080A5-A7FA-3173-BCAB-6921AB084E7D}"/>
+              </a:ext>
+            </a:extLst>
+          </p:cNvPr>
+          <p:cNvSpPr/>
+          <p:nvPr/>
+        </p:nvSpPr>
+        <p:spPr>
+          <a:xfrm>
+            <a:off x="682487" y="5466233"/>
+            <a:ext cx="10588487" cy="1047209"/>
+          </a:xfrm>
+          <a:prstGeom prst="rect">
+            <a:avLst/>
+          </a:prstGeom>
+          <a:noFill/>
+          <a:ln w="57150">
+            <a:solidFill>
+              <a:schemeClr val="tx1"/>
+            </a:solidFill>
+          </a:ln>
+        </p:spPr>
+        <p:style>
+          <a:lnRef idx="2">
+            <a:schemeClr val="accent1">
+              <a:shade val="15000"/>
+            </a:schemeClr>
+          </a:lnRef>
+          <a:fillRef idx="1">
+            <a:schemeClr val="accent1"/>
+          </a:fillRef>
+          <a:effectRef idx="0">
+            <a:schemeClr val="accent1"/>
+          </a:effectRef>
+          <a:fontRef idx="minor">
+            <a:schemeClr val="lt1"/>
+          </a:fontRef>
+        </p:style>
+        <p:txBody>
+          <a:bodyPr rtlCol="0" anchor="ctr"/>
+          <a:lstStyle/>
+          <a:p>
+            <a:pPr indent="457200"/>
+            <a:r>
+              <a:rPr lang="zh-CN" altLang="en-US" sz="2400" b="1" dirty="0">
+                <a:solidFill>
+                  <a:schemeClr val="tx1"/>
+                </a:solidFill>
+              </a:rPr>
+              <a:t>两者并非相互替换的关系，需从程序的逻辑和架构上去考虑。对于一个宏大的系统，两者在不同的角度上可能是互补的。</a:t>
+            </a:r>
+          </a:p>
+        </p:txBody>
+      </p:sp>
+      <p:pic>
+        <p:nvPicPr>
+          <p:cNvPr id="9" name="图片 8" descr="图示&#10;&#10;AI 生成的内容可能不正确。">
+            <a:extLst>
+              <a:ext uri="{FF2B5EF4-FFF2-40B4-BE49-F238E27FC236}">
+                <a16:creationId xmlns:a16="http://schemas.microsoft.com/office/drawing/2014/main" id="{0C48AFCC-D331-33D8-6201-4F65463C3D94}"/>
+              </a:ext>
+            </a:extLst>
+          </p:cNvPr>
+          <p:cNvPicPr>
+            <a:picLocks noChangeAspect="1"/>
+          </p:cNvPicPr>
+          <p:nvPr/>
+        </p:nvPicPr>
+        <p:blipFill>
+          <a:blip r:embed="rId2">
+            <a:extLst>
+              <a:ext uri="{28A0092B-C50C-407E-A947-70E740481C1C}">
+                <a14:useLocalDpi xmlns:a14="http://schemas.microsoft.com/office/drawing/2010/main" val="0"/>
+              </a:ext>
+            </a:extLst>
+          </a:blip>
+          <a:srcRect l="51159" t="27057" r="9162" b="30725"/>
+          <a:stretch/>
+        </p:blipFill>
+        <p:spPr>
+          <a:xfrm>
+            <a:off x="8160019" y="3634184"/>
+            <a:ext cx="2345635" cy="1663864"/>
+          </a:xfrm>
+          <a:prstGeom prst="rect">
+            <a:avLst/>
+          </a:prstGeom>
+        </p:spPr>
+      </p:pic>
+      <p:pic>
+        <p:nvPicPr>
+          <p:cNvPr id="10" name="图片 9" descr="图示&#10;&#10;AI 生成的内容可能不正确。">
+            <a:extLst>
+              <a:ext uri="{FF2B5EF4-FFF2-40B4-BE49-F238E27FC236}">
+                <a16:creationId xmlns:a16="http://schemas.microsoft.com/office/drawing/2014/main" id="{AA24282F-3692-E288-17D3-C031EC4C85C1}"/>
+              </a:ext>
+            </a:extLst>
+          </p:cNvPr>
+          <p:cNvPicPr>
+            <a:picLocks noChangeAspect="1"/>
+          </p:cNvPicPr>
+          <p:nvPr/>
+        </p:nvPicPr>
+        <p:blipFill>
+          <a:blip r:embed="rId2">
+            <a:extLst>
+              <a:ext uri="{28A0092B-C50C-407E-A947-70E740481C1C}">
+                <a14:useLocalDpi xmlns:a14="http://schemas.microsoft.com/office/drawing/2010/main" val="0"/>
+              </a:ext>
+            </a:extLst>
+          </a:blip>
+          <a:srcRect l="346" t="46736" r="55193" b="40430"/>
+          <a:stretch/>
+        </p:blipFill>
+        <p:spPr>
+          <a:xfrm>
+            <a:off x="912743" y="4190925"/>
+            <a:ext cx="3614526" cy="695595"/>
+          </a:xfrm>
+          <a:prstGeom prst="rect">
+            <a:avLst/>
+          </a:prstGeom>
+        </p:spPr>
+      </p:pic>
+      <p:sp>
+        <p:nvSpPr>
+          <p:cNvPr id="11" name="文本框 10">
+            <a:extLst>
+              <a:ext uri="{FF2B5EF4-FFF2-40B4-BE49-F238E27FC236}">
+                <a16:creationId xmlns:a16="http://schemas.microsoft.com/office/drawing/2014/main" id="{6CAEAC18-5456-2B06-1922-41C528905D6C}"/>
+              </a:ext>
+            </a:extLst>
+          </p:cNvPr>
+          <p:cNvSpPr txBox="1"/>
+          <p:nvPr/>
+        </p:nvSpPr>
+        <p:spPr>
+          <a:xfrm>
+            <a:off x="3044617" y="4870039"/>
+            <a:ext cx="1338828" cy="369332"/>
+          </a:xfrm>
+          <a:prstGeom prst="rect">
+            <a:avLst/>
+          </a:prstGeom>
+          <a:noFill/>
+          <a:ln>
+            <a:solidFill>
+              <a:schemeClr val="tx1"/>
+            </a:solidFill>
+          </a:ln>
+        </p:spPr>
+        <p:txBody>
+          <a:bodyPr wrap="none" rtlCol="0">
+            <a:spAutoFit/>
+          </a:bodyPr>
+          <a:lstStyle/>
+          <a:p>
+            <a:r>
+              <a:rPr lang="zh-CN" altLang="en-US" b="1" dirty="0">
+                <a:latin typeface="微软雅黑" panose="020B0503020204020204" pitchFamily="34" charset="-122"/>
+                <a:ea typeface="微软雅黑" panose="020B0503020204020204" pitchFamily="34" charset="-122"/>
+              </a:rPr>
+              <a:t>流水线结构</a:t>
+            </a:r>
+          </a:p>
+        </p:txBody>
+      </p:sp>
+      <p:sp>
+        <p:nvSpPr>
+          <p:cNvPr id="12" name="文本框 11">
+            <a:extLst>
+              <a:ext uri="{FF2B5EF4-FFF2-40B4-BE49-F238E27FC236}">
+                <a16:creationId xmlns:a16="http://schemas.microsoft.com/office/drawing/2014/main" id="{87A70945-E70F-1CA1-64DB-D1BE5270BD37}"/>
+              </a:ext>
+            </a:extLst>
+          </p:cNvPr>
+          <p:cNvSpPr txBox="1"/>
+          <p:nvPr/>
+        </p:nvSpPr>
+        <p:spPr>
+          <a:xfrm>
+            <a:off x="9995383" y="3984724"/>
+            <a:ext cx="1107996" cy="369332"/>
+          </a:xfrm>
+          <a:prstGeom prst="rect">
+            <a:avLst/>
+          </a:prstGeom>
+          <a:noFill/>
+          <a:ln>
+            <a:solidFill>
+              <a:schemeClr val="tx1"/>
+            </a:solidFill>
+          </a:ln>
+        </p:spPr>
+        <p:txBody>
+          <a:bodyPr wrap="none" rtlCol="0">
+            <a:spAutoFit/>
+          </a:bodyPr>
+          <a:lstStyle/>
+          <a:p>
+            <a:r>
+              <a:rPr lang="zh-CN" altLang="en-US" b="1" dirty="0">
+                <a:latin typeface="微软雅黑" panose="020B0503020204020204" pitchFamily="34" charset="-122"/>
+                <a:ea typeface="微软雅黑" panose="020B0503020204020204" pitchFamily="34" charset="-122"/>
+              </a:rPr>
+              <a:t>组织结构</a:t>
+            </a:r>
+          </a:p>
+        </p:txBody>
+      </p:sp>
+      <p:sp>
+        <p:nvSpPr>
+          <p:cNvPr id="13" name="矩形 12">
+            <a:extLst>
+              <a:ext uri="{FF2B5EF4-FFF2-40B4-BE49-F238E27FC236}">
+                <a16:creationId xmlns:a16="http://schemas.microsoft.com/office/drawing/2014/main" id="{99CE5611-8A24-C2D9-3C49-04550D72F5F4}"/>
+              </a:ext>
+            </a:extLst>
+          </p:cNvPr>
+          <p:cNvSpPr/>
+          <p:nvPr/>
+        </p:nvSpPr>
+        <p:spPr>
+          <a:xfrm>
+            <a:off x="4641573" y="1485622"/>
+            <a:ext cx="2670314" cy="1323439"/>
+          </a:xfrm>
+          <a:prstGeom prst="rect">
+            <a:avLst/>
+          </a:prstGeom>
+          <a:noFill/>
+        </p:spPr>
+        <p:txBody>
+          <a:bodyPr wrap="square" lIns="91440" tIns="45720" rIns="91440" bIns="45720">
+            <a:spAutoFit/>
+          </a:bodyPr>
+          <a:lstStyle/>
+          <a:p>
+            <a:pPr algn="ctr"/>
+            <a:r>
+              <a:rPr lang="zh-CN" altLang="en-US" sz="4000" b="1" cap="none" spc="0" dirty="0">
+                <a:ln w="0"/>
+                <a:solidFill>
+                  <a:schemeClr val="tx1"/>
+                </a:solidFill>
+                <a:effectLst>
+                  <a:outerShdw blurRad="38100" dist="19050" dir="2700000" algn="tl" rotWithShape="0">
+                    <a:schemeClr val="dk1">
+                      <a:alpha val="40000"/>
+                    </a:schemeClr>
+                  </a:outerShdw>
+                </a:effectLst>
+              </a:rPr>
+              <a:t>思维上的再抽象</a:t>
+            </a:r>
+          </a:p>
+        </p:txBody>
+      </p:sp>
+    </p:spTree>
+    <p:extLst>
+      <p:ext uri="{BB962C8B-B14F-4D97-AF65-F5344CB8AC3E}">
+        <p14:creationId xmlns:p14="http://schemas.microsoft.com/office/powerpoint/2010/main" val="2321555199"/>
       </p:ext>
     </p:extLst>
   </p:cSld>
@@ -11630,7 +15299,7 @@
           <p:cNvPr id="2" name="矩形 1">
             <a:extLst>
               <a:ext uri="{FF2B5EF4-FFF2-40B4-BE49-F238E27FC236}">
-                <a16:creationId xmlns:a16="http://schemas.microsoft.com/office/drawing/2014/main" id="{36109318-FDC6-DD8F-50AF-3FC7618F855E}"/>
+                <a16:creationId xmlns:a16="http://schemas.microsoft.com/office/drawing/2014/main" id="{0415D4A6-3D02-5BC1-031F-40F029E26D36}"/>
               </a:ext>
             </a:extLst>
           </p:cNvPr>
@@ -11640,7 +15309,7 @@
         <p:spPr>
           <a:xfrm>
             <a:off x="203254" y="154635"/>
-            <a:ext cx="6186309" cy="646331"/>
+            <a:ext cx="2492990" cy="646331"/>
           </a:xfrm>
           <a:prstGeom prst="rect">
             <a:avLst/>
@@ -11664,7 +15333,7 @@
                   </a:outerShdw>
                 </a:effectLst>
               </a:rPr>
-              <a:t>面向过程编程、面向对象编程</a:t>
+              <a:t>继承与多态</a:t>
             </a:r>
             <a:endParaRPr lang="zh-CN" altLang="en-US" sz="3600" b="1" u="sng" cap="none" spc="0" dirty="0">
               <a:ln w="0"/>
@@ -11684,10 +15353,10 @@
       </p:sp>
       <p:sp>
         <p:nvSpPr>
-          <p:cNvPr id="4" name="矩形: 圆角 3">
-            <a:extLst>
-              <a:ext uri="{FF2B5EF4-FFF2-40B4-BE49-F238E27FC236}">
-                <a16:creationId xmlns:a16="http://schemas.microsoft.com/office/drawing/2014/main" id="{C6CAB278-F91C-D9C4-4DB1-00C5133F333D}"/>
+          <p:cNvPr id="50" name="矩形 49">
+            <a:extLst>
+              <a:ext uri="{FF2B5EF4-FFF2-40B4-BE49-F238E27FC236}">
+                <a16:creationId xmlns:a16="http://schemas.microsoft.com/office/drawing/2014/main" id="{E0F15D5D-C17A-476A-AB11-319B2DC4F04C}"/>
               </a:ext>
             </a:extLst>
           </p:cNvPr>
@@ -11696,20 +15365,16 @@
         </p:nvSpPr>
         <p:spPr>
           <a:xfrm>
-            <a:off x="887893" y="1126430"/>
-            <a:ext cx="3664226" cy="2484782"/>
-          </a:xfrm>
-          <a:prstGeom prst="roundRect">
-            <a:avLst>
-              <a:gd name="adj" fmla="val 12934"/>
-            </a:avLst>
+            <a:off x="203254" y="848139"/>
+            <a:ext cx="8483546" cy="5936974"/>
+          </a:xfrm>
+          <a:prstGeom prst="rect">
+            <a:avLst/>
           </a:prstGeom>
-          <a:solidFill>
-            <a:schemeClr val="accent1">
-              <a:lumMod val="20000"/>
-              <a:lumOff val="80000"/>
-            </a:schemeClr>
-          </a:solidFill>
+          <a:noFill/>
+          <a:ln>
+            <a:prstDash val="dash"/>
+          </a:ln>
         </p:spPr>
         <p:style>
           <a:lnRef idx="2">
@@ -11731,134 +15396,367 @@
           <a:bodyPr rtlCol="0" anchor="ctr"/>
           <a:lstStyle/>
           <a:p>
-            <a:pPr>
-              <a:spcAft>
-                <a:spcPts val="1800"/>
-              </a:spcAft>
-            </a:pPr>
-            <a:r>
-              <a:rPr lang="zh-CN" altLang="en-US" sz="2800" b="1" dirty="0">
+            <a:pPr algn="ctr"/>
+            <a:endParaRPr lang="zh-CN" altLang="en-US"/>
+          </a:p>
+        </p:txBody>
+      </p:sp>
+      <p:cxnSp>
+        <p:nvCxnSpPr>
+          <p:cNvPr id="52" name="直接箭头连接符 51">
+            <a:extLst>
+              <a:ext uri="{FF2B5EF4-FFF2-40B4-BE49-F238E27FC236}">
+                <a16:creationId xmlns:a16="http://schemas.microsoft.com/office/drawing/2014/main" id="{A72EA185-1647-5A0B-B380-7C09C465DEFB}"/>
+              </a:ext>
+            </a:extLst>
+          </p:cNvPr>
+          <p:cNvCxnSpPr>
+            <a:cxnSpLocks/>
+            <a:stCxn id="6" idx="6"/>
+            <a:endCxn id="73" idx="1"/>
+          </p:cNvCxnSpPr>
+          <p:nvPr/>
+        </p:nvCxnSpPr>
+        <p:spPr>
+          <a:xfrm flipV="1">
+            <a:off x="3341114" y="1751113"/>
+            <a:ext cx="2231425" cy="1677887"/>
+          </a:xfrm>
+          <a:prstGeom prst="straightConnector1">
+            <a:avLst/>
+          </a:prstGeom>
+          <a:ln w="57150">
+            <a:tailEnd type="triangle"/>
+          </a:ln>
+        </p:spPr>
+        <p:style>
+          <a:lnRef idx="1">
+            <a:schemeClr val="dk1"/>
+          </a:lnRef>
+          <a:fillRef idx="0">
+            <a:schemeClr val="dk1"/>
+          </a:fillRef>
+          <a:effectRef idx="0">
+            <a:schemeClr val="dk1"/>
+          </a:effectRef>
+          <a:fontRef idx="minor">
+            <a:schemeClr val="tx1"/>
+          </a:fontRef>
+        </p:style>
+      </p:cxnSp>
+      <p:cxnSp>
+        <p:nvCxnSpPr>
+          <p:cNvPr id="54" name="直接箭头连接符 53">
+            <a:extLst>
+              <a:ext uri="{FF2B5EF4-FFF2-40B4-BE49-F238E27FC236}">
+                <a16:creationId xmlns:a16="http://schemas.microsoft.com/office/drawing/2014/main" id="{DE951CB9-31E2-4981-6343-786CD2FA72AB}"/>
+              </a:ext>
+            </a:extLst>
+          </p:cNvPr>
+          <p:cNvCxnSpPr>
+            <a:cxnSpLocks/>
+            <a:stCxn id="6" idx="6"/>
+            <a:endCxn id="79" idx="1"/>
+          </p:cNvCxnSpPr>
+          <p:nvPr/>
+        </p:nvCxnSpPr>
+        <p:spPr>
+          <a:xfrm>
+            <a:off x="3341114" y="3429000"/>
+            <a:ext cx="2200720" cy="9953"/>
+          </a:xfrm>
+          <a:prstGeom prst="straightConnector1">
+            <a:avLst/>
+          </a:prstGeom>
+          <a:ln w="57150">
+            <a:tailEnd type="triangle"/>
+          </a:ln>
+        </p:spPr>
+        <p:style>
+          <a:lnRef idx="1">
+            <a:schemeClr val="dk1"/>
+          </a:lnRef>
+          <a:fillRef idx="0">
+            <a:schemeClr val="dk1"/>
+          </a:fillRef>
+          <a:effectRef idx="0">
+            <a:schemeClr val="dk1"/>
+          </a:effectRef>
+          <a:fontRef idx="minor">
+            <a:schemeClr val="tx1"/>
+          </a:fontRef>
+        </p:style>
+      </p:cxnSp>
+      <p:cxnSp>
+        <p:nvCxnSpPr>
+          <p:cNvPr id="56" name="直接箭头连接符 55">
+            <a:extLst>
+              <a:ext uri="{FF2B5EF4-FFF2-40B4-BE49-F238E27FC236}">
+                <a16:creationId xmlns:a16="http://schemas.microsoft.com/office/drawing/2014/main" id="{328C4984-BE2A-B389-D0F3-1F50BBD09025}"/>
+              </a:ext>
+            </a:extLst>
+          </p:cNvPr>
+          <p:cNvCxnSpPr>
+            <a:cxnSpLocks/>
+            <a:stCxn id="6" idx="6"/>
+            <a:endCxn id="85" idx="1"/>
+          </p:cNvCxnSpPr>
+          <p:nvPr/>
+        </p:nvCxnSpPr>
+        <p:spPr>
+          <a:xfrm>
+            <a:off x="3341114" y="3429000"/>
+            <a:ext cx="2200720" cy="1586564"/>
+          </a:xfrm>
+          <a:prstGeom prst="straightConnector1">
+            <a:avLst/>
+          </a:prstGeom>
+          <a:ln w="57150">
+            <a:tailEnd type="triangle"/>
+          </a:ln>
+        </p:spPr>
+        <p:style>
+          <a:lnRef idx="1">
+            <a:schemeClr val="dk1"/>
+          </a:lnRef>
+          <a:fillRef idx="0">
+            <a:schemeClr val="dk1"/>
+          </a:fillRef>
+          <a:effectRef idx="0">
+            <a:schemeClr val="dk1"/>
+          </a:effectRef>
+          <a:fontRef idx="minor">
+            <a:schemeClr val="tx1"/>
+          </a:fontRef>
+        </p:style>
+      </p:cxnSp>
+      <p:sp>
+        <p:nvSpPr>
+          <p:cNvPr id="57" name="矩形 56">
+            <a:extLst>
+              <a:ext uri="{FF2B5EF4-FFF2-40B4-BE49-F238E27FC236}">
+                <a16:creationId xmlns:a16="http://schemas.microsoft.com/office/drawing/2014/main" id="{753A1A74-F2DC-A797-0EC2-8F7ED704C409}"/>
+              </a:ext>
+            </a:extLst>
+          </p:cNvPr>
+          <p:cNvSpPr/>
+          <p:nvPr/>
+        </p:nvSpPr>
+        <p:spPr>
+          <a:xfrm>
+            <a:off x="237354" y="871427"/>
+            <a:ext cx="1909498" cy="584775"/>
+          </a:xfrm>
+          <a:prstGeom prst="rect">
+            <a:avLst/>
+          </a:prstGeom>
+          <a:noFill/>
+        </p:spPr>
+        <p:txBody>
+          <a:bodyPr wrap="none" lIns="91440" tIns="45720" rIns="91440" bIns="45720">
+            <a:spAutoFit/>
+          </a:bodyPr>
+          <a:lstStyle/>
+          <a:p>
+            <a:pPr algn="ctr"/>
+            <a:r>
+              <a:rPr lang="zh-CN" altLang="en-US" sz="3200" b="1" cap="none" spc="0" dirty="0">
+                <a:ln w="0"/>
                 <a:solidFill>
-                  <a:schemeClr val="tx1"/>
+                  <a:srgbClr val="FF0000"/>
                 </a:solidFill>
-                <a:latin typeface="微软雅黑" panose="020B0503020204020204" pitchFamily="34" charset="-122"/>
-                <a:ea typeface="微软雅黑" panose="020B0503020204020204" pitchFamily="34" charset="-122"/>
-              </a:rPr>
-              <a:t>面向过程编程：</a:t>
-            </a:r>
-            <a:endParaRPr lang="en-US" altLang="zh-CN" sz="2800" b="1" dirty="0">
+                <a:effectLst>
+                  <a:outerShdw blurRad="38100" dist="19050" dir="2700000" algn="tl" rotWithShape="0">
+                    <a:schemeClr val="dk1">
+                      <a:alpha val="40000"/>
+                    </a:schemeClr>
+                  </a:outerShdw>
+                </a:effectLst>
+              </a:rPr>
+              <a:t>类 </a:t>
+            </a:r>
+            <a:r>
+              <a:rPr lang="en-US" altLang="zh-CN" sz="3200" b="1" cap="none" spc="0" dirty="0">
+                <a:ln w="0"/>
+                <a:solidFill>
+                  <a:srgbClr val="FF0000"/>
+                </a:solidFill>
+                <a:effectLst>
+                  <a:outerShdw blurRad="38100" dist="19050" dir="2700000" algn="tl" rotWithShape="0">
+                    <a:schemeClr val="dk1">
+                      <a:alpha val="40000"/>
+                    </a:schemeClr>
+                  </a:outerShdw>
+                </a:effectLst>
+              </a:rPr>
+              <a:t>(Class)</a:t>
+            </a:r>
+            <a:endParaRPr lang="zh-CN" altLang="en-US" sz="3200" b="1" cap="none" spc="0" dirty="0">
+              <a:ln w="0"/>
               <a:solidFill>
-                <a:schemeClr val="tx1"/>
+                <a:srgbClr val="FF0000"/>
+              </a:solidFill>
+              <a:effectLst>
+                <a:outerShdw blurRad="38100" dist="19050" dir="2700000" algn="tl" rotWithShape="0">
+                  <a:schemeClr val="dk1">
+                    <a:alpha val="40000"/>
+                  </a:schemeClr>
+                </a:outerShdw>
+              </a:effectLst>
+            </a:endParaRPr>
+          </a:p>
+        </p:txBody>
+      </p:sp>
+      <p:sp>
+        <p:nvSpPr>
+          <p:cNvPr id="58" name="文本框 57">
+            <a:extLst>
+              <a:ext uri="{FF2B5EF4-FFF2-40B4-BE49-F238E27FC236}">
+                <a16:creationId xmlns:a16="http://schemas.microsoft.com/office/drawing/2014/main" id="{5B4FCC06-5411-27AC-5465-8225A43AEF9E}"/>
+              </a:ext>
+            </a:extLst>
+          </p:cNvPr>
+          <p:cNvSpPr txBox="1"/>
+          <p:nvPr/>
+        </p:nvSpPr>
+        <p:spPr>
+          <a:xfrm>
+            <a:off x="253052" y="5875592"/>
+            <a:ext cx="3924728" cy="707886"/>
+          </a:xfrm>
+          <a:prstGeom prst="rect">
+            <a:avLst/>
+          </a:prstGeom>
+          <a:noFill/>
+          <a:ln>
+            <a:noFill/>
+          </a:ln>
+        </p:spPr>
+        <p:txBody>
+          <a:bodyPr wrap="none" rtlCol="0">
+            <a:spAutoFit/>
+          </a:bodyPr>
+          <a:lstStyle/>
+          <a:p>
+            <a:pPr algn="ctr"/>
+            <a:r>
+              <a:rPr lang="zh-CN" altLang="en-US" sz="2400" b="1" dirty="0">
+                <a:solidFill>
+                  <a:srgbClr val="FF0000"/>
+                </a:solidFill>
+                <a:latin typeface="微软雅黑" panose="020B0503020204020204" pitchFamily="34" charset="-122"/>
+                <a:ea typeface="微软雅黑" panose="020B0503020204020204" pitchFamily="34" charset="-122"/>
+              </a:rPr>
+              <a:t>超类（基类、父类）</a:t>
+            </a:r>
+            <a:endParaRPr lang="en-US" altLang="zh-CN" sz="2400" b="1" dirty="0">
+              <a:solidFill>
+                <a:srgbClr val="FF0000"/>
               </a:solidFill>
               <a:latin typeface="微软雅黑" panose="020B0503020204020204" pitchFamily="34" charset="-122"/>
               <a:ea typeface="微软雅黑" panose="020B0503020204020204" pitchFamily="34" charset="-122"/>
             </a:endParaRPr>
           </a:p>
           <a:p>
-            <a:pPr marL="285750" indent="-285750">
-              <a:spcAft>
-                <a:spcPts val="600"/>
-              </a:spcAft>
-              <a:buFont typeface="Arial" panose="020B0604020202020204" pitchFamily="34" charset="0"/>
-              <a:buChar char="•"/>
-            </a:pPr>
-            <a:r>
-              <a:rPr lang="zh-CN" altLang="en-US" b="1" dirty="0">
+            <a:pPr algn="ctr"/>
+            <a:r>
+              <a:rPr lang="en-US" altLang="zh-CN" sz="1600" b="1" dirty="0">
                 <a:solidFill>
-                  <a:schemeClr val="tx1"/>
+                  <a:srgbClr val="FF0000"/>
                 </a:solidFill>
                 <a:latin typeface="微软雅黑" panose="020B0503020204020204" pitchFamily="34" charset="-122"/>
                 <a:ea typeface="微软雅黑" panose="020B0503020204020204" pitchFamily="34" charset="-122"/>
               </a:rPr>
-              <a:t>程序的具体算法是什么？</a:t>
-            </a:r>
-            <a:endParaRPr lang="en-US" altLang="zh-CN" b="1" dirty="0">
+              <a:t>Superclass (Base Class, Parent Class)</a:t>
+            </a:r>
+            <a:endParaRPr lang="zh-CN" altLang="en-US" sz="1600" b="1" dirty="0">
               <a:solidFill>
-                <a:schemeClr val="tx1"/>
+                <a:srgbClr val="FF0000"/>
               </a:solidFill>
               <a:latin typeface="微软雅黑" panose="020B0503020204020204" pitchFamily="34" charset="-122"/>
               <a:ea typeface="微软雅黑" panose="020B0503020204020204" pitchFamily="34" charset="-122"/>
             </a:endParaRPr>
           </a:p>
-          <a:p>
-            <a:pPr marL="285750" indent="-285750">
-              <a:spcAft>
-                <a:spcPts val="600"/>
-              </a:spcAft>
-              <a:buFont typeface="Arial" panose="020B0604020202020204" pitchFamily="34" charset="0"/>
-              <a:buChar char="•"/>
-            </a:pPr>
-            <a:r>
-              <a:rPr lang="zh-CN" altLang="en-US" b="1" dirty="0">
+        </p:txBody>
+      </p:sp>
+      <p:sp>
+        <p:nvSpPr>
+          <p:cNvPr id="59" name="文本框 58">
+            <a:extLst>
+              <a:ext uri="{FF2B5EF4-FFF2-40B4-BE49-F238E27FC236}">
+                <a16:creationId xmlns:a16="http://schemas.microsoft.com/office/drawing/2014/main" id="{652C21EC-C7F7-863E-55CF-AE84FED09725}"/>
+              </a:ext>
+            </a:extLst>
+          </p:cNvPr>
+          <p:cNvSpPr txBox="1"/>
+          <p:nvPr/>
+        </p:nvSpPr>
+        <p:spPr>
+          <a:xfrm>
+            <a:off x="4820495" y="5870503"/>
+            <a:ext cx="3812389" cy="707886"/>
+          </a:xfrm>
+          <a:prstGeom prst="rect">
+            <a:avLst/>
+          </a:prstGeom>
+          <a:noFill/>
+          <a:ln>
+            <a:noFill/>
+          </a:ln>
+        </p:spPr>
+        <p:txBody>
+          <a:bodyPr wrap="none" rtlCol="0">
+            <a:spAutoFit/>
+          </a:bodyPr>
+          <a:lstStyle/>
+          <a:p>
+            <a:pPr algn="ctr"/>
+            <a:r>
+              <a:rPr lang="zh-CN" altLang="en-US" sz="2400" b="1" dirty="0">
                 <a:solidFill>
-                  <a:schemeClr val="tx1"/>
+                  <a:srgbClr val="FF0000"/>
                 </a:solidFill>
                 <a:latin typeface="微软雅黑" panose="020B0503020204020204" pitchFamily="34" charset="-122"/>
                 <a:ea typeface="微软雅黑" panose="020B0503020204020204" pitchFamily="34" charset="-122"/>
               </a:rPr>
-              <a:t>顺序？选择？循环？</a:t>
-            </a:r>
-            <a:endParaRPr lang="en-US" altLang="zh-CN" b="1" dirty="0">
+              <a:t>派生类（子类）</a:t>
+            </a:r>
+            <a:endParaRPr lang="en-US" altLang="zh-CN" sz="2400" b="1" dirty="0">
               <a:solidFill>
-                <a:schemeClr val="tx1"/>
+                <a:srgbClr val="FF0000"/>
               </a:solidFill>
               <a:latin typeface="微软雅黑" panose="020B0503020204020204" pitchFamily="34" charset="-122"/>
               <a:ea typeface="微软雅黑" panose="020B0503020204020204" pitchFamily="34" charset="-122"/>
             </a:endParaRPr>
           </a:p>
           <a:p>
-            <a:pPr marL="285750" indent="-285750">
-              <a:spcAft>
-                <a:spcPts val="600"/>
-              </a:spcAft>
-              <a:buFont typeface="Arial" panose="020B0604020202020204" pitchFamily="34" charset="0"/>
-              <a:buChar char="•"/>
-            </a:pPr>
-            <a:r>
-              <a:rPr lang="zh-CN" altLang="en-US" b="1" dirty="0">
+            <a:pPr algn="ctr"/>
+            <a:r>
+              <a:rPr lang="en-US" altLang="zh-CN" sz="1600" b="1" dirty="0">
                 <a:solidFill>
-                  <a:schemeClr val="tx1"/>
+                  <a:srgbClr val="FF0000"/>
                 </a:solidFill>
                 <a:latin typeface="微软雅黑" panose="020B0503020204020204" pitchFamily="34" charset="-122"/>
                 <a:ea typeface="微软雅黑" panose="020B0503020204020204" pitchFamily="34" charset="-122"/>
               </a:rPr>
-              <a:t>第一步？第二步？第三步？</a:t>
-            </a:r>
-            <a:endParaRPr lang="en-US" altLang="zh-CN" b="1" dirty="0">
+              <a:t>Derived Class (child class, subclass)</a:t>
+            </a:r>
+            <a:endParaRPr lang="zh-CN" altLang="en-US" sz="1600" b="1" dirty="0">
               <a:solidFill>
-                <a:schemeClr val="tx1"/>
+                <a:srgbClr val="FF0000"/>
               </a:solidFill>
               <a:latin typeface="微软雅黑" panose="020B0503020204020204" pitchFamily="34" charset="-122"/>
               <a:ea typeface="微软雅黑" panose="020B0503020204020204" pitchFamily="34" charset="-122"/>
             </a:endParaRPr>
           </a:p>
-          <a:p>
-            <a:pPr marL="285750" indent="-285750">
-              <a:spcAft>
-                <a:spcPts val="600"/>
-              </a:spcAft>
-              <a:buFont typeface="Arial" panose="020B0604020202020204" pitchFamily="34" charset="0"/>
-              <a:buChar char="•"/>
-            </a:pPr>
-            <a:r>
-              <a:rPr lang="zh-CN" altLang="en-US" b="1" dirty="0">
-                <a:solidFill>
-                  <a:schemeClr val="tx1"/>
-                </a:solidFill>
-                <a:latin typeface="微软雅黑" panose="020B0503020204020204" pitchFamily="34" charset="-122"/>
-                <a:ea typeface="微软雅黑" panose="020B0503020204020204" pitchFamily="34" charset="-122"/>
-              </a:rPr>
-              <a:t>什么函数要执行什么功能？</a:t>
-            </a:r>
-          </a:p>
-        </p:txBody>
-      </p:sp>
-      <p:sp>
-        <p:nvSpPr>
-          <p:cNvPr id="5" name="矩形: 圆角 4">
-            <a:extLst>
-              <a:ext uri="{FF2B5EF4-FFF2-40B4-BE49-F238E27FC236}">
-                <a16:creationId xmlns:a16="http://schemas.microsoft.com/office/drawing/2014/main" id="{C034701B-73D8-C9AC-8778-433556CE1596}"/>
+        </p:txBody>
+      </p:sp>
+      <p:sp>
+        <p:nvSpPr>
+          <p:cNvPr id="60" name="矩形 59">
+            <a:extLst>
+              <a:ext uri="{FF2B5EF4-FFF2-40B4-BE49-F238E27FC236}">
+                <a16:creationId xmlns:a16="http://schemas.microsoft.com/office/drawing/2014/main" id="{23E7E23C-24A7-0064-A0F4-1B4E84CDA7C5}"/>
               </a:ext>
             </a:extLst>
           </p:cNvPr>
@@ -11867,20 +15765,105 @@
         </p:nvSpPr>
         <p:spPr>
           <a:xfrm>
-            <a:off x="7500724" y="1126430"/>
-            <a:ext cx="3664226" cy="2484782"/>
-          </a:xfrm>
-          <a:prstGeom prst="roundRect">
-            <a:avLst>
-              <a:gd name="adj" fmla="val 12934"/>
-            </a:avLst>
+            <a:off x="3068871" y="1552818"/>
+            <a:ext cx="1659429" cy="830997"/>
+          </a:xfrm>
+          <a:prstGeom prst="rect">
+            <a:avLst/>
           </a:prstGeom>
-          <a:solidFill>
-            <a:schemeClr val="accent2">
-              <a:lumMod val="20000"/>
-              <a:lumOff val="80000"/>
-            </a:schemeClr>
-          </a:solidFill>
+          <a:noFill/>
+        </p:spPr>
+        <p:txBody>
+          <a:bodyPr wrap="none" lIns="91440" tIns="45720" rIns="91440" bIns="45720">
+            <a:spAutoFit/>
+          </a:bodyPr>
+          <a:lstStyle/>
+          <a:p>
+            <a:pPr algn="ctr"/>
+            <a:r>
+              <a:rPr lang="zh-CN" altLang="en-US" sz="2800" b="1" cap="none" spc="0" dirty="0">
+                <a:ln w="0"/>
+                <a:solidFill>
+                  <a:srgbClr val="FF0000"/>
+                </a:solidFill>
+                <a:effectLst>
+                  <a:outerShdw blurRad="38100" dist="19050" dir="2700000" algn="tl" rotWithShape="0">
+                    <a:schemeClr val="dk1">
+                      <a:alpha val="40000"/>
+                    </a:schemeClr>
+                  </a:outerShdw>
+                </a:effectLst>
+              </a:rPr>
+              <a:t>继承</a:t>
+            </a:r>
+            <a:endParaRPr lang="en-US" altLang="zh-CN" sz="2800" b="1" cap="none" spc="0" dirty="0">
+              <a:ln w="0"/>
+              <a:solidFill>
+                <a:srgbClr val="FF0000"/>
+              </a:solidFill>
+              <a:effectLst>
+                <a:outerShdw blurRad="38100" dist="19050" dir="2700000" algn="tl" rotWithShape="0">
+                  <a:schemeClr val="dk1">
+                    <a:alpha val="40000"/>
+                  </a:schemeClr>
+                </a:outerShdw>
+              </a:effectLst>
+            </a:endParaRPr>
+          </a:p>
+          <a:p>
+            <a:pPr algn="ctr"/>
+            <a:r>
+              <a:rPr lang="en-US" altLang="zh-CN" sz="2000" b="1" dirty="0">
+                <a:ln w="0"/>
+                <a:solidFill>
+                  <a:srgbClr val="FF0000"/>
+                </a:solidFill>
+                <a:effectLst>
+                  <a:outerShdw blurRad="38100" dist="19050" dir="2700000" algn="tl" rotWithShape="0">
+                    <a:schemeClr val="dk1">
+                      <a:alpha val="40000"/>
+                    </a:schemeClr>
+                  </a:outerShdw>
+                </a:effectLst>
+              </a:rPr>
+              <a:t>(Inheritance)</a:t>
+            </a:r>
+            <a:endParaRPr lang="zh-CN" altLang="en-US" sz="2000" b="1" cap="none" spc="0" dirty="0">
+              <a:ln w="0"/>
+              <a:solidFill>
+                <a:srgbClr val="FF0000"/>
+              </a:solidFill>
+              <a:effectLst>
+                <a:outerShdw blurRad="38100" dist="19050" dir="2700000" algn="tl" rotWithShape="0">
+                  <a:schemeClr val="dk1">
+                    <a:alpha val="40000"/>
+                  </a:schemeClr>
+                </a:outerShdw>
+              </a:effectLst>
+            </a:endParaRPr>
+          </a:p>
+        </p:txBody>
+      </p:sp>
+      <p:sp>
+        <p:nvSpPr>
+          <p:cNvPr id="61" name="箭头: 右 60">
+            <a:extLst>
+              <a:ext uri="{FF2B5EF4-FFF2-40B4-BE49-F238E27FC236}">
+                <a16:creationId xmlns:a16="http://schemas.microsoft.com/office/drawing/2014/main" id="{25FB34A7-256D-27A3-9835-15526D19B445}"/>
+              </a:ext>
+            </a:extLst>
+          </p:cNvPr>
+          <p:cNvSpPr/>
+          <p:nvPr/>
+        </p:nvSpPr>
+        <p:spPr>
+          <a:xfrm>
+            <a:off x="7659756" y="1530626"/>
+            <a:ext cx="1573857" cy="523220"/>
+          </a:xfrm>
+          <a:prstGeom prst="rightArrow">
+            <a:avLst/>
+          </a:prstGeom>
         </p:spPr>
         <p:style>
           <a:lnRef idx="2">
@@ -11902,134 +15885,17 @@
           <a:bodyPr rtlCol="0" anchor="ctr"/>
           <a:lstStyle/>
           <a:p>
-            <a:pPr>
-              <a:spcAft>
-                <a:spcPts val="1800"/>
-              </a:spcAft>
-            </a:pPr>
-            <a:r>
-              <a:rPr lang="zh-CN" altLang="en-US" sz="2800" b="1" dirty="0">
-                <a:solidFill>
-                  <a:schemeClr val="tx1"/>
-                </a:solidFill>
-                <a:latin typeface="微软雅黑" panose="020B0503020204020204" pitchFamily="34" charset="-122"/>
-                <a:ea typeface="微软雅黑" panose="020B0503020204020204" pitchFamily="34" charset="-122"/>
-              </a:rPr>
-              <a:t>面向对象编程：</a:t>
-            </a:r>
-            <a:endParaRPr lang="en-US" altLang="zh-CN" sz="2800" b="1" dirty="0">
-              <a:solidFill>
-                <a:schemeClr val="tx1"/>
-              </a:solidFill>
-              <a:latin typeface="微软雅黑" panose="020B0503020204020204" pitchFamily="34" charset="-122"/>
-              <a:ea typeface="微软雅黑" panose="020B0503020204020204" pitchFamily="34" charset="-122"/>
-            </a:endParaRPr>
-          </a:p>
-          <a:p>
-            <a:pPr marL="285750" indent="-285750">
-              <a:spcAft>
-                <a:spcPts val="600"/>
-              </a:spcAft>
-              <a:buFont typeface="Arial" panose="020B0604020202020204" pitchFamily="34" charset="0"/>
-              <a:buChar char="•"/>
-            </a:pPr>
-            <a:r>
-              <a:rPr lang="zh-CN" altLang="en-US" b="1" dirty="0">
-                <a:solidFill>
-                  <a:schemeClr val="tx1"/>
-                </a:solidFill>
-                <a:latin typeface="微软雅黑" panose="020B0503020204020204" pitchFamily="34" charset="-122"/>
-                <a:ea typeface="微软雅黑" panose="020B0503020204020204" pitchFamily="34" charset="-122"/>
-              </a:rPr>
-              <a:t>系统里都有哪些实体？</a:t>
-            </a:r>
-            <a:endParaRPr lang="en-US" altLang="zh-CN" b="1" dirty="0">
-              <a:solidFill>
-                <a:schemeClr val="tx1"/>
-              </a:solidFill>
-              <a:latin typeface="微软雅黑" panose="020B0503020204020204" pitchFamily="34" charset="-122"/>
-              <a:ea typeface="微软雅黑" panose="020B0503020204020204" pitchFamily="34" charset="-122"/>
-            </a:endParaRPr>
-          </a:p>
-          <a:p>
-            <a:pPr marL="285750" indent="-285750">
-              <a:spcAft>
-                <a:spcPts val="600"/>
-              </a:spcAft>
-              <a:buFont typeface="Arial" panose="020B0604020202020204" pitchFamily="34" charset="0"/>
-              <a:buChar char="•"/>
-            </a:pPr>
-            <a:r>
-              <a:rPr lang="zh-CN" altLang="en-US" b="1" dirty="0">
-                <a:solidFill>
-                  <a:schemeClr val="tx1"/>
-                </a:solidFill>
-                <a:latin typeface="微软雅黑" panose="020B0503020204020204" pitchFamily="34" charset="-122"/>
-                <a:ea typeface="微软雅黑" panose="020B0503020204020204" pitchFamily="34" charset="-122"/>
-              </a:rPr>
-              <a:t>这些实体有什么数据和行为？</a:t>
-            </a:r>
-            <a:endParaRPr lang="en-US" altLang="zh-CN" b="1" dirty="0">
-              <a:solidFill>
-                <a:schemeClr val="tx1"/>
-              </a:solidFill>
-              <a:latin typeface="微软雅黑" panose="020B0503020204020204" pitchFamily="34" charset="-122"/>
-              <a:ea typeface="微软雅黑" panose="020B0503020204020204" pitchFamily="34" charset="-122"/>
-            </a:endParaRPr>
-          </a:p>
-          <a:p>
-            <a:pPr marL="285750" indent="-285750">
-              <a:spcAft>
-                <a:spcPts val="600"/>
-              </a:spcAft>
-              <a:buFont typeface="Arial" panose="020B0604020202020204" pitchFamily="34" charset="0"/>
-              <a:buChar char="•"/>
-            </a:pPr>
-            <a:r>
-              <a:rPr lang="zh-CN" altLang="en-US" b="1" dirty="0">
-                <a:solidFill>
-                  <a:schemeClr val="tx1"/>
-                </a:solidFill>
-                <a:latin typeface="微软雅黑" panose="020B0503020204020204" pitchFamily="34" charset="-122"/>
-                <a:ea typeface="微软雅黑" panose="020B0503020204020204" pitchFamily="34" charset="-122"/>
-              </a:rPr>
-              <a:t>对象之间是如何协作的？</a:t>
-            </a:r>
-            <a:endParaRPr lang="en-US" altLang="zh-CN" b="1" dirty="0">
-              <a:solidFill>
-                <a:schemeClr val="tx1"/>
-              </a:solidFill>
-              <a:latin typeface="微软雅黑" panose="020B0503020204020204" pitchFamily="34" charset="-122"/>
-              <a:ea typeface="微软雅黑" panose="020B0503020204020204" pitchFamily="34" charset="-122"/>
-            </a:endParaRPr>
-          </a:p>
-          <a:p>
-            <a:pPr marL="285750" indent="-285750">
-              <a:spcAft>
-                <a:spcPts val="600"/>
-              </a:spcAft>
-              <a:buFont typeface="Arial" panose="020B0604020202020204" pitchFamily="34" charset="0"/>
-              <a:buChar char="•"/>
-            </a:pPr>
-            <a:r>
-              <a:rPr lang="zh-CN" altLang="en-US" b="1" dirty="0">
-                <a:solidFill>
-                  <a:schemeClr val="tx1"/>
-                </a:solidFill>
-                <a:latin typeface="微软雅黑" panose="020B0503020204020204" pitchFamily="34" charset="-122"/>
-                <a:ea typeface="微软雅黑" panose="020B0503020204020204" pitchFamily="34" charset="-122"/>
-              </a:rPr>
-              <a:t>谁，负责干什么？</a:t>
-            </a:r>
-          </a:p>
-        </p:txBody>
-      </p:sp>
-      <p:sp>
-        <p:nvSpPr>
-          <p:cNvPr id="6" name="箭头: 右 5">
-            <a:extLst>
-              <a:ext uri="{FF2B5EF4-FFF2-40B4-BE49-F238E27FC236}">
-                <a16:creationId xmlns:a16="http://schemas.microsoft.com/office/drawing/2014/main" id="{05717FA1-1FA1-2FFA-CB7F-E6D7325D4C3E}"/>
+            <a:pPr algn="ctr"/>
+            <a:endParaRPr lang="zh-CN" altLang="en-US"/>
+          </a:p>
+        </p:txBody>
+      </p:sp>
+      <p:sp>
+        <p:nvSpPr>
+          <p:cNvPr id="62" name="箭头: 右 61">
+            <a:extLst>
+              <a:ext uri="{FF2B5EF4-FFF2-40B4-BE49-F238E27FC236}">
+                <a16:creationId xmlns:a16="http://schemas.microsoft.com/office/drawing/2014/main" id="{FAB1C56D-5483-E46C-F52E-67E26EC9B449}"/>
               </a:ext>
             </a:extLst>
           </p:cNvPr>
@@ -12038,8 +15904,8 @@
         </p:nvSpPr>
         <p:spPr>
           <a:xfrm>
-            <a:off x="4684641" y="2736568"/>
-            <a:ext cx="2670313" cy="530087"/>
+            <a:off x="7662903" y="3268495"/>
+            <a:ext cx="1573857" cy="523220"/>
           </a:xfrm>
           <a:prstGeom prst="rightArrow">
             <a:avLst/>
@@ -12072,10 +15938,10 @@
       </p:sp>
       <p:sp>
         <p:nvSpPr>
-          <p:cNvPr id="7" name="矩形 6">
-            <a:extLst>
-              <a:ext uri="{FF2B5EF4-FFF2-40B4-BE49-F238E27FC236}">
-                <a16:creationId xmlns:a16="http://schemas.microsoft.com/office/drawing/2014/main" id="{2DC080A5-A7FA-3173-BCAB-6921AB084E7D}"/>
+          <p:cNvPr id="63" name="箭头: 右 62">
+            <a:extLst>
+              <a:ext uri="{FF2B5EF4-FFF2-40B4-BE49-F238E27FC236}">
+                <a16:creationId xmlns:a16="http://schemas.microsoft.com/office/drawing/2014/main" id="{759BD167-5CBE-5474-79F0-D8676E1A9D1C}"/>
               </a:ext>
             </a:extLst>
           </p:cNvPr>
@@ -12084,18 +15950,12 @@
         </p:nvSpPr>
         <p:spPr>
           <a:xfrm>
-            <a:off x="682487" y="5466233"/>
-            <a:ext cx="10588487" cy="1047209"/>
-          </a:xfrm>
-          <a:prstGeom prst="rect">
+            <a:off x="7659756" y="4759788"/>
+            <a:ext cx="1573857" cy="523220"/>
+          </a:xfrm>
+          <a:prstGeom prst="rightArrow">
             <a:avLst/>
           </a:prstGeom>
-          <a:noFill/>
-          <a:ln w="57150">
-            <a:solidFill>
-              <a:schemeClr val="tx1"/>
-            </a:solidFill>
-          </a:ln>
         </p:spPr>
         <p:style>
           <a:lnRef idx="2">
@@ -12117,94 +15977,17 @@
           <a:bodyPr rtlCol="0" anchor="ctr"/>
           <a:lstStyle/>
           <a:p>
-            <a:pPr indent="457200"/>
-            <a:r>
-              <a:rPr lang="zh-CN" altLang="en-US" sz="2400" b="1" dirty="0">
-                <a:solidFill>
-                  <a:schemeClr val="tx1"/>
-                </a:solidFill>
-              </a:rPr>
-              <a:t>两者并非相互替换的关系，需从程序的逻辑和架构上去考虑。对于一个宏大的系统，两者在不同的角度上可能是互补的。</a:t>
-            </a:r>
-          </a:p>
-        </p:txBody>
-      </p:sp>
-      <p:pic>
-        <p:nvPicPr>
-          <p:cNvPr id="9" name="图片 8" descr="图示&#10;&#10;AI 生成的内容可能不正确。">
-            <a:extLst>
-              <a:ext uri="{FF2B5EF4-FFF2-40B4-BE49-F238E27FC236}">
-                <a16:creationId xmlns:a16="http://schemas.microsoft.com/office/drawing/2014/main" id="{0C48AFCC-D331-33D8-6201-4F65463C3D94}"/>
-              </a:ext>
-            </a:extLst>
-          </p:cNvPr>
-          <p:cNvPicPr>
-            <a:picLocks noChangeAspect="1"/>
-          </p:cNvPicPr>
-          <p:nvPr/>
-        </p:nvPicPr>
-        <p:blipFill>
-          <a:blip r:embed="rId2">
-            <a:extLst>
-              <a:ext uri="{28A0092B-C50C-407E-A947-70E740481C1C}">
-                <a14:useLocalDpi xmlns:a14="http://schemas.microsoft.com/office/drawing/2010/main" val="0"/>
-              </a:ext>
-            </a:extLst>
-          </a:blip>
-          <a:srcRect l="51159" t="27057" r="9162" b="30725"/>
-          <a:stretch/>
-        </p:blipFill>
-        <p:spPr>
-          <a:xfrm>
-            <a:off x="8160019" y="3634184"/>
-            <a:ext cx="2345635" cy="1663864"/>
-          </a:xfrm>
-          <a:prstGeom prst="rect">
-            <a:avLst/>
-          </a:prstGeom>
-        </p:spPr>
-      </p:pic>
-      <p:pic>
-        <p:nvPicPr>
-          <p:cNvPr id="10" name="图片 9" descr="图示&#10;&#10;AI 生成的内容可能不正确。">
-            <a:extLst>
-              <a:ext uri="{FF2B5EF4-FFF2-40B4-BE49-F238E27FC236}">
-                <a16:creationId xmlns:a16="http://schemas.microsoft.com/office/drawing/2014/main" id="{AA24282F-3692-E288-17D3-C031EC4C85C1}"/>
-              </a:ext>
-            </a:extLst>
-          </p:cNvPr>
-          <p:cNvPicPr>
-            <a:picLocks noChangeAspect="1"/>
-          </p:cNvPicPr>
-          <p:nvPr/>
-        </p:nvPicPr>
-        <p:blipFill>
-          <a:blip r:embed="rId2">
-            <a:extLst>
-              <a:ext uri="{28A0092B-C50C-407E-A947-70E740481C1C}">
-                <a14:useLocalDpi xmlns:a14="http://schemas.microsoft.com/office/drawing/2010/main" val="0"/>
-              </a:ext>
-            </a:extLst>
-          </a:blip>
-          <a:srcRect l="346" t="46736" r="55193" b="40430"/>
-          <a:stretch/>
-        </p:blipFill>
-        <p:spPr>
-          <a:xfrm>
-            <a:off x="912743" y="4190925"/>
-            <a:ext cx="3614526" cy="695595"/>
-          </a:xfrm>
-          <a:prstGeom prst="rect">
-            <a:avLst/>
-          </a:prstGeom>
-        </p:spPr>
-      </p:pic>
-      <p:sp>
-        <p:nvSpPr>
-          <p:cNvPr id="11" name="文本框 10">
-            <a:extLst>
-              <a:ext uri="{FF2B5EF4-FFF2-40B4-BE49-F238E27FC236}">
-                <a16:creationId xmlns:a16="http://schemas.microsoft.com/office/drawing/2014/main" id="{6CAEAC18-5456-2B06-1922-41C528905D6C}"/>
+            <a:pPr algn="ctr"/>
+            <a:endParaRPr lang="zh-CN" altLang="en-US"/>
+          </a:p>
+        </p:txBody>
+      </p:sp>
+      <p:sp>
+        <p:nvSpPr>
+          <p:cNvPr id="64" name="文本框 63">
+            <a:extLst>
+              <a:ext uri="{FF2B5EF4-FFF2-40B4-BE49-F238E27FC236}">
+                <a16:creationId xmlns:a16="http://schemas.microsoft.com/office/drawing/2014/main" id="{218343AC-A5A7-35A4-C096-A8C6F56DB11F}"/>
               </a:ext>
             </a:extLst>
           </p:cNvPr>
@@ -12213,17 +15996,15 @@
         </p:nvSpPr>
         <p:spPr>
           <a:xfrm>
-            <a:off x="3044617" y="4870039"/>
-            <a:ext cx="1338828" cy="369332"/>
+            <a:off x="9394877" y="1510507"/>
+            <a:ext cx="1938351" cy="584775"/>
           </a:xfrm>
           <a:prstGeom prst="rect">
             <a:avLst/>
           </a:prstGeom>
           <a:noFill/>
-          <a:ln>
-            <a:solidFill>
-              <a:schemeClr val="tx1"/>
-            </a:solidFill>
+          <a:ln w="57150">
+            <a:noFill/>
           </a:ln>
         </p:spPr>
         <p:txBody>
@@ -12233,21 +16014,22 @@
           <a:lstStyle/>
           <a:p>
             <a:r>
-              <a:rPr lang="zh-CN" altLang="en-US" b="1" dirty="0">
-                <a:latin typeface="微软雅黑" panose="020B0503020204020204" pitchFamily="34" charset="-122"/>
-                <a:ea typeface="微软雅黑" panose="020B0503020204020204" pitchFamily="34" charset="-122"/>
-              </a:rPr>
-              <a:t>流水线结构</a:t>
-            </a:r>
-          </a:p>
-        </p:txBody>
-      </p:sp>
-      <p:sp>
-        <p:nvSpPr>
-          <p:cNvPr id="12" name="文本框 11">
-            <a:extLst>
-              <a:ext uri="{FF2B5EF4-FFF2-40B4-BE49-F238E27FC236}">
-                <a16:creationId xmlns:a16="http://schemas.microsoft.com/office/drawing/2014/main" id="{87A70945-E70F-1CA1-64DB-D1BE5270BD37}"/>
+              <a:rPr lang="zh-CN" altLang="en-US" sz="3200" b="1" dirty="0">
+                <a:solidFill>
+                  <a:schemeClr val="accent5"/>
+                </a:solidFill>
+              </a:rPr>
+              <a:t>鹦鹉 小茂</a:t>
+            </a:r>
+          </a:p>
+        </p:txBody>
+      </p:sp>
+      <p:sp>
+        <p:nvSpPr>
+          <p:cNvPr id="65" name="文本框 64">
+            <a:extLst>
+              <a:ext uri="{FF2B5EF4-FFF2-40B4-BE49-F238E27FC236}">
+                <a16:creationId xmlns:a16="http://schemas.microsoft.com/office/drawing/2014/main" id="{B0241EF6-B5A8-88FB-E972-B173907A9B12}"/>
               </a:ext>
             </a:extLst>
           </p:cNvPr>
@@ -12256,17 +16038,15 @@
         </p:nvSpPr>
         <p:spPr>
           <a:xfrm>
-            <a:off x="9995383" y="3984724"/>
-            <a:ext cx="1107996" cy="369332"/>
+            <a:off x="9394877" y="3211503"/>
+            <a:ext cx="1938351" cy="584775"/>
           </a:xfrm>
           <a:prstGeom prst="rect">
             <a:avLst/>
           </a:prstGeom>
           <a:noFill/>
-          <a:ln>
-            <a:solidFill>
-              <a:schemeClr val="tx1"/>
-            </a:solidFill>
+          <a:ln w="57150">
+            <a:noFill/>
           </a:ln>
         </p:spPr>
         <p:txBody>
@@ -12276,46 +16056,520 @@
           <a:lstStyle/>
           <a:p>
             <a:r>
-              <a:rPr lang="zh-CN" altLang="en-US" b="1" dirty="0">
-                <a:latin typeface="微软雅黑" panose="020B0503020204020204" pitchFamily="34" charset="-122"/>
-                <a:ea typeface="微软雅黑" panose="020B0503020204020204" pitchFamily="34" charset="-122"/>
-              </a:rPr>
-              <a:t>组织结构</a:t>
-            </a:r>
-          </a:p>
-        </p:txBody>
-      </p:sp>
-      <p:sp>
-        <p:nvSpPr>
-          <p:cNvPr id="13" name="矩形 12">
-            <a:extLst>
-              <a:ext uri="{FF2B5EF4-FFF2-40B4-BE49-F238E27FC236}">
-                <a16:creationId xmlns:a16="http://schemas.microsoft.com/office/drawing/2014/main" id="{99CE5611-8A24-C2D9-3C49-04550D72F5F4}"/>
-              </a:ext>
-            </a:extLst>
-          </p:cNvPr>
-          <p:cNvSpPr/>
+              <a:rPr lang="zh-CN" altLang="en-US" sz="3200" b="1" dirty="0">
+                <a:solidFill>
+                  <a:schemeClr val="accent5"/>
+                </a:solidFill>
+              </a:rPr>
+              <a:t>企鹅 小明</a:t>
+            </a:r>
+          </a:p>
+        </p:txBody>
+      </p:sp>
+      <p:sp>
+        <p:nvSpPr>
+          <p:cNvPr id="66" name="文本框 65">
+            <a:extLst>
+              <a:ext uri="{FF2B5EF4-FFF2-40B4-BE49-F238E27FC236}">
+                <a16:creationId xmlns:a16="http://schemas.microsoft.com/office/drawing/2014/main" id="{20D55CA8-5C51-313F-407E-F564ECC4F88F}"/>
+              </a:ext>
+            </a:extLst>
+          </p:cNvPr>
+          <p:cNvSpPr txBox="1"/>
           <p:nvPr/>
         </p:nvSpPr>
         <p:spPr>
           <a:xfrm>
-            <a:off x="4641573" y="1485622"/>
-            <a:ext cx="2670314" cy="1323439"/>
+            <a:off x="9394877" y="4723177"/>
+            <a:ext cx="1938351" cy="584775"/>
           </a:xfrm>
           <a:prstGeom prst="rect">
             <a:avLst/>
           </a:prstGeom>
           <a:noFill/>
-        </p:spPr>
-        <p:txBody>
-          <a:bodyPr wrap="square" lIns="91440" tIns="45720" rIns="91440" bIns="45720">
+          <a:ln w="57150">
+            <a:noFill/>
+          </a:ln>
+        </p:spPr>
+        <p:txBody>
+          <a:bodyPr wrap="none" rtlCol="0">
             <a:spAutoFit/>
           </a:bodyPr>
           <a:lstStyle/>
           <a:p>
+            <a:r>
+              <a:rPr lang="zh-CN" altLang="en-US" sz="3200" b="1" dirty="0">
+                <a:solidFill>
+                  <a:schemeClr val="accent5"/>
+                </a:solidFill>
+              </a:rPr>
+              <a:t>老鹰 小兰</a:t>
+            </a:r>
+          </a:p>
+        </p:txBody>
+      </p:sp>
+      <p:sp>
+        <p:nvSpPr>
+          <p:cNvPr id="67" name="矩形 66">
+            <a:extLst>
+              <a:ext uri="{FF2B5EF4-FFF2-40B4-BE49-F238E27FC236}">
+                <a16:creationId xmlns:a16="http://schemas.microsoft.com/office/drawing/2014/main" id="{9346C93E-A0DE-DA95-24E8-001BF8C6414B}"/>
+              </a:ext>
+            </a:extLst>
+          </p:cNvPr>
+          <p:cNvSpPr/>
+          <p:nvPr/>
+        </p:nvSpPr>
+        <p:spPr>
+          <a:xfrm>
+            <a:off x="7853699" y="1588890"/>
+            <a:ext cx="954108" cy="400110"/>
+          </a:xfrm>
+          <a:prstGeom prst="rect">
+            <a:avLst/>
+          </a:prstGeom>
+          <a:noFill/>
+        </p:spPr>
+        <p:txBody>
+          <a:bodyPr wrap="none" lIns="91440" tIns="45720" rIns="91440" bIns="45720">
+            <a:spAutoFit/>
+          </a:bodyPr>
+          <a:lstStyle/>
+          <a:p>
             <a:pPr algn="ctr"/>
             <a:r>
-              <a:rPr lang="zh-CN" altLang="en-US" sz="4000" b="1" cap="none" spc="0" dirty="0">
+              <a:rPr lang="zh-CN" altLang="en-US" sz="2000" b="1" cap="none" spc="0" dirty="0">
+                <a:ln w="0"/>
+                <a:solidFill>
+                  <a:schemeClr val="bg1"/>
+                </a:solidFill>
+                <a:effectLst>
+                  <a:outerShdw blurRad="38100" dist="19050" dir="2700000" algn="tl" rotWithShape="0">
+                    <a:schemeClr val="dk1">
+                      <a:alpha val="40000"/>
+                    </a:schemeClr>
+                  </a:outerShdw>
+                </a:effectLst>
+              </a:rPr>
+              <a:t>实例化</a:t>
+            </a:r>
+          </a:p>
+        </p:txBody>
+      </p:sp>
+      <p:sp>
+        <p:nvSpPr>
+          <p:cNvPr id="68" name="矩形 67">
+            <a:extLst>
+              <a:ext uri="{FF2B5EF4-FFF2-40B4-BE49-F238E27FC236}">
+                <a16:creationId xmlns:a16="http://schemas.microsoft.com/office/drawing/2014/main" id="{1608910B-B36B-D0AA-97E4-BA497A91FE3A}"/>
+              </a:ext>
+            </a:extLst>
+          </p:cNvPr>
+          <p:cNvSpPr/>
+          <p:nvPr/>
+        </p:nvSpPr>
+        <p:spPr>
+          <a:xfrm>
+            <a:off x="7853699" y="3321812"/>
+            <a:ext cx="954108" cy="400110"/>
+          </a:xfrm>
+          <a:prstGeom prst="rect">
+            <a:avLst/>
+          </a:prstGeom>
+          <a:noFill/>
+        </p:spPr>
+        <p:txBody>
+          <a:bodyPr wrap="none" lIns="91440" tIns="45720" rIns="91440" bIns="45720">
+            <a:spAutoFit/>
+          </a:bodyPr>
+          <a:lstStyle/>
+          <a:p>
+            <a:pPr algn="ctr"/>
+            <a:r>
+              <a:rPr lang="zh-CN" altLang="en-US" sz="2000" b="1" cap="none" spc="0" dirty="0">
+                <a:ln w="0"/>
+                <a:solidFill>
+                  <a:schemeClr val="bg1"/>
+                </a:solidFill>
+                <a:effectLst>
+                  <a:outerShdw blurRad="38100" dist="19050" dir="2700000" algn="tl" rotWithShape="0">
+                    <a:schemeClr val="dk1">
+                      <a:alpha val="40000"/>
+                    </a:schemeClr>
+                  </a:outerShdw>
+                </a:effectLst>
+              </a:rPr>
+              <a:t>实例化</a:t>
+            </a:r>
+          </a:p>
+        </p:txBody>
+      </p:sp>
+      <p:sp>
+        <p:nvSpPr>
+          <p:cNvPr id="69" name="矩形 68">
+            <a:extLst>
+              <a:ext uri="{FF2B5EF4-FFF2-40B4-BE49-F238E27FC236}">
+                <a16:creationId xmlns:a16="http://schemas.microsoft.com/office/drawing/2014/main" id="{22AA5E2F-7F03-F068-17AE-BDE7DD7C957C}"/>
+              </a:ext>
+            </a:extLst>
+          </p:cNvPr>
+          <p:cNvSpPr/>
+          <p:nvPr/>
+        </p:nvSpPr>
+        <p:spPr>
+          <a:xfrm>
+            <a:off x="7853699" y="4816932"/>
+            <a:ext cx="954108" cy="400110"/>
+          </a:xfrm>
+          <a:prstGeom prst="rect">
+            <a:avLst/>
+          </a:prstGeom>
+          <a:noFill/>
+        </p:spPr>
+        <p:txBody>
+          <a:bodyPr wrap="none" lIns="91440" tIns="45720" rIns="91440" bIns="45720">
+            <a:spAutoFit/>
+          </a:bodyPr>
+          <a:lstStyle/>
+          <a:p>
+            <a:pPr algn="ctr"/>
+            <a:r>
+              <a:rPr lang="zh-CN" altLang="en-US" sz="2000" b="1" cap="none" spc="0" dirty="0">
+                <a:ln w="0"/>
+                <a:solidFill>
+                  <a:schemeClr val="bg1"/>
+                </a:solidFill>
+                <a:effectLst>
+                  <a:outerShdw blurRad="38100" dist="19050" dir="2700000" algn="tl" rotWithShape="0">
+                    <a:schemeClr val="dk1">
+                      <a:alpha val="40000"/>
+                    </a:schemeClr>
+                  </a:outerShdw>
+                </a:effectLst>
+              </a:rPr>
+              <a:t>实例化</a:t>
+            </a:r>
+          </a:p>
+        </p:txBody>
+      </p:sp>
+      <p:grpSp>
+        <p:nvGrpSpPr>
+          <p:cNvPr id="72" name="组合 71">
+            <a:extLst>
+              <a:ext uri="{FF2B5EF4-FFF2-40B4-BE49-F238E27FC236}">
+                <a16:creationId xmlns:a16="http://schemas.microsoft.com/office/drawing/2014/main" id="{CA652DAB-D9B1-3FA5-A231-AB71B2EA5A47}"/>
+              </a:ext>
+            </a:extLst>
+          </p:cNvPr>
+          <p:cNvGrpSpPr/>
+          <p:nvPr/>
+        </p:nvGrpSpPr>
+        <p:grpSpPr>
+          <a:xfrm>
+            <a:off x="461114" y="1989000"/>
+            <a:ext cx="2880000" cy="2880000"/>
+            <a:chOff x="461114" y="1989000"/>
+            <a:chExt cx="2880000" cy="2880000"/>
+          </a:xfrm>
+        </p:grpSpPr>
+        <p:grpSp>
+          <p:nvGrpSpPr>
+            <p:cNvPr id="4" name="组合 3">
+              <a:extLst>
+                <a:ext uri="{FF2B5EF4-FFF2-40B4-BE49-F238E27FC236}">
+                  <a16:creationId xmlns:a16="http://schemas.microsoft.com/office/drawing/2014/main" id="{2C9563FC-880D-4B1E-03F2-7DDA43D11F90}"/>
+                </a:ext>
+              </a:extLst>
+            </p:cNvPr>
+            <p:cNvGrpSpPr/>
+            <p:nvPr/>
+          </p:nvGrpSpPr>
+          <p:grpSpPr>
+            <a:xfrm>
+              <a:off x="461114" y="1989000"/>
+              <a:ext cx="2880000" cy="2880000"/>
+              <a:chOff x="4478194" y="2021773"/>
+              <a:chExt cx="2880000" cy="2880000"/>
+            </a:xfrm>
+          </p:grpSpPr>
+          <p:sp>
+            <p:nvSpPr>
+              <p:cNvPr id="6" name="椭圆 5">
+                <a:extLst>
+                  <a:ext uri="{FF2B5EF4-FFF2-40B4-BE49-F238E27FC236}">
+                    <a16:creationId xmlns:a16="http://schemas.microsoft.com/office/drawing/2014/main" id="{12489DB6-5E1C-920D-1F70-0BAD979FD612}"/>
+                  </a:ext>
+                </a:extLst>
+              </p:cNvPr>
+              <p:cNvSpPr/>
+              <p:nvPr/>
+            </p:nvSpPr>
+            <p:spPr>
+              <a:xfrm>
+                <a:off x="4478194" y="2021773"/>
+                <a:ext cx="2880000" cy="2880000"/>
+              </a:xfrm>
+              <a:prstGeom prst="ellipse">
+                <a:avLst/>
+              </a:prstGeom>
+              <a:noFill/>
+              <a:ln w="76200">
+                <a:solidFill>
+                  <a:schemeClr val="tx1"/>
+                </a:solidFill>
+              </a:ln>
+            </p:spPr>
+            <p:style>
+              <a:lnRef idx="2">
+                <a:schemeClr val="accent1">
+                  <a:shade val="15000"/>
+                </a:schemeClr>
+              </a:lnRef>
+              <a:fillRef idx="1">
+                <a:schemeClr val="accent1"/>
+              </a:fillRef>
+              <a:effectRef idx="0">
+                <a:schemeClr val="accent1"/>
+              </a:effectRef>
+              <a:fontRef idx="minor">
+                <a:schemeClr val="lt1"/>
+              </a:fontRef>
+            </p:style>
+            <p:txBody>
+              <a:bodyPr rtlCol="0" anchor="ctr"/>
+              <a:lstStyle/>
+              <a:p>
+                <a:pPr algn="ctr"/>
+                <a:endParaRPr lang="zh-CN" altLang="en-US"/>
+              </a:p>
+            </p:txBody>
+          </p:sp>
+          <p:pic>
+            <p:nvPicPr>
+              <p:cNvPr id="14" name="图片 13">
+                <a:extLst>
+                  <a:ext uri="{FF2B5EF4-FFF2-40B4-BE49-F238E27FC236}">
+                    <a16:creationId xmlns:a16="http://schemas.microsoft.com/office/drawing/2014/main" id="{FD257C26-C0D2-F58A-4F77-339F35C54D84}"/>
+                  </a:ext>
+                </a:extLst>
+              </p:cNvPr>
+              <p:cNvPicPr>
+                <a:picLocks noChangeAspect="1"/>
+              </p:cNvPicPr>
+              <p:nvPr/>
+            </p:nvPicPr>
+            <p:blipFill>
+              <a:blip r:embed="rId2"/>
+              <a:stretch>
+                <a:fillRect/>
+              </a:stretch>
+            </p:blipFill>
+            <p:spPr>
+              <a:xfrm>
+                <a:off x="5155587" y="2295325"/>
+                <a:ext cx="1350993" cy="1414719"/>
+              </a:xfrm>
+              <a:prstGeom prst="rect">
+                <a:avLst/>
+              </a:prstGeom>
+            </p:spPr>
+          </p:pic>
+          <p:sp>
+            <p:nvSpPr>
+              <p:cNvPr id="24" name="矩形 23">
+                <a:extLst>
+                  <a:ext uri="{FF2B5EF4-FFF2-40B4-BE49-F238E27FC236}">
+                    <a16:creationId xmlns:a16="http://schemas.microsoft.com/office/drawing/2014/main" id="{E72FF8D6-48E2-1010-9560-17C729CC9F31}"/>
+                  </a:ext>
+                </a:extLst>
+              </p:cNvPr>
+              <p:cNvSpPr/>
+              <p:nvPr/>
+            </p:nvSpPr>
+            <p:spPr>
+              <a:xfrm>
+                <a:off x="4603117" y="3131438"/>
+                <a:ext cx="1313180" cy="769441"/>
+              </a:xfrm>
+              <a:prstGeom prst="rect">
+                <a:avLst/>
+              </a:prstGeom>
+              <a:noFill/>
+            </p:spPr>
+            <p:txBody>
+              <a:bodyPr wrap="none" lIns="91440" tIns="45720" rIns="91440" bIns="45720">
+                <a:spAutoFit/>
+              </a:bodyPr>
+              <a:lstStyle/>
+              <a:p>
+                <a:pPr algn="ctr"/>
+                <a:r>
+                  <a:rPr lang="zh-CN" altLang="en-US" sz="4400" b="1" dirty="0">
+                    <a:ln w="0"/>
+                    <a:effectLst>
+                      <a:outerShdw blurRad="38100" dist="19050" dir="2700000" algn="tl" rotWithShape="0">
+                        <a:schemeClr val="dk1">
+                          <a:alpha val="40000"/>
+                        </a:schemeClr>
+                      </a:outerShdw>
+                    </a:effectLst>
+                  </a:rPr>
+                  <a:t>鸟类</a:t>
+                </a:r>
+                <a:endParaRPr lang="zh-CN" altLang="en-US" sz="4400" b="1" cap="none" spc="0" dirty="0">
+                  <a:ln w="0"/>
+                  <a:solidFill>
+                    <a:schemeClr val="tx1"/>
+                  </a:solidFill>
+                  <a:effectLst>
+                    <a:outerShdw blurRad="38100" dist="19050" dir="2700000" algn="tl" rotWithShape="0">
+                      <a:schemeClr val="dk1">
+                        <a:alpha val="40000"/>
+                      </a:schemeClr>
+                    </a:outerShdw>
+                  </a:effectLst>
+                </a:endParaRPr>
+              </a:p>
+            </p:txBody>
+          </p:sp>
+        </p:grpSp>
+        <p:sp>
+          <p:nvSpPr>
+            <p:cNvPr id="70" name="文本框 69">
+              <a:extLst>
+                <a:ext uri="{FF2B5EF4-FFF2-40B4-BE49-F238E27FC236}">
+                  <a16:creationId xmlns:a16="http://schemas.microsoft.com/office/drawing/2014/main" id="{CA6C2487-9950-7B24-AB75-72DFA4B55227}"/>
+                </a:ext>
+              </a:extLst>
+            </p:cNvPr>
+            <p:cNvSpPr txBox="1"/>
+            <p:nvPr/>
+          </p:nvSpPr>
+          <p:spPr>
+            <a:xfrm>
+              <a:off x="800626" y="3977663"/>
+              <a:ext cx="2114681" cy="400110"/>
+            </a:xfrm>
+            <a:prstGeom prst="rect">
+              <a:avLst/>
+            </a:prstGeom>
+            <a:noFill/>
+          </p:spPr>
+          <p:txBody>
+            <a:bodyPr wrap="none" rtlCol="0">
+              <a:spAutoFit/>
+            </a:bodyPr>
+            <a:lstStyle/>
+            <a:p>
+              <a:r>
+                <a:rPr lang="en-US" altLang="zh-CN" sz="2000" b="1" dirty="0">
+                  <a:latin typeface="微软雅黑" panose="020B0503020204020204" pitchFamily="34" charset="-122"/>
+                  <a:ea typeface="微软雅黑" panose="020B0503020204020204" pitchFamily="34" charset="-122"/>
+                </a:rPr>
+                <a:t>def </a:t>
+              </a:r>
+              <a:r>
+                <a:rPr lang="zh-CN" altLang="en-US" sz="2000" b="1" dirty="0">
+                  <a:latin typeface="微软雅黑" panose="020B0503020204020204" pitchFamily="34" charset="-122"/>
+                  <a:ea typeface="微软雅黑" panose="020B0503020204020204" pitchFamily="34" charset="-122"/>
+                </a:rPr>
+                <a:t>吃</a:t>
+              </a:r>
+              <a:r>
+                <a:rPr lang="en-US" altLang="zh-CN" sz="2000" b="1" dirty="0">
+                  <a:latin typeface="微软雅黑" panose="020B0503020204020204" pitchFamily="34" charset="-122"/>
+                  <a:ea typeface="微软雅黑" panose="020B0503020204020204" pitchFamily="34" charset="-122"/>
+                </a:rPr>
+                <a:t>()</a:t>
+              </a:r>
+              <a:r>
+                <a:rPr lang="zh-CN" altLang="en-US" sz="2000" b="1" dirty="0">
+                  <a:latin typeface="微软雅黑" panose="020B0503020204020204" pitchFamily="34" charset="-122"/>
+                  <a:ea typeface="微软雅黑" panose="020B0503020204020204" pitchFamily="34" charset="-122"/>
+                </a:rPr>
+                <a:t> </a:t>
+              </a:r>
+              <a:r>
+                <a:rPr lang="en-US" altLang="zh-CN" sz="2000" b="1" dirty="0">
+                  <a:latin typeface="微软雅黑" panose="020B0503020204020204" pitchFamily="34" charset="-122"/>
+                  <a:ea typeface="微软雅黑" panose="020B0503020204020204" pitchFamily="34" charset="-122"/>
+                </a:rPr>
+                <a:t>-&gt; </a:t>
+              </a:r>
+              <a:r>
+                <a:rPr lang="zh-CN" altLang="en-US" sz="2000" b="1" dirty="0">
+                  <a:latin typeface="微软雅黑" panose="020B0503020204020204" pitchFamily="34" charset="-122"/>
+                  <a:ea typeface="微软雅黑" panose="020B0503020204020204" pitchFamily="34" charset="-122"/>
+                </a:rPr>
+                <a:t>虫子</a:t>
+              </a:r>
+            </a:p>
+          </p:txBody>
+        </p:sp>
+      </p:grpSp>
+      <p:grpSp>
+        <p:nvGrpSpPr>
+          <p:cNvPr id="75" name="组合 74">
+            <a:extLst>
+              <a:ext uri="{FF2B5EF4-FFF2-40B4-BE49-F238E27FC236}">
+                <a16:creationId xmlns:a16="http://schemas.microsoft.com/office/drawing/2014/main" id="{FA92CC1D-2A29-A1D5-D007-8656A104032A}"/>
+              </a:ext>
+            </a:extLst>
+          </p:cNvPr>
+          <p:cNvGrpSpPr/>
+          <p:nvPr/>
+        </p:nvGrpSpPr>
+        <p:grpSpPr>
+          <a:xfrm>
+            <a:off x="5572539" y="1244961"/>
+            <a:ext cx="2087217" cy="1012303"/>
+            <a:chOff x="5572539" y="1588890"/>
+            <a:chExt cx="2087217" cy="1012303"/>
+          </a:xfrm>
+        </p:grpSpPr>
+        <p:sp>
+          <p:nvSpPr>
+            <p:cNvPr id="43" name="矩形 42">
+              <a:extLst>
+                <a:ext uri="{FF2B5EF4-FFF2-40B4-BE49-F238E27FC236}">
+                  <a16:creationId xmlns:a16="http://schemas.microsoft.com/office/drawing/2014/main" id="{9F5A73E3-E31C-A313-23C6-27E0FC2B0708}"/>
+                </a:ext>
+              </a:extLst>
+            </p:cNvPr>
+            <p:cNvSpPr/>
+            <p:nvPr/>
+          </p:nvSpPr>
+          <p:spPr>
+            <a:xfrm>
+              <a:off x="6115665" y="1622599"/>
+              <a:ext cx="1005403" cy="584775"/>
+            </a:xfrm>
+            <a:prstGeom prst="rect">
+              <a:avLst/>
+            </a:prstGeom>
+            <a:noFill/>
+          </p:spPr>
+          <p:txBody>
+            <a:bodyPr wrap="none" lIns="91440" tIns="45720" rIns="91440" bIns="45720">
+              <a:spAutoFit/>
+            </a:bodyPr>
+            <a:lstStyle/>
+            <a:p>
+              <a:pPr algn="ctr"/>
+              <a:r>
+                <a:rPr lang="zh-CN" altLang="en-US" sz="3200" b="1" dirty="0">
+                  <a:ln w="0"/>
+                  <a:effectLst>
+                    <a:outerShdw blurRad="38100" dist="19050" dir="2700000" algn="tl" rotWithShape="0">
+                      <a:schemeClr val="dk1">
+                        <a:alpha val="40000"/>
+                      </a:schemeClr>
+                    </a:outerShdw>
+                  </a:effectLst>
+                </a:rPr>
+                <a:t>鹦鹉</a:t>
+              </a:r>
+              <a:endParaRPr lang="zh-CN" altLang="en-US" sz="3200" b="1" cap="none" spc="0" dirty="0">
                 <a:ln w="0"/>
                 <a:solidFill>
                   <a:schemeClr val="tx1"/>
@@ -12327,16 +16581,1169 @@
                     </a:schemeClr>
                   </a:outerShdw>
                 </a:effectLst>
-              </a:rPr>
-              <a:t>思维上的再抽象</a:t>
-            </a:r>
-          </a:p>
-        </p:txBody>
-      </p:sp>
+              </a:endParaRPr>
+            </a:p>
+          </p:txBody>
+        </p:sp>
+        <p:sp>
+          <p:nvSpPr>
+            <p:cNvPr id="71" name="文本框 70">
+              <a:extLst>
+                <a:ext uri="{FF2B5EF4-FFF2-40B4-BE49-F238E27FC236}">
+                  <a16:creationId xmlns:a16="http://schemas.microsoft.com/office/drawing/2014/main" id="{17D594AD-7CC5-C663-5899-8A1984618BD4}"/>
+                </a:ext>
+              </a:extLst>
+            </p:cNvPr>
+            <p:cNvSpPr txBox="1"/>
+            <p:nvPr/>
+          </p:nvSpPr>
+          <p:spPr>
+            <a:xfrm>
+              <a:off x="5654986" y="2184691"/>
+              <a:ext cx="1922321" cy="369332"/>
+            </a:xfrm>
+            <a:prstGeom prst="rect">
+              <a:avLst/>
+            </a:prstGeom>
+            <a:noFill/>
+          </p:spPr>
+          <p:txBody>
+            <a:bodyPr wrap="none" rtlCol="0">
+              <a:spAutoFit/>
+            </a:bodyPr>
+            <a:lstStyle/>
+            <a:p>
+              <a:r>
+                <a:rPr lang="en-US" altLang="zh-CN" b="1" dirty="0">
+                  <a:latin typeface="微软雅黑" panose="020B0503020204020204" pitchFamily="34" charset="-122"/>
+                  <a:ea typeface="微软雅黑" panose="020B0503020204020204" pitchFamily="34" charset="-122"/>
+                </a:rPr>
+                <a:t>def </a:t>
+              </a:r>
+              <a:r>
+                <a:rPr lang="zh-CN" altLang="en-US" b="1" dirty="0">
+                  <a:latin typeface="微软雅黑" panose="020B0503020204020204" pitchFamily="34" charset="-122"/>
+                  <a:ea typeface="微软雅黑" panose="020B0503020204020204" pitchFamily="34" charset="-122"/>
+                </a:rPr>
+                <a:t>吃</a:t>
+              </a:r>
+              <a:r>
+                <a:rPr lang="en-US" altLang="zh-CN" b="1" dirty="0">
+                  <a:latin typeface="微软雅黑" panose="020B0503020204020204" pitchFamily="34" charset="-122"/>
+                  <a:ea typeface="微软雅黑" panose="020B0503020204020204" pitchFamily="34" charset="-122"/>
+                </a:rPr>
+                <a:t>()</a:t>
+              </a:r>
+              <a:r>
+                <a:rPr lang="zh-CN" altLang="en-US" b="1" dirty="0">
+                  <a:latin typeface="微软雅黑" panose="020B0503020204020204" pitchFamily="34" charset="-122"/>
+                  <a:ea typeface="微软雅黑" panose="020B0503020204020204" pitchFamily="34" charset="-122"/>
+                </a:rPr>
+                <a:t> </a:t>
+              </a:r>
+              <a:r>
+                <a:rPr lang="en-US" altLang="zh-CN" b="1" dirty="0">
+                  <a:latin typeface="微软雅黑" panose="020B0503020204020204" pitchFamily="34" charset="-122"/>
+                  <a:ea typeface="微软雅黑" panose="020B0503020204020204" pitchFamily="34" charset="-122"/>
+                </a:rPr>
+                <a:t>-&gt; </a:t>
+              </a:r>
+              <a:r>
+                <a:rPr lang="zh-CN" altLang="en-US" b="1" dirty="0">
+                  <a:latin typeface="微软雅黑" panose="020B0503020204020204" pitchFamily="34" charset="-122"/>
+                  <a:ea typeface="微软雅黑" panose="020B0503020204020204" pitchFamily="34" charset="-122"/>
+                </a:rPr>
+                <a:t>鸟粮</a:t>
+              </a:r>
+            </a:p>
+          </p:txBody>
+        </p:sp>
+        <p:sp>
+          <p:nvSpPr>
+            <p:cNvPr id="73" name="矩形: 圆角 72">
+              <a:extLst>
+                <a:ext uri="{FF2B5EF4-FFF2-40B4-BE49-F238E27FC236}">
+                  <a16:creationId xmlns:a16="http://schemas.microsoft.com/office/drawing/2014/main" id="{D726CB1A-09C1-A443-7E28-F28C7061E683}"/>
+                </a:ext>
+              </a:extLst>
+            </p:cNvPr>
+            <p:cNvSpPr/>
+            <p:nvPr/>
+          </p:nvSpPr>
+          <p:spPr>
+            <a:xfrm>
+              <a:off x="5572539" y="1588890"/>
+              <a:ext cx="2087217" cy="1012303"/>
+            </a:xfrm>
+            <a:prstGeom prst="roundRect">
+              <a:avLst/>
+            </a:prstGeom>
+            <a:noFill/>
+            <a:ln w="57150"/>
+          </p:spPr>
+          <p:style>
+            <a:lnRef idx="2">
+              <a:schemeClr val="accent1">
+                <a:shade val="15000"/>
+              </a:schemeClr>
+            </a:lnRef>
+            <a:fillRef idx="1">
+              <a:schemeClr val="accent1"/>
+            </a:fillRef>
+            <a:effectRef idx="0">
+              <a:schemeClr val="accent1"/>
+            </a:effectRef>
+            <a:fontRef idx="minor">
+              <a:schemeClr val="lt1"/>
+            </a:fontRef>
+          </p:style>
+          <p:txBody>
+            <a:bodyPr rtlCol="0" anchor="ctr"/>
+            <a:lstStyle/>
+            <a:p>
+              <a:pPr algn="ctr"/>
+              <a:endParaRPr lang="zh-CN" altLang="en-US"/>
+            </a:p>
+          </p:txBody>
+        </p:sp>
+      </p:grpSp>
+      <p:grpSp>
+        <p:nvGrpSpPr>
+          <p:cNvPr id="76" name="组合 75">
+            <a:extLst>
+              <a:ext uri="{FF2B5EF4-FFF2-40B4-BE49-F238E27FC236}">
+                <a16:creationId xmlns:a16="http://schemas.microsoft.com/office/drawing/2014/main" id="{4BD08700-6C17-F711-1FF5-29C5F3637E05}"/>
+              </a:ext>
+            </a:extLst>
+          </p:cNvPr>
+          <p:cNvGrpSpPr/>
+          <p:nvPr/>
+        </p:nvGrpSpPr>
+        <p:grpSpPr>
+          <a:xfrm>
+            <a:off x="5541834" y="2932801"/>
+            <a:ext cx="2087217" cy="1012303"/>
+            <a:chOff x="5572539" y="1588890"/>
+            <a:chExt cx="2087217" cy="1012303"/>
+          </a:xfrm>
+        </p:grpSpPr>
+        <p:sp>
+          <p:nvSpPr>
+            <p:cNvPr id="77" name="矩形 76">
+              <a:extLst>
+                <a:ext uri="{FF2B5EF4-FFF2-40B4-BE49-F238E27FC236}">
+                  <a16:creationId xmlns:a16="http://schemas.microsoft.com/office/drawing/2014/main" id="{D8240DFE-D97B-FF77-60E9-66ACA0844908}"/>
+                </a:ext>
+              </a:extLst>
+            </p:cNvPr>
+            <p:cNvSpPr/>
+            <p:nvPr/>
+          </p:nvSpPr>
+          <p:spPr>
+            <a:xfrm>
+              <a:off x="6115665" y="1622599"/>
+              <a:ext cx="1005403" cy="584775"/>
+            </a:xfrm>
+            <a:prstGeom prst="rect">
+              <a:avLst/>
+            </a:prstGeom>
+            <a:noFill/>
+          </p:spPr>
+          <p:txBody>
+            <a:bodyPr wrap="none" lIns="91440" tIns="45720" rIns="91440" bIns="45720">
+              <a:spAutoFit/>
+            </a:bodyPr>
+            <a:lstStyle/>
+            <a:p>
+              <a:pPr algn="ctr"/>
+              <a:r>
+                <a:rPr lang="zh-CN" altLang="en-US" sz="3200" b="1" dirty="0">
+                  <a:ln w="0"/>
+                  <a:effectLst>
+                    <a:outerShdw blurRad="38100" dist="19050" dir="2700000" algn="tl" rotWithShape="0">
+                      <a:schemeClr val="dk1">
+                        <a:alpha val="40000"/>
+                      </a:schemeClr>
+                    </a:outerShdw>
+                  </a:effectLst>
+                </a:rPr>
+                <a:t>企鹅</a:t>
+              </a:r>
+              <a:endParaRPr lang="zh-CN" altLang="en-US" sz="3200" b="1" cap="none" spc="0" dirty="0">
+                <a:ln w="0"/>
+                <a:solidFill>
+                  <a:schemeClr val="tx1"/>
+                </a:solidFill>
+                <a:effectLst>
+                  <a:outerShdw blurRad="38100" dist="19050" dir="2700000" algn="tl" rotWithShape="0">
+                    <a:schemeClr val="dk1">
+                      <a:alpha val="40000"/>
+                    </a:schemeClr>
+                  </a:outerShdw>
+                </a:effectLst>
+              </a:endParaRPr>
+            </a:p>
+          </p:txBody>
+        </p:sp>
+        <p:sp>
+          <p:nvSpPr>
+            <p:cNvPr id="78" name="文本框 77">
+              <a:extLst>
+                <a:ext uri="{FF2B5EF4-FFF2-40B4-BE49-F238E27FC236}">
+                  <a16:creationId xmlns:a16="http://schemas.microsoft.com/office/drawing/2014/main" id="{20673D5E-8E69-A79A-97ED-D0482C6B5D40}"/>
+                </a:ext>
+              </a:extLst>
+            </p:cNvPr>
+            <p:cNvSpPr txBox="1"/>
+            <p:nvPr/>
+          </p:nvSpPr>
+          <p:spPr>
+            <a:xfrm>
+              <a:off x="5701368" y="2184691"/>
+              <a:ext cx="1691489" cy="369332"/>
+            </a:xfrm>
+            <a:prstGeom prst="rect">
+              <a:avLst/>
+            </a:prstGeom>
+            <a:noFill/>
+          </p:spPr>
+          <p:txBody>
+            <a:bodyPr wrap="none" rtlCol="0">
+              <a:spAutoFit/>
+            </a:bodyPr>
+            <a:lstStyle/>
+            <a:p>
+              <a:r>
+                <a:rPr lang="en-US" altLang="zh-CN" b="1" dirty="0">
+                  <a:latin typeface="微软雅黑" panose="020B0503020204020204" pitchFamily="34" charset="-122"/>
+                  <a:ea typeface="微软雅黑" panose="020B0503020204020204" pitchFamily="34" charset="-122"/>
+                </a:rPr>
+                <a:t>def </a:t>
+              </a:r>
+              <a:r>
+                <a:rPr lang="zh-CN" altLang="en-US" b="1" dirty="0">
+                  <a:latin typeface="微软雅黑" panose="020B0503020204020204" pitchFamily="34" charset="-122"/>
+                  <a:ea typeface="微软雅黑" panose="020B0503020204020204" pitchFamily="34" charset="-122"/>
+                </a:rPr>
+                <a:t>吃</a:t>
+              </a:r>
+              <a:r>
+                <a:rPr lang="en-US" altLang="zh-CN" b="1" dirty="0">
+                  <a:latin typeface="微软雅黑" panose="020B0503020204020204" pitchFamily="34" charset="-122"/>
+                  <a:ea typeface="微软雅黑" panose="020B0503020204020204" pitchFamily="34" charset="-122"/>
+                </a:rPr>
+                <a:t>()</a:t>
+              </a:r>
+              <a:r>
+                <a:rPr lang="zh-CN" altLang="en-US" b="1" dirty="0">
+                  <a:latin typeface="微软雅黑" panose="020B0503020204020204" pitchFamily="34" charset="-122"/>
+                  <a:ea typeface="微软雅黑" panose="020B0503020204020204" pitchFamily="34" charset="-122"/>
+                </a:rPr>
+                <a:t> </a:t>
+              </a:r>
+              <a:r>
+                <a:rPr lang="en-US" altLang="zh-CN" b="1" dirty="0">
+                  <a:latin typeface="微软雅黑" panose="020B0503020204020204" pitchFamily="34" charset="-122"/>
+                  <a:ea typeface="微软雅黑" panose="020B0503020204020204" pitchFamily="34" charset="-122"/>
+                </a:rPr>
+                <a:t>-&gt; </a:t>
+              </a:r>
+              <a:r>
+                <a:rPr lang="zh-CN" altLang="en-US" b="1" dirty="0">
+                  <a:latin typeface="微软雅黑" panose="020B0503020204020204" pitchFamily="34" charset="-122"/>
+                  <a:ea typeface="微软雅黑" panose="020B0503020204020204" pitchFamily="34" charset="-122"/>
+                </a:rPr>
+                <a:t>鱼</a:t>
+              </a:r>
+            </a:p>
+          </p:txBody>
+        </p:sp>
+        <p:sp>
+          <p:nvSpPr>
+            <p:cNvPr id="79" name="矩形: 圆角 78">
+              <a:extLst>
+                <a:ext uri="{FF2B5EF4-FFF2-40B4-BE49-F238E27FC236}">
+                  <a16:creationId xmlns:a16="http://schemas.microsoft.com/office/drawing/2014/main" id="{7DC4203B-92C3-21BD-1D88-3716924D8090}"/>
+                </a:ext>
+              </a:extLst>
+            </p:cNvPr>
+            <p:cNvSpPr/>
+            <p:nvPr/>
+          </p:nvSpPr>
+          <p:spPr>
+            <a:xfrm>
+              <a:off x="5572539" y="1588890"/>
+              <a:ext cx="2087217" cy="1012303"/>
+            </a:xfrm>
+            <a:prstGeom prst="roundRect">
+              <a:avLst/>
+            </a:prstGeom>
+            <a:noFill/>
+            <a:ln w="57150"/>
+          </p:spPr>
+          <p:style>
+            <a:lnRef idx="2">
+              <a:schemeClr val="accent1">
+                <a:shade val="15000"/>
+              </a:schemeClr>
+            </a:lnRef>
+            <a:fillRef idx="1">
+              <a:schemeClr val="accent1"/>
+            </a:fillRef>
+            <a:effectRef idx="0">
+              <a:schemeClr val="accent1"/>
+            </a:effectRef>
+            <a:fontRef idx="minor">
+              <a:schemeClr val="lt1"/>
+            </a:fontRef>
+          </p:style>
+          <p:txBody>
+            <a:bodyPr rtlCol="0" anchor="ctr"/>
+            <a:lstStyle/>
+            <a:p>
+              <a:pPr algn="ctr"/>
+              <a:endParaRPr lang="zh-CN" altLang="en-US"/>
+            </a:p>
+          </p:txBody>
+        </p:sp>
+      </p:grpSp>
+      <p:grpSp>
+        <p:nvGrpSpPr>
+          <p:cNvPr id="82" name="组合 81">
+            <a:extLst>
+              <a:ext uri="{FF2B5EF4-FFF2-40B4-BE49-F238E27FC236}">
+                <a16:creationId xmlns:a16="http://schemas.microsoft.com/office/drawing/2014/main" id="{B043B791-5B72-3157-6F37-BEF4953B4C6F}"/>
+              </a:ext>
+            </a:extLst>
+          </p:cNvPr>
+          <p:cNvGrpSpPr/>
+          <p:nvPr/>
+        </p:nvGrpSpPr>
+        <p:grpSpPr>
+          <a:xfrm>
+            <a:off x="5541834" y="4509412"/>
+            <a:ext cx="2087217" cy="1012303"/>
+            <a:chOff x="5572539" y="1588890"/>
+            <a:chExt cx="2087217" cy="1012303"/>
+          </a:xfrm>
+        </p:grpSpPr>
+        <p:sp>
+          <p:nvSpPr>
+            <p:cNvPr id="83" name="矩形 82">
+              <a:extLst>
+                <a:ext uri="{FF2B5EF4-FFF2-40B4-BE49-F238E27FC236}">
+                  <a16:creationId xmlns:a16="http://schemas.microsoft.com/office/drawing/2014/main" id="{091703EE-730F-2914-434E-37C82A1C610B}"/>
+                </a:ext>
+              </a:extLst>
+            </p:cNvPr>
+            <p:cNvSpPr/>
+            <p:nvPr/>
+          </p:nvSpPr>
+          <p:spPr>
+            <a:xfrm>
+              <a:off x="6115665" y="1622599"/>
+              <a:ext cx="1005403" cy="584775"/>
+            </a:xfrm>
+            <a:prstGeom prst="rect">
+              <a:avLst/>
+            </a:prstGeom>
+            <a:noFill/>
+          </p:spPr>
+          <p:txBody>
+            <a:bodyPr wrap="none" lIns="91440" tIns="45720" rIns="91440" bIns="45720">
+              <a:spAutoFit/>
+            </a:bodyPr>
+            <a:lstStyle/>
+            <a:p>
+              <a:pPr algn="ctr"/>
+              <a:r>
+                <a:rPr lang="zh-CN" altLang="en-US" sz="3200" b="1" dirty="0">
+                  <a:ln w="0"/>
+                  <a:effectLst>
+                    <a:outerShdw blurRad="38100" dist="19050" dir="2700000" algn="tl" rotWithShape="0">
+                      <a:schemeClr val="dk1">
+                        <a:alpha val="40000"/>
+                      </a:schemeClr>
+                    </a:outerShdw>
+                  </a:effectLst>
+                </a:rPr>
+                <a:t>老鹰</a:t>
+              </a:r>
+              <a:endParaRPr lang="zh-CN" altLang="en-US" sz="3200" b="1" cap="none" spc="0" dirty="0">
+                <a:ln w="0"/>
+                <a:solidFill>
+                  <a:schemeClr val="tx1"/>
+                </a:solidFill>
+                <a:effectLst>
+                  <a:outerShdw blurRad="38100" dist="19050" dir="2700000" algn="tl" rotWithShape="0">
+                    <a:schemeClr val="dk1">
+                      <a:alpha val="40000"/>
+                    </a:schemeClr>
+                  </a:outerShdw>
+                </a:effectLst>
+              </a:endParaRPr>
+            </a:p>
+          </p:txBody>
+        </p:sp>
+        <p:sp>
+          <p:nvSpPr>
+            <p:cNvPr id="84" name="文本框 83">
+              <a:extLst>
+                <a:ext uri="{FF2B5EF4-FFF2-40B4-BE49-F238E27FC236}">
+                  <a16:creationId xmlns:a16="http://schemas.microsoft.com/office/drawing/2014/main" id="{8B3928DE-ACC2-6D3B-F996-1C2FB7C7DB28}"/>
+                </a:ext>
+              </a:extLst>
+            </p:cNvPr>
+            <p:cNvSpPr txBox="1"/>
+            <p:nvPr/>
+          </p:nvSpPr>
+          <p:spPr>
+            <a:xfrm>
+              <a:off x="5654986" y="2184691"/>
+              <a:ext cx="1922321" cy="369332"/>
+            </a:xfrm>
+            <a:prstGeom prst="rect">
+              <a:avLst/>
+            </a:prstGeom>
+            <a:noFill/>
+          </p:spPr>
+          <p:txBody>
+            <a:bodyPr wrap="none" rtlCol="0">
+              <a:spAutoFit/>
+            </a:bodyPr>
+            <a:lstStyle/>
+            <a:p>
+              <a:r>
+                <a:rPr lang="en-US" altLang="zh-CN" b="1" dirty="0">
+                  <a:latin typeface="微软雅黑" panose="020B0503020204020204" pitchFamily="34" charset="-122"/>
+                  <a:ea typeface="微软雅黑" panose="020B0503020204020204" pitchFamily="34" charset="-122"/>
+                </a:rPr>
+                <a:t>def </a:t>
+              </a:r>
+              <a:r>
+                <a:rPr lang="zh-CN" altLang="en-US" b="1" dirty="0">
+                  <a:latin typeface="微软雅黑" panose="020B0503020204020204" pitchFamily="34" charset="-122"/>
+                  <a:ea typeface="微软雅黑" panose="020B0503020204020204" pitchFamily="34" charset="-122"/>
+                </a:rPr>
+                <a:t>吃</a:t>
+              </a:r>
+              <a:r>
+                <a:rPr lang="en-US" altLang="zh-CN" b="1" dirty="0">
+                  <a:latin typeface="微软雅黑" panose="020B0503020204020204" pitchFamily="34" charset="-122"/>
+                  <a:ea typeface="微软雅黑" panose="020B0503020204020204" pitchFamily="34" charset="-122"/>
+                </a:rPr>
+                <a:t>()</a:t>
+              </a:r>
+              <a:r>
+                <a:rPr lang="zh-CN" altLang="en-US" b="1" dirty="0">
+                  <a:latin typeface="微软雅黑" panose="020B0503020204020204" pitchFamily="34" charset="-122"/>
+                  <a:ea typeface="微软雅黑" panose="020B0503020204020204" pitchFamily="34" charset="-122"/>
+                </a:rPr>
+                <a:t> </a:t>
+              </a:r>
+              <a:r>
+                <a:rPr lang="en-US" altLang="zh-CN" b="1" dirty="0">
+                  <a:latin typeface="微软雅黑" panose="020B0503020204020204" pitchFamily="34" charset="-122"/>
+                  <a:ea typeface="微软雅黑" panose="020B0503020204020204" pitchFamily="34" charset="-122"/>
+                </a:rPr>
+                <a:t>-&gt; </a:t>
+              </a:r>
+              <a:r>
+                <a:rPr lang="zh-CN" altLang="en-US" b="1" dirty="0">
+                  <a:latin typeface="微软雅黑" panose="020B0503020204020204" pitchFamily="34" charset="-122"/>
+                  <a:ea typeface="微软雅黑" panose="020B0503020204020204" pitchFamily="34" charset="-122"/>
+                </a:rPr>
+                <a:t>兔子</a:t>
+              </a:r>
+            </a:p>
+          </p:txBody>
+        </p:sp>
+        <p:sp>
+          <p:nvSpPr>
+            <p:cNvPr id="85" name="矩形: 圆角 84">
+              <a:extLst>
+                <a:ext uri="{FF2B5EF4-FFF2-40B4-BE49-F238E27FC236}">
+                  <a16:creationId xmlns:a16="http://schemas.microsoft.com/office/drawing/2014/main" id="{F8E7D56C-AF3C-8A6A-082E-B621FE280513}"/>
+                </a:ext>
+              </a:extLst>
+            </p:cNvPr>
+            <p:cNvSpPr/>
+            <p:nvPr/>
+          </p:nvSpPr>
+          <p:spPr>
+            <a:xfrm>
+              <a:off x="5572539" y="1588890"/>
+              <a:ext cx="2087217" cy="1012303"/>
+            </a:xfrm>
+            <a:prstGeom prst="roundRect">
+              <a:avLst/>
+            </a:prstGeom>
+            <a:noFill/>
+            <a:ln w="57150"/>
+          </p:spPr>
+          <p:style>
+            <a:lnRef idx="2">
+              <a:schemeClr val="accent1">
+                <a:shade val="15000"/>
+              </a:schemeClr>
+            </a:lnRef>
+            <a:fillRef idx="1">
+              <a:schemeClr val="accent1"/>
+            </a:fillRef>
+            <a:effectRef idx="0">
+              <a:schemeClr val="accent1"/>
+            </a:effectRef>
+            <a:fontRef idx="minor">
+              <a:schemeClr val="lt1"/>
+            </a:fontRef>
+          </p:style>
+          <p:txBody>
+            <a:bodyPr rtlCol="0" anchor="ctr"/>
+            <a:lstStyle/>
+            <a:p>
+              <a:pPr algn="ctr"/>
+              <a:endParaRPr lang="zh-CN" altLang="en-US"/>
+            </a:p>
+          </p:txBody>
+        </p:sp>
+      </p:grpSp>
+      <p:sp>
+        <p:nvSpPr>
+          <p:cNvPr id="87" name="文本框 86">
+            <a:extLst>
+              <a:ext uri="{FF2B5EF4-FFF2-40B4-BE49-F238E27FC236}">
+                <a16:creationId xmlns:a16="http://schemas.microsoft.com/office/drawing/2014/main" id="{1B50533F-CB42-4C15-C9A3-24630DED6D7A}"/>
+              </a:ext>
+            </a:extLst>
+          </p:cNvPr>
+          <p:cNvSpPr txBox="1"/>
+          <p:nvPr/>
+        </p:nvSpPr>
+        <p:spPr>
+          <a:xfrm>
+            <a:off x="9606443" y="2134823"/>
+            <a:ext cx="2201244" cy="400110"/>
+          </a:xfrm>
+          <a:prstGeom prst="rect">
+            <a:avLst/>
+          </a:prstGeom>
+          <a:noFill/>
+        </p:spPr>
+        <p:txBody>
+          <a:bodyPr wrap="none" rtlCol="0">
+            <a:spAutoFit/>
+          </a:bodyPr>
+          <a:lstStyle/>
+          <a:p>
+            <a:r>
+              <a:rPr lang="zh-CN" altLang="en-US" sz="2000" b="1" dirty="0">
+                <a:latin typeface="微软雅黑" panose="020B0503020204020204" pitchFamily="34" charset="-122"/>
+                <a:ea typeface="微软雅黑" panose="020B0503020204020204" pitchFamily="34" charset="-122"/>
+              </a:rPr>
+              <a:t>小茂</a:t>
+            </a:r>
+            <a:r>
+              <a:rPr lang="en-US" altLang="zh-CN" sz="2000" b="1" dirty="0">
+                <a:latin typeface="微软雅黑" panose="020B0503020204020204" pitchFamily="34" charset="-122"/>
+                <a:ea typeface="微软雅黑" panose="020B0503020204020204" pitchFamily="34" charset="-122"/>
+              </a:rPr>
+              <a:t>.</a:t>
+            </a:r>
+            <a:r>
+              <a:rPr lang="zh-CN" altLang="en-US" sz="2000" b="1" dirty="0">
+                <a:latin typeface="微软雅黑" panose="020B0503020204020204" pitchFamily="34" charset="-122"/>
+                <a:ea typeface="微软雅黑" panose="020B0503020204020204" pitchFamily="34" charset="-122"/>
+              </a:rPr>
+              <a:t>吃</a:t>
+            </a:r>
+            <a:r>
+              <a:rPr lang="en-US" altLang="zh-CN" sz="2000" b="1" dirty="0">
+                <a:latin typeface="微软雅黑" panose="020B0503020204020204" pitchFamily="34" charset="-122"/>
+                <a:ea typeface="微软雅黑" panose="020B0503020204020204" pitchFamily="34" charset="-122"/>
+              </a:rPr>
+              <a:t>()</a:t>
+            </a:r>
+            <a:r>
+              <a:rPr lang="zh-CN" altLang="en-US" sz="2000" b="1" dirty="0">
+                <a:latin typeface="微软雅黑" panose="020B0503020204020204" pitchFamily="34" charset="-122"/>
+                <a:ea typeface="微软雅黑" panose="020B0503020204020204" pitchFamily="34" charset="-122"/>
+              </a:rPr>
+              <a:t> </a:t>
+            </a:r>
+            <a:r>
+              <a:rPr lang="en-US" altLang="zh-CN" sz="2000" b="1" dirty="0">
+                <a:latin typeface="微软雅黑" panose="020B0503020204020204" pitchFamily="34" charset="-122"/>
+                <a:ea typeface="微软雅黑" panose="020B0503020204020204" pitchFamily="34" charset="-122"/>
+              </a:rPr>
+              <a:t>-&gt; </a:t>
+            </a:r>
+            <a:r>
+              <a:rPr lang="zh-CN" altLang="en-US" sz="2000" b="1" dirty="0">
+                <a:latin typeface="微软雅黑" panose="020B0503020204020204" pitchFamily="34" charset="-122"/>
+                <a:ea typeface="微软雅黑" panose="020B0503020204020204" pitchFamily="34" charset="-122"/>
+              </a:rPr>
+              <a:t>虫子</a:t>
+            </a:r>
+          </a:p>
+        </p:txBody>
+      </p:sp>
+      <p:sp>
+        <p:nvSpPr>
+          <p:cNvPr id="88" name="文本框 87">
+            <a:extLst>
+              <a:ext uri="{FF2B5EF4-FFF2-40B4-BE49-F238E27FC236}">
+                <a16:creationId xmlns:a16="http://schemas.microsoft.com/office/drawing/2014/main" id="{EF1A3280-5716-836C-54D7-39F843D409D8}"/>
+              </a:ext>
+            </a:extLst>
+          </p:cNvPr>
+          <p:cNvSpPr txBox="1"/>
+          <p:nvPr/>
+        </p:nvSpPr>
+        <p:spPr>
+          <a:xfrm>
+            <a:off x="9603808" y="3721922"/>
+            <a:ext cx="2201244" cy="400110"/>
+          </a:xfrm>
+          <a:prstGeom prst="rect">
+            <a:avLst/>
+          </a:prstGeom>
+          <a:noFill/>
+        </p:spPr>
+        <p:txBody>
+          <a:bodyPr wrap="none" rtlCol="0">
+            <a:spAutoFit/>
+          </a:bodyPr>
+          <a:lstStyle/>
+          <a:p>
+            <a:r>
+              <a:rPr lang="zh-CN" altLang="en-US" sz="2000" b="1" dirty="0">
+                <a:latin typeface="微软雅黑" panose="020B0503020204020204" pitchFamily="34" charset="-122"/>
+                <a:ea typeface="微软雅黑" panose="020B0503020204020204" pitchFamily="34" charset="-122"/>
+              </a:rPr>
+              <a:t>小明</a:t>
+            </a:r>
+            <a:r>
+              <a:rPr lang="en-US" altLang="zh-CN" sz="2000" b="1" dirty="0">
+                <a:latin typeface="微软雅黑" panose="020B0503020204020204" pitchFamily="34" charset="-122"/>
+                <a:ea typeface="微软雅黑" panose="020B0503020204020204" pitchFamily="34" charset="-122"/>
+              </a:rPr>
+              <a:t>.</a:t>
+            </a:r>
+            <a:r>
+              <a:rPr lang="zh-CN" altLang="en-US" sz="2000" b="1" dirty="0">
+                <a:latin typeface="微软雅黑" panose="020B0503020204020204" pitchFamily="34" charset="-122"/>
+                <a:ea typeface="微软雅黑" panose="020B0503020204020204" pitchFamily="34" charset="-122"/>
+              </a:rPr>
+              <a:t>吃</a:t>
+            </a:r>
+            <a:r>
+              <a:rPr lang="en-US" altLang="zh-CN" sz="2000" b="1" dirty="0">
+                <a:latin typeface="微软雅黑" panose="020B0503020204020204" pitchFamily="34" charset="-122"/>
+                <a:ea typeface="微软雅黑" panose="020B0503020204020204" pitchFamily="34" charset="-122"/>
+              </a:rPr>
+              <a:t>()</a:t>
+            </a:r>
+            <a:r>
+              <a:rPr lang="zh-CN" altLang="en-US" sz="2000" b="1" dirty="0">
+                <a:latin typeface="微软雅黑" panose="020B0503020204020204" pitchFamily="34" charset="-122"/>
+                <a:ea typeface="微软雅黑" panose="020B0503020204020204" pitchFamily="34" charset="-122"/>
+              </a:rPr>
+              <a:t> </a:t>
+            </a:r>
+            <a:r>
+              <a:rPr lang="en-US" altLang="zh-CN" sz="2000" b="1" dirty="0">
+                <a:latin typeface="微软雅黑" panose="020B0503020204020204" pitchFamily="34" charset="-122"/>
+                <a:ea typeface="微软雅黑" panose="020B0503020204020204" pitchFamily="34" charset="-122"/>
+              </a:rPr>
+              <a:t>-&gt; </a:t>
+            </a:r>
+            <a:r>
+              <a:rPr lang="zh-CN" altLang="en-US" sz="2000" b="1" dirty="0">
+                <a:latin typeface="微软雅黑" panose="020B0503020204020204" pitchFamily="34" charset="-122"/>
+                <a:ea typeface="微软雅黑" panose="020B0503020204020204" pitchFamily="34" charset="-122"/>
+              </a:rPr>
+              <a:t>虫子</a:t>
+            </a:r>
+          </a:p>
+        </p:txBody>
+      </p:sp>
+      <p:sp>
+        <p:nvSpPr>
+          <p:cNvPr id="89" name="文本框 88">
+            <a:extLst>
+              <a:ext uri="{FF2B5EF4-FFF2-40B4-BE49-F238E27FC236}">
+                <a16:creationId xmlns:a16="http://schemas.microsoft.com/office/drawing/2014/main" id="{9A9E2CEA-1630-3228-3BFE-1E485F621DEB}"/>
+              </a:ext>
+            </a:extLst>
+          </p:cNvPr>
+          <p:cNvSpPr txBox="1"/>
+          <p:nvPr/>
+        </p:nvSpPr>
+        <p:spPr>
+          <a:xfrm>
+            <a:off x="9607775" y="5289879"/>
+            <a:ext cx="2201244" cy="400110"/>
+          </a:xfrm>
+          <a:prstGeom prst="rect">
+            <a:avLst/>
+          </a:prstGeom>
+          <a:noFill/>
+        </p:spPr>
+        <p:txBody>
+          <a:bodyPr wrap="none" rtlCol="0">
+            <a:spAutoFit/>
+          </a:bodyPr>
+          <a:lstStyle/>
+          <a:p>
+            <a:r>
+              <a:rPr lang="zh-CN" altLang="en-US" sz="2000" b="1" dirty="0">
+                <a:latin typeface="微软雅黑" panose="020B0503020204020204" pitchFamily="34" charset="-122"/>
+                <a:ea typeface="微软雅黑" panose="020B0503020204020204" pitchFamily="34" charset="-122"/>
+              </a:rPr>
+              <a:t>小兰</a:t>
+            </a:r>
+            <a:r>
+              <a:rPr lang="en-US" altLang="zh-CN" sz="2000" b="1" dirty="0">
+                <a:latin typeface="微软雅黑" panose="020B0503020204020204" pitchFamily="34" charset="-122"/>
+                <a:ea typeface="微软雅黑" panose="020B0503020204020204" pitchFamily="34" charset="-122"/>
+              </a:rPr>
+              <a:t>.</a:t>
+            </a:r>
+            <a:r>
+              <a:rPr lang="zh-CN" altLang="en-US" sz="2000" b="1" dirty="0">
+                <a:latin typeface="微软雅黑" panose="020B0503020204020204" pitchFamily="34" charset="-122"/>
+                <a:ea typeface="微软雅黑" panose="020B0503020204020204" pitchFamily="34" charset="-122"/>
+              </a:rPr>
+              <a:t>吃</a:t>
+            </a:r>
+            <a:r>
+              <a:rPr lang="en-US" altLang="zh-CN" sz="2000" b="1" dirty="0">
+                <a:latin typeface="微软雅黑" panose="020B0503020204020204" pitchFamily="34" charset="-122"/>
+                <a:ea typeface="微软雅黑" panose="020B0503020204020204" pitchFamily="34" charset="-122"/>
+              </a:rPr>
+              <a:t>()</a:t>
+            </a:r>
+            <a:r>
+              <a:rPr lang="zh-CN" altLang="en-US" sz="2000" b="1" dirty="0">
+                <a:latin typeface="微软雅黑" panose="020B0503020204020204" pitchFamily="34" charset="-122"/>
+                <a:ea typeface="微软雅黑" panose="020B0503020204020204" pitchFamily="34" charset="-122"/>
+              </a:rPr>
+              <a:t> </a:t>
+            </a:r>
+            <a:r>
+              <a:rPr lang="en-US" altLang="zh-CN" sz="2000" b="1" dirty="0">
+                <a:latin typeface="微软雅黑" panose="020B0503020204020204" pitchFamily="34" charset="-122"/>
+                <a:ea typeface="微软雅黑" panose="020B0503020204020204" pitchFamily="34" charset="-122"/>
+              </a:rPr>
+              <a:t>-&gt; </a:t>
+            </a:r>
+            <a:r>
+              <a:rPr lang="zh-CN" altLang="en-US" sz="2000" b="1" dirty="0">
+                <a:latin typeface="微软雅黑" panose="020B0503020204020204" pitchFamily="34" charset="-122"/>
+                <a:ea typeface="微软雅黑" panose="020B0503020204020204" pitchFamily="34" charset="-122"/>
+              </a:rPr>
+              <a:t>虫子</a:t>
+            </a:r>
+          </a:p>
+        </p:txBody>
+      </p:sp>
+      <p:sp>
+        <p:nvSpPr>
+          <p:cNvPr id="90" name="文本框 89">
+            <a:extLst>
+              <a:ext uri="{FF2B5EF4-FFF2-40B4-BE49-F238E27FC236}">
+                <a16:creationId xmlns:a16="http://schemas.microsoft.com/office/drawing/2014/main" id="{EA672F7C-9789-20E6-58B4-889FD3D9D07F}"/>
+              </a:ext>
+            </a:extLst>
+          </p:cNvPr>
+          <p:cNvSpPr txBox="1"/>
+          <p:nvPr/>
+        </p:nvSpPr>
+        <p:spPr>
+          <a:xfrm>
+            <a:off x="8910120" y="166665"/>
+            <a:ext cx="3197698" cy="1123384"/>
+          </a:xfrm>
+          <a:prstGeom prst="rect">
+            <a:avLst/>
+          </a:prstGeom>
+          <a:noFill/>
+          <a:ln>
+            <a:solidFill>
+              <a:schemeClr val="tx1"/>
+            </a:solidFill>
+          </a:ln>
+        </p:spPr>
+        <p:txBody>
+          <a:bodyPr wrap="square" rtlCol="0">
+            <a:spAutoFit/>
+          </a:bodyPr>
+          <a:lstStyle/>
+          <a:p>
+            <a:pPr>
+              <a:spcAft>
+                <a:spcPts val="1800"/>
+              </a:spcAft>
+            </a:pPr>
+            <a:r>
+              <a:rPr lang="zh-CN" altLang="en-US" sz="2000" b="1" dirty="0">
+                <a:solidFill>
+                  <a:srgbClr val="FF0000"/>
+                </a:solidFill>
+                <a:latin typeface="微软雅黑" panose="020B0503020204020204" pitchFamily="34" charset="-122"/>
+                <a:ea typeface="微软雅黑" panose="020B0503020204020204" pitchFamily="34" charset="-122"/>
+              </a:rPr>
+              <a:t>多态 </a:t>
+            </a:r>
+            <a:r>
+              <a:rPr lang="en-US" altLang="zh-CN" sz="2000" b="1" dirty="0">
+                <a:solidFill>
+                  <a:srgbClr val="FF0000"/>
+                </a:solidFill>
+                <a:latin typeface="微软雅黑" panose="020B0503020204020204" pitchFamily="34" charset="-122"/>
+                <a:ea typeface="微软雅黑" panose="020B0503020204020204" pitchFamily="34" charset="-122"/>
+              </a:rPr>
+              <a:t>(Polymorphism):</a:t>
+            </a:r>
+          </a:p>
+          <a:p>
+            <a:pPr indent="457200">
+              <a:spcAft>
+                <a:spcPts val="1800"/>
+              </a:spcAft>
+            </a:pPr>
+            <a:r>
+              <a:rPr lang="zh-CN" altLang="en-US" sz="1600" b="1" dirty="0">
+                <a:latin typeface="微软雅黑" panose="020B0503020204020204" pitchFamily="34" charset="-122"/>
+                <a:ea typeface="微软雅黑" panose="020B0503020204020204" pitchFamily="34" charset="-122"/>
+              </a:rPr>
+              <a:t>不同类的对象对同一方法调用，表现出不同的行为。</a:t>
+            </a:r>
+          </a:p>
+        </p:txBody>
+      </p:sp>
+      <p:grpSp>
+        <p:nvGrpSpPr>
+          <p:cNvPr id="94" name="组合 93">
+            <a:extLst>
+              <a:ext uri="{FF2B5EF4-FFF2-40B4-BE49-F238E27FC236}">
+                <a16:creationId xmlns:a16="http://schemas.microsoft.com/office/drawing/2014/main" id="{BD914CEA-FD18-9727-28D3-A914697FEA24}"/>
+              </a:ext>
+            </a:extLst>
+          </p:cNvPr>
+          <p:cNvGrpSpPr/>
+          <p:nvPr/>
+        </p:nvGrpSpPr>
+        <p:grpSpPr>
+          <a:xfrm>
+            <a:off x="5753045" y="2151814"/>
+            <a:ext cx="595035" cy="574263"/>
+            <a:chOff x="5500965" y="2140136"/>
+            <a:chExt cx="595035" cy="574263"/>
+          </a:xfrm>
+        </p:grpSpPr>
+        <p:sp>
+          <p:nvSpPr>
+            <p:cNvPr id="91" name="文本框 90">
+              <a:extLst>
+                <a:ext uri="{FF2B5EF4-FFF2-40B4-BE49-F238E27FC236}">
+                  <a16:creationId xmlns:a16="http://schemas.microsoft.com/office/drawing/2014/main" id="{6DBA7CBB-587B-96FC-F619-7F03C024CCFD}"/>
+                </a:ext>
+              </a:extLst>
+            </p:cNvPr>
+            <p:cNvSpPr txBox="1"/>
+            <p:nvPr/>
+          </p:nvSpPr>
+          <p:spPr>
+            <a:xfrm>
+              <a:off x="5500965" y="2375845"/>
+              <a:ext cx="595035" cy="338554"/>
+            </a:xfrm>
+            <a:prstGeom prst="rect">
+              <a:avLst/>
+            </a:prstGeom>
+            <a:noFill/>
+          </p:spPr>
+          <p:txBody>
+            <a:bodyPr wrap="none" rtlCol="0">
+              <a:spAutoFit/>
+            </a:bodyPr>
+            <a:lstStyle/>
+            <a:p>
+              <a:r>
+                <a:rPr lang="zh-CN" altLang="en-US" sz="1600" b="1" dirty="0">
+                  <a:solidFill>
+                    <a:srgbClr val="FF0000"/>
+                  </a:solidFill>
+                  <a:latin typeface="微软雅黑" panose="020B0503020204020204" pitchFamily="34" charset="-122"/>
+                  <a:ea typeface="微软雅黑" panose="020B0503020204020204" pitchFamily="34" charset="-122"/>
+                </a:rPr>
+                <a:t>重写</a:t>
+              </a:r>
+            </a:p>
+          </p:txBody>
+        </p:sp>
+        <p:cxnSp>
+          <p:nvCxnSpPr>
+            <p:cNvPr id="93" name="直接箭头连接符 92">
+              <a:extLst>
+                <a:ext uri="{FF2B5EF4-FFF2-40B4-BE49-F238E27FC236}">
+                  <a16:creationId xmlns:a16="http://schemas.microsoft.com/office/drawing/2014/main" id="{8BC33FED-F279-C513-E587-D0273AF776E6}"/>
+                </a:ext>
+              </a:extLst>
+            </p:cNvPr>
+            <p:cNvCxnSpPr>
+              <a:stCxn id="91" idx="0"/>
+            </p:cNvCxnSpPr>
+            <p:nvPr/>
+          </p:nvCxnSpPr>
+          <p:spPr>
+            <a:xfrm flipV="1">
+              <a:off x="5798483" y="2140136"/>
+              <a:ext cx="226346" cy="235709"/>
+            </a:xfrm>
+            <a:prstGeom prst="straightConnector1">
+              <a:avLst/>
+            </a:prstGeom>
+            <a:ln w="57150">
+              <a:solidFill>
+                <a:srgbClr val="FF0000"/>
+              </a:solidFill>
+              <a:tailEnd type="triangle"/>
+            </a:ln>
+          </p:spPr>
+          <p:style>
+            <a:lnRef idx="2">
+              <a:schemeClr val="accent2"/>
+            </a:lnRef>
+            <a:fillRef idx="0">
+              <a:schemeClr val="accent2"/>
+            </a:fillRef>
+            <a:effectRef idx="1">
+              <a:schemeClr val="accent2"/>
+            </a:effectRef>
+            <a:fontRef idx="minor">
+              <a:schemeClr val="tx1"/>
+            </a:fontRef>
+          </p:style>
+        </p:cxnSp>
+      </p:grpSp>
+      <p:grpSp>
+        <p:nvGrpSpPr>
+          <p:cNvPr id="95" name="组合 94">
+            <a:extLst>
+              <a:ext uri="{FF2B5EF4-FFF2-40B4-BE49-F238E27FC236}">
+                <a16:creationId xmlns:a16="http://schemas.microsoft.com/office/drawing/2014/main" id="{786EC1B4-E46B-7298-09E6-54C97F062CE4}"/>
+              </a:ext>
+            </a:extLst>
+          </p:cNvPr>
+          <p:cNvGrpSpPr/>
+          <p:nvPr/>
+        </p:nvGrpSpPr>
+        <p:grpSpPr>
+          <a:xfrm>
+            <a:off x="5702820" y="3848361"/>
+            <a:ext cx="595035" cy="574263"/>
+            <a:chOff x="5500965" y="2140136"/>
+            <a:chExt cx="595035" cy="574263"/>
+          </a:xfrm>
+        </p:grpSpPr>
+        <p:sp>
+          <p:nvSpPr>
+            <p:cNvPr id="96" name="文本框 95">
+              <a:extLst>
+                <a:ext uri="{FF2B5EF4-FFF2-40B4-BE49-F238E27FC236}">
+                  <a16:creationId xmlns:a16="http://schemas.microsoft.com/office/drawing/2014/main" id="{59F628CA-1238-3BF7-FB37-D988B5212D70}"/>
+                </a:ext>
+              </a:extLst>
+            </p:cNvPr>
+            <p:cNvSpPr txBox="1"/>
+            <p:nvPr/>
+          </p:nvSpPr>
+          <p:spPr>
+            <a:xfrm>
+              <a:off x="5500965" y="2375845"/>
+              <a:ext cx="595035" cy="338554"/>
+            </a:xfrm>
+            <a:prstGeom prst="rect">
+              <a:avLst/>
+            </a:prstGeom>
+            <a:noFill/>
+          </p:spPr>
+          <p:txBody>
+            <a:bodyPr wrap="none" rtlCol="0">
+              <a:spAutoFit/>
+            </a:bodyPr>
+            <a:lstStyle/>
+            <a:p>
+              <a:r>
+                <a:rPr lang="zh-CN" altLang="en-US" sz="1600" b="1" dirty="0">
+                  <a:solidFill>
+                    <a:srgbClr val="FF0000"/>
+                  </a:solidFill>
+                  <a:latin typeface="微软雅黑" panose="020B0503020204020204" pitchFamily="34" charset="-122"/>
+                  <a:ea typeface="微软雅黑" panose="020B0503020204020204" pitchFamily="34" charset="-122"/>
+                </a:rPr>
+                <a:t>重写</a:t>
+              </a:r>
+            </a:p>
+          </p:txBody>
+        </p:sp>
+        <p:cxnSp>
+          <p:nvCxnSpPr>
+            <p:cNvPr id="97" name="直接箭头连接符 96">
+              <a:extLst>
+                <a:ext uri="{FF2B5EF4-FFF2-40B4-BE49-F238E27FC236}">
+                  <a16:creationId xmlns:a16="http://schemas.microsoft.com/office/drawing/2014/main" id="{2F7186DC-2343-6636-91EF-EEED413F27B9}"/>
+                </a:ext>
+              </a:extLst>
+            </p:cNvPr>
+            <p:cNvCxnSpPr>
+              <a:stCxn id="96" idx="0"/>
+            </p:cNvCxnSpPr>
+            <p:nvPr/>
+          </p:nvCxnSpPr>
+          <p:spPr>
+            <a:xfrm flipV="1">
+              <a:off x="5798483" y="2140136"/>
+              <a:ext cx="226346" cy="235709"/>
+            </a:xfrm>
+            <a:prstGeom prst="straightConnector1">
+              <a:avLst/>
+            </a:prstGeom>
+            <a:ln w="57150">
+              <a:solidFill>
+                <a:srgbClr val="FF0000"/>
+              </a:solidFill>
+              <a:tailEnd type="triangle"/>
+            </a:ln>
+          </p:spPr>
+          <p:style>
+            <a:lnRef idx="2">
+              <a:schemeClr val="accent2"/>
+            </a:lnRef>
+            <a:fillRef idx="0">
+              <a:schemeClr val="accent2"/>
+            </a:fillRef>
+            <a:effectRef idx="1">
+              <a:schemeClr val="accent2"/>
+            </a:effectRef>
+            <a:fontRef idx="minor">
+              <a:schemeClr val="tx1"/>
+            </a:fontRef>
+          </p:style>
+        </p:cxnSp>
+      </p:grpSp>
+      <p:grpSp>
+        <p:nvGrpSpPr>
+          <p:cNvPr id="98" name="组合 97">
+            <a:extLst>
+              <a:ext uri="{FF2B5EF4-FFF2-40B4-BE49-F238E27FC236}">
+                <a16:creationId xmlns:a16="http://schemas.microsoft.com/office/drawing/2014/main" id="{F6327ED9-7001-17F7-C933-FC46BE7EC17C}"/>
+              </a:ext>
+            </a:extLst>
+          </p:cNvPr>
+          <p:cNvGrpSpPr/>
+          <p:nvPr/>
+        </p:nvGrpSpPr>
+        <p:grpSpPr>
+          <a:xfrm>
+            <a:off x="4550621" y="5371733"/>
+            <a:ext cx="1129835" cy="338554"/>
+            <a:chOff x="5500965" y="2375845"/>
+            <a:chExt cx="1129835" cy="338554"/>
+          </a:xfrm>
+        </p:grpSpPr>
+        <p:sp>
+          <p:nvSpPr>
+            <p:cNvPr id="99" name="文本框 98">
+              <a:extLst>
+                <a:ext uri="{FF2B5EF4-FFF2-40B4-BE49-F238E27FC236}">
+                  <a16:creationId xmlns:a16="http://schemas.microsoft.com/office/drawing/2014/main" id="{F7235C03-083E-10AF-639A-C2B70B9552C1}"/>
+                </a:ext>
+              </a:extLst>
+            </p:cNvPr>
+            <p:cNvSpPr txBox="1"/>
+            <p:nvPr/>
+          </p:nvSpPr>
+          <p:spPr>
+            <a:xfrm>
+              <a:off x="5500965" y="2375845"/>
+              <a:ext cx="595035" cy="338554"/>
+            </a:xfrm>
+            <a:prstGeom prst="rect">
+              <a:avLst/>
+            </a:prstGeom>
+            <a:noFill/>
+          </p:spPr>
+          <p:txBody>
+            <a:bodyPr wrap="none" rtlCol="0">
+              <a:spAutoFit/>
+            </a:bodyPr>
+            <a:lstStyle/>
+            <a:p>
+              <a:r>
+                <a:rPr lang="zh-CN" altLang="en-US" sz="1600" b="1" dirty="0">
+                  <a:solidFill>
+                    <a:srgbClr val="FF0000"/>
+                  </a:solidFill>
+                  <a:latin typeface="微软雅黑" panose="020B0503020204020204" pitchFamily="34" charset="-122"/>
+                  <a:ea typeface="微软雅黑" panose="020B0503020204020204" pitchFamily="34" charset="-122"/>
+                </a:rPr>
+                <a:t>重写</a:t>
+              </a:r>
+            </a:p>
+          </p:txBody>
+        </p:sp>
+        <p:cxnSp>
+          <p:nvCxnSpPr>
+            <p:cNvPr id="100" name="直接箭头连接符 99">
+              <a:extLst>
+                <a:ext uri="{FF2B5EF4-FFF2-40B4-BE49-F238E27FC236}">
+                  <a16:creationId xmlns:a16="http://schemas.microsoft.com/office/drawing/2014/main" id="{89D6B9D9-8978-8B69-9158-B05FC33018E0}"/>
+                </a:ext>
+              </a:extLst>
+            </p:cNvPr>
+            <p:cNvCxnSpPr>
+              <a:cxnSpLocks/>
+            </p:cNvCxnSpPr>
+            <p:nvPr/>
+          </p:nvCxnSpPr>
+          <p:spPr>
+            <a:xfrm flipV="1">
+              <a:off x="6089152" y="2375845"/>
+              <a:ext cx="541648" cy="132302"/>
+            </a:xfrm>
+            <a:prstGeom prst="straightConnector1">
+              <a:avLst/>
+            </a:prstGeom>
+            <a:ln w="57150">
+              <a:solidFill>
+                <a:srgbClr val="FF0000"/>
+              </a:solidFill>
+              <a:tailEnd type="triangle"/>
+            </a:ln>
+          </p:spPr>
+          <p:style>
+            <a:lnRef idx="2">
+              <a:schemeClr val="accent2"/>
+            </a:lnRef>
+            <a:fillRef idx="0">
+              <a:schemeClr val="accent2"/>
+            </a:fillRef>
+            <a:effectRef idx="1">
+              <a:schemeClr val="accent2"/>
+            </a:effectRef>
+            <a:fontRef idx="minor">
+              <a:schemeClr val="tx1"/>
+            </a:fontRef>
+          </p:style>
+        </p:cxnSp>
+      </p:grpSp>
     </p:spTree>
     <p:extLst>
       <p:ext uri="{BB962C8B-B14F-4D97-AF65-F5344CB8AC3E}">
-        <p14:creationId xmlns:p14="http://schemas.microsoft.com/office/powerpoint/2010/main" val="2321555199"/>
+        <p14:creationId xmlns:p14="http://schemas.microsoft.com/office/powerpoint/2010/main" val="3839887210"/>
       </p:ext>
     </p:extLst>
   </p:cSld>

--- a/面向对象编程.pptx
+++ b/面向对象编程.pptx
@@ -5327,7 +5327,7 @@
                 <a:latin typeface="微软雅黑" panose="020B0503020204020204" pitchFamily="34" charset="-122"/>
                 <a:ea typeface="微软雅黑" panose="020B0503020204020204" pitchFamily="34" charset="-122"/>
               </a:rPr>
-              <a:t>spend_nama</a:t>
+              <a:t>spend_mana</a:t>
             </a:r>
             <a:r>
               <a:rPr lang="en-US" altLang="zh-CN" b="1" dirty="0">
@@ -17182,7 +17182,7 @@
                 <a:latin typeface="微软雅黑" panose="020B0503020204020204" pitchFamily="34" charset="-122"/>
                 <a:ea typeface="微软雅黑" panose="020B0503020204020204" pitchFamily="34" charset="-122"/>
               </a:rPr>
-              <a:t>虫子</a:t>
+              <a:t>鸟粮</a:t>
             </a:r>
           </a:p>
         </p:txBody>
@@ -17202,7 +17202,7 @@
         <p:spPr>
           <a:xfrm>
             <a:off x="9603808" y="3721922"/>
-            <a:ext cx="2201244" cy="400110"/>
+            <a:ext cx="1944763" cy="400110"/>
           </a:xfrm>
           <a:prstGeom prst="rect">
             <a:avLst/>
@@ -17262,7 +17262,7 @@
                 <a:latin typeface="微软雅黑" panose="020B0503020204020204" pitchFamily="34" charset="-122"/>
                 <a:ea typeface="微软雅黑" panose="020B0503020204020204" pitchFamily="34" charset="-122"/>
               </a:rPr>
-              <a:t>虫子</a:t>
+              <a:t>鱼</a:t>
             </a:r>
           </a:p>
         </p:txBody>
@@ -17342,7 +17342,7 @@
                 <a:latin typeface="微软雅黑" panose="020B0503020204020204" pitchFamily="34" charset="-122"/>
                 <a:ea typeface="微软雅黑" panose="020B0503020204020204" pitchFamily="34" charset="-122"/>
               </a:rPr>
-              <a:t>虫子</a:t>
+              <a:t>兔子</a:t>
             </a:r>
           </a:p>
         </p:txBody>
@@ -17437,9 +17437,9 @@
         <p:grpSpPr>
           <a:xfrm>
             <a:off x="5753045" y="2151814"/>
-            <a:ext cx="595035" cy="574263"/>
+            <a:ext cx="1678793" cy="574263"/>
             <a:chOff x="5500965" y="2140136"/>
-            <a:chExt cx="595035" cy="574263"/>
+            <a:chExt cx="1678793" cy="574263"/>
           </a:xfrm>
         </p:grpSpPr>
         <p:sp>
@@ -17457,7 +17457,7 @@
           <p:spPr>
             <a:xfrm>
               <a:off x="5500965" y="2375845"/>
-              <a:ext cx="595035" cy="338554"/>
+              <a:ext cx="1678793" cy="338554"/>
             </a:xfrm>
             <a:prstGeom prst="rect">
               <a:avLst/>
@@ -17478,8 +17478,25 @@
                   <a:latin typeface="微软雅黑" panose="020B0503020204020204" pitchFamily="34" charset="-122"/>
                   <a:ea typeface="微软雅黑" panose="020B0503020204020204" pitchFamily="34" charset="-122"/>
                 </a:rPr>
-                <a:t>重写</a:t>
+                <a:t>重写 </a:t>
               </a:r>
+              <a:r>
+                <a:rPr lang="en-US" altLang="zh-CN" sz="1600" b="1" dirty="0">
+                  <a:solidFill>
+                    <a:srgbClr val="FF0000"/>
+                  </a:solidFill>
+                  <a:latin typeface="微软雅黑" panose="020B0503020204020204" pitchFamily="34" charset="-122"/>
+                  <a:ea typeface="微软雅黑" panose="020B0503020204020204" pitchFamily="34" charset="-122"/>
+                </a:rPr>
+                <a:t>(override)</a:t>
+              </a:r>
+              <a:endParaRPr lang="zh-CN" altLang="en-US" sz="1600" b="1" dirty="0">
+                <a:solidFill>
+                  <a:srgbClr val="FF0000"/>
+                </a:solidFill>
+                <a:latin typeface="微软雅黑" panose="020B0503020204020204" pitchFamily="34" charset="-122"/>
+                <a:ea typeface="微软雅黑" panose="020B0503020204020204" pitchFamily="34" charset="-122"/>
+              </a:endParaRPr>
             </a:p>
           </p:txBody>
         </p:sp>
@@ -17498,9 +17515,9 @@
             <p:nvPr/>
           </p:nvCxnSpPr>
           <p:spPr>
-            <a:xfrm flipV="1">
-              <a:off x="5798483" y="2140136"/>
-              <a:ext cx="226346" cy="235709"/>
+            <a:xfrm flipH="1" flipV="1">
+              <a:off x="6024829" y="2140136"/>
+              <a:ext cx="315533" cy="235709"/>
             </a:xfrm>
             <a:prstGeom prst="straightConnector1">
               <a:avLst/>
@@ -17543,9 +17560,9 @@
         <p:grpSpPr>
           <a:xfrm>
             <a:off x="5702820" y="3848361"/>
-            <a:ext cx="595035" cy="574263"/>
+            <a:ext cx="1678793" cy="574263"/>
             <a:chOff x="5500965" y="2140136"/>
-            <a:chExt cx="595035" cy="574263"/>
+            <a:chExt cx="1678793" cy="574263"/>
           </a:xfrm>
         </p:grpSpPr>
         <p:sp>
@@ -17563,7 +17580,7 @@
           <p:spPr>
             <a:xfrm>
               <a:off x="5500965" y="2375845"/>
-              <a:ext cx="595035" cy="338554"/>
+              <a:ext cx="1678793" cy="338554"/>
             </a:xfrm>
             <a:prstGeom prst="rect">
               <a:avLst/>
@@ -17584,8 +17601,25 @@
                   <a:latin typeface="微软雅黑" panose="020B0503020204020204" pitchFamily="34" charset="-122"/>
                   <a:ea typeface="微软雅黑" panose="020B0503020204020204" pitchFamily="34" charset="-122"/>
                 </a:rPr>
-                <a:t>重写</a:t>
+                <a:t>重写 </a:t>
               </a:r>
+              <a:r>
+                <a:rPr lang="en-US" altLang="zh-CN" sz="1600" b="1" dirty="0">
+                  <a:solidFill>
+                    <a:srgbClr val="FF0000"/>
+                  </a:solidFill>
+                  <a:latin typeface="微软雅黑" panose="020B0503020204020204" pitchFamily="34" charset="-122"/>
+                  <a:ea typeface="微软雅黑" panose="020B0503020204020204" pitchFamily="34" charset="-122"/>
+                </a:rPr>
+                <a:t>(override)</a:t>
+              </a:r>
+              <a:endParaRPr lang="zh-CN" altLang="en-US" sz="1600" b="1" dirty="0">
+                <a:solidFill>
+                  <a:srgbClr val="FF0000"/>
+                </a:solidFill>
+                <a:latin typeface="微软雅黑" panose="020B0503020204020204" pitchFamily="34" charset="-122"/>
+                <a:ea typeface="微软雅黑" panose="020B0503020204020204" pitchFamily="34" charset="-122"/>
+              </a:endParaRPr>
             </a:p>
           </p:txBody>
         </p:sp>
@@ -17604,9 +17638,9 @@
             <p:nvPr/>
           </p:nvCxnSpPr>
           <p:spPr>
-            <a:xfrm flipV="1">
-              <a:off x="5798483" y="2140136"/>
-              <a:ext cx="226346" cy="235709"/>
+            <a:xfrm flipH="1" flipV="1">
+              <a:off x="6024829" y="2140136"/>
+              <a:ext cx="315533" cy="235709"/>
             </a:xfrm>
             <a:prstGeom prst="straightConnector1">
               <a:avLst/>
@@ -17648,10 +17682,10 @@
         </p:nvGrpSpPr>
         <p:grpSpPr>
           <a:xfrm>
-            <a:off x="4550621" y="5371733"/>
-            <a:ext cx="1129835" cy="338554"/>
-            <a:chOff x="5500965" y="2375845"/>
-            <a:chExt cx="1129835" cy="338554"/>
+            <a:off x="4112418" y="5359511"/>
+            <a:ext cx="1678793" cy="510992"/>
+            <a:chOff x="5500965" y="2203407"/>
+            <a:chExt cx="1678793" cy="510992"/>
           </a:xfrm>
         </p:grpSpPr>
         <p:sp>
@@ -17669,7 +17703,7 @@
           <p:spPr>
             <a:xfrm>
               <a:off x="5500965" y="2375845"/>
-              <a:ext cx="595035" cy="338554"/>
+              <a:ext cx="1678793" cy="338554"/>
             </a:xfrm>
             <a:prstGeom prst="rect">
               <a:avLst/>
@@ -17690,8 +17724,25 @@
                   <a:latin typeface="微软雅黑" panose="020B0503020204020204" pitchFamily="34" charset="-122"/>
                   <a:ea typeface="微软雅黑" panose="020B0503020204020204" pitchFamily="34" charset="-122"/>
                 </a:rPr>
-                <a:t>重写</a:t>
+                <a:t>重写 </a:t>
               </a:r>
+              <a:r>
+                <a:rPr lang="en-US" altLang="zh-CN" sz="1600" b="1" dirty="0">
+                  <a:solidFill>
+                    <a:srgbClr val="FF0000"/>
+                  </a:solidFill>
+                  <a:latin typeface="微软雅黑" panose="020B0503020204020204" pitchFamily="34" charset="-122"/>
+                  <a:ea typeface="微软雅黑" panose="020B0503020204020204" pitchFamily="34" charset="-122"/>
+                </a:rPr>
+                <a:t>(override)</a:t>
+              </a:r>
+              <a:endParaRPr lang="zh-CN" altLang="en-US" sz="1600" b="1" dirty="0">
+                <a:solidFill>
+                  <a:srgbClr val="FF0000"/>
+                </a:solidFill>
+                <a:latin typeface="微软雅黑" panose="020B0503020204020204" pitchFamily="34" charset="-122"/>
+                <a:ea typeface="微软雅黑" panose="020B0503020204020204" pitchFamily="34" charset="-122"/>
+              </a:endParaRPr>
             </a:p>
           </p:txBody>
         </p:sp>
@@ -17711,7 +17762,7 @@
           </p:nvCxnSpPr>
           <p:spPr>
             <a:xfrm flipV="1">
-              <a:off x="6089152" y="2375845"/>
+              <a:off x="6501885" y="2203407"/>
               <a:ext cx="541648" cy="132302"/>
             </a:xfrm>
             <a:prstGeom prst="straightConnector1">
